--- a/docs/reports/lh2-database-syndication-rev0.pptx
+++ b/docs/reports/lh2-database-syndication-rev0.pptx
@@ -25,9 +25,12 @@
     <p:sldId id="273" r:id="rId19"/>
     <p:sldId id="274" r:id="rId20"/>
     <p:sldId id="275" r:id="rId21"/>
+    <p:sldId id="276" r:id="rId22"/>
+    <p:sldId id="277" r:id="rId23"/>
+    <p:sldId id="278" r:id="rId24"/>
   </p:sldIdLst>
   <p:notesMasterIdLst>
-    <p:notesMasterId r:id="rId22"/>
+    <p:notesMasterId r:id="rId25"/>
   </p:notesMasterIdLst>
   <p:sldSz cx="12192000" cy="6858000"/>
   <p:notesSz cx="6858000" cy="12192000"/>
@@ -126,17 +129,17 @@
   <p:extLst>
     <p:ext uri="{521415D9-36F7-43E2-AB2F-B90AF26B5E84}">
       <p14:sectionLst xmlns:p14="http://schemas.microsoft.com/office/powerpoint/2010/main">
-        <p14:section name="Cover" id="{de463dc9-de89-9772-4556-cd0f424916ae}">
+        <p14:section name="Cover" id="{8bac8abd-6363-54f6-6442-5da2d676d8d3}">
           <p14:sldIdLst>
             <p14:sldId id="256"/>
           </p14:sldIdLst>
         </p14:section>
-        <p14:section name="Overview" id="{1e6e753b-0998-f507-a4c0-c0ad1ca15c38}">
+        <p14:section name="Overview" id="{8ac7c359-ddb4-c94f-122f-f01eff3db5d3}">
           <p14:sldIdLst>
             <p14:sldId id="257"/>
           </p14:sldIdLst>
         </p14:section>
-        <p14:section name="Technology" id="{57ba3096-9388-32c0-09ad-3d95b74de2e5}">
+        <p14:section name="Technology" id="{789fd99e-fa8b-e8b9-594e-f15048d46e3c}">
           <p14:sldIdLst>
             <p14:sldId id="258"/>
             <p14:sldId id="259"/>
@@ -144,25 +147,25 @@
             <p14:sldId id="261"/>
           </p14:sldIdLst>
         </p14:section>
-        <p14:section name="Infrastructure" id="{cc231d0c-45e7-c0dd-b0bf-8f236d7ff00e}">
+        <p14:section name="Infrastructure" id="{637b8019-4785-f415-b624-8948e10e45fe}">
           <p14:sldIdLst>
             <p14:sldId id="262"/>
             <p14:sldId id="263"/>
             <p14:sldId id="264"/>
           </p14:sldIdLst>
         </p14:section>
-        <p14:section name="Cost" id="{dac76e45-586e-b7b3-9aaf-dd7774f37862}">
+        <p14:section name="Cost" id="{fee1db27-0823-f20d-9354-ab8ec59d2f25}">
           <p14:sldIdLst>
             <p14:sldId id="265"/>
           </p14:sldIdLst>
         </p14:section>
-        <p14:section name="Regulation and challenges" id="{111b6d8c-6834-2abb-030d-c014b4a9475c}">
+        <p14:section name="Regulation and challenges" id="{0681d1c2-1212-4230-95f4-faebc3ddcd05}">
           <p14:sldIdLst>
             <p14:sldId id="266"/>
             <p14:sldId id="267"/>
           </p14:sldIdLst>
         </p14:section>
-        <p14:section name="LH2 vs NH3" id="{b5d218cd-a4cd-708a-17bd-6e5e019ed2ca}">
+        <p14:section name="LH2 vs NH3" id="{6fddbd15-3061-4f7d-245b-024d12c17c3a}">
           <p14:sldIdLst>
             <p14:sldId id="268"/>
             <p14:sldId id="269"/>
@@ -171,11 +174,14 @@
             <p14:sldId id="272"/>
             <p14:sldId id="273"/>
             <p14:sldId id="274"/>
+            <p14:sldId id="275"/>
+            <p14:sldId id="276"/>
+            <p14:sldId id="277"/>
           </p14:sldIdLst>
         </p14:section>
-        <p14:section name="Close" id="{7a4895d5-8240-f91a-79cd-6f8229310257}">
+        <p14:section name="Close" id="{c41b4640-2ab9-8c02-001d-26a911700304}">
           <p14:sldIdLst>
-            <p14:sldId id="275"/>
+            <p14:sldId id="278"/>
           </p14:sldIdLst>
         </p14:section>
       </p14:sectionLst>
@@ -1988,6 +1994,1029 @@
 </file>
 
 <file path=ppt/charts/chart6.xml><?xml version="1.0" encoding="utf-8"?>
+<c:chartSpace xmlns:c="http://schemas.openxmlformats.org/drawingml/2006/chart" xmlns:a="http://schemas.openxmlformats.org/drawingml/2006/main" xmlns:r="http://schemas.openxmlformats.org/officeDocument/2006/relationships">
+  <c:date1904 val="0"/>
+  <c:roundedCorners val="1"/>
+  <c:chart>
+    <c:autoTitleDeleted val="1"/>
+    <c:plotArea>
+      <c:layout/>
+      <c:barChart>
+        <c:barDir val="bar"/>
+        <c:grouping val="stacked"/>
+        <c:varyColors val="0"/>
+        <c:ser>
+          <c:idx val="0"/>
+          <c:order val="0"/>
+          <c:tx>
+            <c:strRef>
+              <c:f>Sheet1!$B$1</c:f>
+              <c:strCache>
+                <c:ptCount val="1"/>
+                <c:pt idx="0">
+                  <c:v>Electrolysis of the hydrogen consumed</c:v>
+                </c:pt>
+              </c:strCache>
+            </c:strRef>
+          </c:tx>
+          <c:spPr>
+            <a:solidFill>
+              <a:srgbClr val="4A3AA7"/>
+            </a:solidFill>
+            <a:effectLst/>
+          </c:spPr>
+          <c:invertIfNegative val="0"/>
+          <c:dLbls>
+            <c:numFmt formatCode="0.00" sourceLinked="0"/>
+            <c:txPr>
+              <a:bodyPr/>
+              <a:lstStyle/>
+              <a:p>
+                <a:pPr>
+                  <a:defRPr b="1" i="0" strike="noStrike" sz="1200" u="none">
+                    <a:solidFill>
+                      <a:srgbClr val="FFFFFF"/>
+                    </a:solidFill>
+                    <a:latin typeface="+mn-lt"/>
+                  </a:defRPr>
+                </a:pPr>
+              </a:p>
+            </c:txPr>
+            <c:dLblPos val="ctr"/>
+            <c:showLegendKey val="0"/>
+            <c:showVal val="1"/>
+            <c:showCatName val="0"/>
+            <c:showSerName val="0"/>
+            <c:showPercent val="0"/>
+            <c:showBubbleSize val="0"/>
+            <c:showLeaderLines val="0"/>
+          </c:dLbls>
+          <c:cat>
+            <c:multiLvlStrRef>
+              <c:f>Sheet1!$A$2:$A$4</c:f>
+              <c:multiLvlStrCache>
+                <c:ptCount val="3"/>
+                <c:lvl>
+                  <c:pt idx="0">
+                    <c:v>NH₃, clean-fuel cracker · 88.80</c:v>
+                  </c:pt>
+                  <c:pt idx="1">
+                    <c:v>NH₃, gas-fired cracker · 81.00</c:v>
+                  </c:pt>
+                  <c:pt idx="2">
+                    <c:v>LH₂ route · 78.49</c:v>
+                  </c:pt>
+                </c:lvl>
+              </c:multiLvlStrCache>
+            </c:multiLvlStrRef>
+          </c:cat>
+          <c:val>
+            <c:numRef>
+              <c:f>Sheet1!$B$2:$B$4</c:f>
+              <c:numCache>
+                <c:formatCode>General</c:formatCode>
+                <c:ptCount val="3"/>
+                <c:pt idx="0">
+                  <c:v>77.14</c:v>
+                </c:pt>
+                <c:pt idx="1">
+                  <c:v>69.64</c:v>
+                </c:pt>
+                <c:pt idx="2">
+                  <c:v>65.22</c:v>
+                </c:pt>
+              </c:numCache>
+            </c:numRef>
+          </c:val>
+        </c:ser>
+        <c:ser>
+          <c:idx val="1"/>
+          <c:order val="1"/>
+          <c:tx>
+            <c:strRef>
+              <c:f>Sheet1!$C$1</c:f>
+              <c:strCache>
+                <c:ptCount val="1"/>
+                <c:pt idx="0">
+                  <c:v>Rest of the chain (Section 13.6)</c:v>
+                </c:pt>
+              </c:strCache>
+            </c:strRef>
+          </c:tx>
+          <c:spPr>
+            <a:solidFill>
+              <a:srgbClr val="2977D6"/>
+            </a:solidFill>
+            <a:effectLst/>
+          </c:spPr>
+          <c:invertIfNegative val="0"/>
+          <c:dLbls>
+            <c:numFmt formatCode="0.00" sourceLinked="0"/>
+            <c:txPr>
+              <a:bodyPr/>
+              <a:lstStyle/>
+              <a:p>
+                <a:pPr>
+                  <a:defRPr b="1" i="0" strike="noStrike" sz="1200" u="none">
+                    <a:solidFill>
+                      <a:srgbClr val="FFFFFF"/>
+                    </a:solidFill>
+                    <a:latin typeface="+mn-lt"/>
+                  </a:defRPr>
+                </a:pPr>
+              </a:p>
+            </c:txPr>
+            <c:dLblPos val="ctr"/>
+            <c:showLegendKey val="0"/>
+            <c:showVal val="1"/>
+            <c:showCatName val="0"/>
+            <c:showSerName val="0"/>
+            <c:showPercent val="0"/>
+            <c:showBubbleSize val="0"/>
+            <c:showLeaderLines val="0"/>
+          </c:dLbls>
+          <c:cat>
+            <c:multiLvlStrRef>
+              <c:f>Sheet1!$A$2:$A$4</c:f>
+              <c:multiLvlStrCache>
+                <c:ptCount val="3"/>
+                <c:lvl>
+                  <c:pt idx="0">
+                    <c:v>NH₃, clean-fuel cracker · 88.80</c:v>
+                  </c:pt>
+                  <c:pt idx="1">
+                    <c:v>NH₃, gas-fired cracker · 81.00</c:v>
+                  </c:pt>
+                  <c:pt idx="2">
+                    <c:v>LH₂ route · 78.49</c:v>
+                  </c:pt>
+                </c:lvl>
+              </c:multiLvlStrCache>
+            </c:multiLvlStrRef>
+          </c:cat>
+          <c:val>
+            <c:numRef>
+              <c:f>Sheet1!$C$2:$C$4</c:f>
+              <c:numCache>
+                <c:formatCode>General</c:formatCode>
+                <c:ptCount val="3"/>
+                <c:pt idx="0">
+                  <c:v>11.66</c:v>
+                </c:pt>
+                <c:pt idx="1">
+                  <c:v>11.36</c:v>
+                </c:pt>
+                <c:pt idx="2">
+                  <c:v>13.27</c:v>
+                </c:pt>
+              </c:numCache>
+            </c:numRef>
+          </c:val>
+        </c:ser>
+        <c:dLbls>
+          <c:numFmt formatCode="0.00" sourceLinked="0"/>
+          <c:txPr>
+            <a:bodyPr/>
+            <a:lstStyle/>
+            <a:p>
+              <a:pPr>
+                <a:defRPr b="1" i="0" strike="noStrike" sz="1200" u="none">
+                  <a:solidFill>
+                    <a:srgbClr val="FFFFFF"/>
+                  </a:solidFill>
+                  <a:latin typeface="+mn-lt"/>
+                </a:defRPr>
+              </a:pPr>
+            </a:p>
+          </c:txPr>
+          <c:dLblPos val="ctr"/>
+          <c:showLegendKey val="0"/>
+          <c:showVal val="1"/>
+          <c:showCatName val="0"/>
+          <c:showSerName val="0"/>
+          <c:showPercent val="0"/>
+          <c:showBubbleSize val="0"/>
+          <c:showLeaderLines val="0"/>
+        </c:dLbls>
+        <c:gapWidth val="45"/>
+        <c:overlap val="100"/>
+        <c:axId val="2094734554"/>
+        <c:axId val="2094734552"/>
+        <c:axId val="2094734556"/>
+      </c:barChart>
+      <c:catAx>
+        <c:axId val="2094734554"/>
+        <c:scaling>
+          <c:orientation val="minMax"/>
+        </c:scaling>
+        <c:delete val="0"/>
+        <c:axPos val="l"/>
+        <c:numFmt formatCode="General" sourceLinked="1"/>
+        <c:majorTickMark val="out"/>
+        <c:minorTickMark val="none"/>
+        <c:tickLblPos val="nextTo"/>
+        <c:spPr>
+          <a:ln w="12700" cap="flat">
+            <a:solidFill>
+              <a:srgbClr val="888888"/>
+            </a:solidFill>
+            <a:prstDash val="solid"/>
+            <a:round/>
+          </a:ln>
+        </c:spPr>
+        <c:txPr>
+          <a:bodyPr/>
+          <a:lstStyle/>
+          <a:p>
+            <a:pPr>
+              <a:defRPr sz="1300" b="0" i="0" u="none" strike="noStrike">
+                <a:solidFill>
+                  <a:srgbClr val="3A3935"/>
+                </a:solidFill>
+                <a:latin typeface="+mn-lt"/>
+              </a:defRPr>
+            </a:pPr>
+            <a:endParaRPr lang="en-US"/>
+          </a:p>
+        </c:txPr>
+        <c:crossAx val="2094734552"/>
+        <c:crosses val="autoZero"/>
+        <c:auto val="1"/>
+        <c:lblAlgn val="ctr"/>
+        <c:noMultiLvlLbl val="1"/>
+      </c:catAx>
+      <c:valAx>
+        <c:axId val="2094734552"/>
+        <c:scaling>
+          <c:orientation val="minMax"/>
+          <c:max val="100"/>
+          <c:min val="0"/>
+        </c:scaling>
+        <c:delete val="0"/>
+        <c:axPos val="b"/>
+        <c:majorGridlines>
+          <c:spPr>
+            <a:ln w="9525" cap="flat">
+              <a:solidFill>
+                <a:srgbClr val="E8E8E4"/>
+              </a:solidFill>
+              <a:prstDash val="solid"/>
+              <a:round/>
+            </a:ln>
+          </c:spPr>
+        </c:majorGridlines>
+        <c:numFmt formatCode="0" sourceLinked="0"/>
+        <c:majorTickMark val="out"/>
+        <c:minorTickMark val="none"/>
+        <c:tickLblPos val="low"/>
+        <c:spPr>
+          <a:ln w="12700" cap="flat">
+            <a:solidFill>
+              <a:srgbClr val="888888"/>
+            </a:solidFill>
+            <a:prstDash val="solid"/>
+            <a:round/>
+          </a:ln>
+        </c:spPr>
+        <c:txPr>
+          <a:bodyPr/>
+          <a:lstStyle/>
+          <a:p>
+            <a:pPr>
+              <a:defRPr sz="1100" b="0" i="0" u="none" strike="noStrike">
+                <a:solidFill>
+                  <a:srgbClr val="3A3935"/>
+                </a:solidFill>
+                <a:latin typeface="+mn-lt"/>
+              </a:defRPr>
+            </a:pPr>
+            <a:endParaRPr lang="en-US"/>
+          </a:p>
+        </c:txPr>
+        <c:crossAx val="2094734554"/>
+        <c:crosses val="autoZero"/>
+        <c:crossBetween val="between"/>
+        <c:majorUnit val="20"/>
+      </c:valAx>
+      <c:spPr>
+        <a:noFill/>
+        <a:ln>
+          <a:noFill/>
+        </a:ln>
+        <a:effectLst/>
+      </c:spPr>
+    </c:plotArea>
+    <c:legend>
+      <c:legendPos val="t"/>
+      <c:overlay val="0"/>
+      <c:txPr>
+        <a:bodyPr/>
+        <a:lstStyle/>
+        <a:p>
+          <a:pPr>
+            <a:defRPr sz="1200">
+              <a:solidFill>
+                <a:srgbClr val="3A3935"/>
+              </a:solidFill>
+              <a:latin typeface="+mn-lt"/>
+              <a:cs typeface="+mn-lt"/>
+            </a:defRPr>
+          </a:pPr>
+          <a:endParaRPr lang="en-US"/>
+        </a:p>
+      </c:txPr>
+    </c:legend>
+    <c:plotVisOnly val="1"/>
+    <c:dispBlanksAs val="span"/>
+  </c:chart>
+  <c:spPr>
+    <a:noFill/>
+    <a:ln>
+      <a:noFill/>
+    </a:ln>
+    <a:effectLst/>
+  </c:spPr>
+  <c:externalData r:id="rId1">
+    <c:autoUpdate val="0"/>
+  </c:externalData>
+</c:chartSpace>
+</file>
+
+<file path=ppt/charts/chart7.xml><?xml version="1.0" encoding="utf-8"?>
+<c:chartSpace xmlns:c="http://schemas.openxmlformats.org/drawingml/2006/chart" xmlns:a="http://schemas.openxmlformats.org/drawingml/2006/main" xmlns:r="http://schemas.openxmlformats.org/officeDocument/2006/relationships">
+  <c:date1904 val="0"/>
+  <c:roundedCorners val="1"/>
+  <c:chart>
+    <c:autoTitleDeleted val="1"/>
+    <c:plotArea>
+      <c:layout/>
+      <c:lineChart>
+        <c:varyColors val="0"/>
+        <c:ser>
+          <c:idx val="0"/>
+          <c:order val="0"/>
+          <c:tx>
+            <c:strRef>
+              <c:f>Sheet1!$B$1</c:f>
+              <c:strCache>
+                <c:ptCount val="1"/>
+                <c:pt idx="0">
+                  <c:v>Gas-fired NH₃, overlap removed</c:v>
+                </c:pt>
+              </c:strCache>
+            </c:strRef>
+          </c:tx>
+          <c:spPr>
+            <a:solidFill>
+              <a:srgbClr val="2977D6"/>
+            </a:solidFill>
+            <a:ln w="38100" cap="flat">
+              <a:solidFill>
+                <a:srgbClr val="2977D6"/>
+              </a:solidFill>
+              <a:prstDash val="solid"/>
+              <a:round/>
+            </a:ln>
+            <a:effectLst/>
+          </c:spPr>
+          <c:invertIfNegative val="0"/>
+          <c:dLbls>
+            <c:numFmt formatCode="#,##0" sourceLinked="0"/>
+            <c:txPr>
+              <a:bodyPr/>
+              <a:lstStyle/>
+              <a:p>
+                <a:pPr>
+                  <a:defRPr b="0" i="0" strike="noStrike" sz="1200" u="none">
+                    <a:solidFill>
+                      <a:srgbClr val="3A3935"/>
+                    </a:solidFill>
+                    <a:latin typeface="+mn-lt"/>
+                  </a:defRPr>
+                </a:pPr>
+              </a:p>
+            </c:txPr>
+            <c:showLegendKey val="0"/>
+            <c:showVal val="0"/>
+            <c:showCatName val="0"/>
+            <c:showSerName val="0"/>
+            <c:showPercent val="0"/>
+            <c:showBubbleSize val="0"/>
+            <c:showLeaderLines val="0"/>
+          </c:dLbls>
+          <c:marker>
+            <c:symbol val="none"/>
+            <c:size val="6"/>
+            <c:spPr>
+              <a:solidFill>
+                <a:srgbClr val="2977D6"/>
+              </a:solidFill>
+              <a:ln w="9525" cap="flat">
+                <a:solidFill>
+                  <a:srgbClr val="2977D6"/>
+                </a:solidFill>
+                <a:prstDash val="solid"/>
+                <a:round/>
+              </a:ln>
+              <a:effectLst/>
+            </c:spPr>
+          </c:marker>
+          <c:cat>
+            <c:multiLvlStrRef>
+              <c:f>Sheet1!$A$2:$A$12</c:f>
+              <c:multiLvlStrCache>
+                <c:ptCount val="11"/>
+                <c:lvl>
+                  <c:pt idx="0">
+                    <c:v>20</c:v>
+                  </c:pt>
+                  <c:pt idx="1">
+                    <c:v>25</c:v>
+                  </c:pt>
+                  <c:pt idx="2">
+                    <c:v>30</c:v>
+                  </c:pt>
+                  <c:pt idx="3">
+                    <c:v>35</c:v>
+                  </c:pt>
+                  <c:pt idx="4">
+                    <c:v>40</c:v>
+                  </c:pt>
+                  <c:pt idx="5">
+                    <c:v>45</c:v>
+                  </c:pt>
+                  <c:pt idx="6">
+                    <c:v>50</c:v>
+                  </c:pt>
+                  <c:pt idx="7">
+                    <c:v>55</c:v>
+                  </c:pt>
+                  <c:pt idx="8">
+                    <c:v>60</c:v>
+                  </c:pt>
+                  <c:pt idx="9">
+                    <c:v>65</c:v>
+                  </c:pt>
+                  <c:pt idx="10">
+                    <c:v>70</c:v>
+                  </c:pt>
+                </c:lvl>
+              </c:multiLvlStrCache>
+            </c:multiLvlStrRef>
+          </c:cat>
+          <c:val>
+            <c:numRef>
+              <c:f>Sheet1!$B$2:$B$12</c:f>
+              <c:numCache>
+                <c:formatCode>General</c:formatCode>
+                <c:ptCount val="11"/>
+                <c:pt idx="0">
+                  <c:v>-2.2</c:v>
+                </c:pt>
+                <c:pt idx="1">
+                  <c:v>-1.83</c:v>
+                </c:pt>
+                <c:pt idx="2">
+                  <c:v>-1.46</c:v>
+                </c:pt>
+                <c:pt idx="3">
+                  <c:v>-1.09</c:v>
+                </c:pt>
+                <c:pt idx="4">
+                  <c:v>-0.72</c:v>
+                </c:pt>
+                <c:pt idx="5">
+                  <c:v>-0.35</c:v>
+                </c:pt>
+                <c:pt idx="6">
+                  <c:v>0.02</c:v>
+                </c:pt>
+                <c:pt idx="7">
+                  <c:v>0.39</c:v>
+                </c:pt>
+                <c:pt idx="8">
+                  <c:v>0.76</c:v>
+                </c:pt>
+                <c:pt idx="9">
+                  <c:v>1.12</c:v>
+                </c:pt>
+                <c:pt idx="10">
+                  <c:v>1.49</c:v>
+                </c:pt>
+              </c:numCache>
+            </c:numRef>
+          </c:val>
+          <c:smooth val="0"/>
+        </c:ser>
+        <c:ser>
+          <c:idx val="1"/>
+          <c:order val="1"/>
+          <c:tx>
+            <c:strRef>
+              <c:f>Sheet1!$C$1</c:f>
+              <c:strCache>
+                <c:ptCount val="1"/>
+                <c:pt idx="0">
+                  <c:v>Gas-fired NH₃, as computed</c:v>
+                </c:pt>
+              </c:strCache>
+            </c:strRef>
+          </c:tx>
+          <c:spPr>
+            <a:solidFill>
+              <a:srgbClr val="9DBFEA"/>
+            </a:solidFill>
+            <a:ln w="38100" cap="flat">
+              <a:solidFill>
+                <a:srgbClr val="9DBFEA"/>
+              </a:solidFill>
+              <a:prstDash val="solid"/>
+              <a:round/>
+            </a:ln>
+            <a:effectLst/>
+          </c:spPr>
+          <c:invertIfNegative val="0"/>
+          <c:dLbls>
+            <c:numFmt formatCode="#,##0" sourceLinked="0"/>
+            <c:txPr>
+              <a:bodyPr/>
+              <a:lstStyle/>
+              <a:p>
+                <a:pPr>
+                  <a:defRPr b="0" i="0" strike="noStrike" sz="1200" u="none">
+                    <a:solidFill>
+                      <a:srgbClr val="3A3935"/>
+                    </a:solidFill>
+                    <a:latin typeface="+mn-lt"/>
+                  </a:defRPr>
+                </a:pPr>
+              </a:p>
+            </c:txPr>
+            <c:showLegendKey val="0"/>
+            <c:showVal val="0"/>
+            <c:showCatName val="0"/>
+            <c:showSerName val="0"/>
+            <c:showPercent val="0"/>
+            <c:showBubbleSize val="0"/>
+            <c:showLeaderLines val="0"/>
+          </c:dLbls>
+          <c:marker>
+            <c:symbol val="none"/>
+            <c:size val="6"/>
+            <c:spPr>
+              <a:solidFill>
+                <a:srgbClr val="9DBFEA"/>
+              </a:solidFill>
+              <a:ln w="9525" cap="flat">
+                <a:solidFill>
+                  <a:srgbClr val="9DBFEA"/>
+                </a:solidFill>
+                <a:prstDash val="solid"/>
+                <a:round/>
+              </a:ln>
+              <a:effectLst/>
+            </c:spPr>
+          </c:marker>
+          <c:cat>
+            <c:multiLvlStrRef>
+              <c:f>Sheet1!$A$2:$A$12</c:f>
+              <c:multiLvlStrCache>
+                <c:ptCount val="11"/>
+                <c:lvl>
+                  <c:pt idx="0">
+                    <c:v>20</c:v>
+                  </c:pt>
+                  <c:pt idx="1">
+                    <c:v>25</c:v>
+                  </c:pt>
+                  <c:pt idx="2">
+                    <c:v>30</c:v>
+                  </c:pt>
+                  <c:pt idx="3">
+                    <c:v>35</c:v>
+                  </c:pt>
+                  <c:pt idx="4">
+                    <c:v>40</c:v>
+                  </c:pt>
+                  <c:pt idx="5">
+                    <c:v>45</c:v>
+                  </c:pt>
+                  <c:pt idx="6">
+                    <c:v>50</c:v>
+                  </c:pt>
+                  <c:pt idx="7">
+                    <c:v>55</c:v>
+                  </c:pt>
+                  <c:pt idx="8">
+                    <c:v>60</c:v>
+                  </c:pt>
+                  <c:pt idx="9">
+                    <c:v>65</c:v>
+                  </c:pt>
+                  <c:pt idx="10">
+                    <c:v>70</c:v>
+                  </c:pt>
+                </c:lvl>
+              </c:multiLvlStrCache>
+            </c:multiLvlStrRef>
+          </c:cat>
+          <c:val>
+            <c:numRef>
+              <c:f>Sheet1!$C$2:$C$12</c:f>
+              <c:numCache>
+                <c:formatCode>General</c:formatCode>
+                <c:ptCount val="11"/>
+                <c:pt idx="0">
+                  <c:v>-0.44</c:v>
+                </c:pt>
+                <c:pt idx="1">
+                  <c:v>-0.07</c:v>
+                </c:pt>
+                <c:pt idx="2">
+                  <c:v>0.29</c:v>
+                </c:pt>
+                <c:pt idx="3">
+                  <c:v>0.66</c:v>
+                </c:pt>
+                <c:pt idx="4">
+                  <c:v>1.03</c:v>
+                </c:pt>
+                <c:pt idx="5">
+                  <c:v>1.4</c:v>
+                </c:pt>
+                <c:pt idx="6">
+                  <c:v>1.77</c:v>
+                </c:pt>
+                <c:pt idx="7">
+                  <c:v>2.14</c:v>
+                </c:pt>
+                <c:pt idx="8">
+                  <c:v>2.51</c:v>
+                </c:pt>
+                <c:pt idx="9">
+                  <c:v>2.88</c:v>
+                </c:pt>
+                <c:pt idx="10">
+                  <c:v>3.24</c:v>
+                </c:pt>
+              </c:numCache>
+            </c:numRef>
+          </c:val>
+          <c:smooth val="0"/>
+        </c:ser>
+        <c:ser>
+          <c:idx val="2"/>
+          <c:order val="2"/>
+          <c:tx>
+            <c:strRef>
+              <c:f>Sheet1!$D$1</c:f>
+              <c:strCache>
+                <c:ptCount val="1"/>
+                <c:pt idx="0">
+                  <c:v>Clean-fuel NH₃, overlap removed</c:v>
+                </c:pt>
+              </c:strCache>
+            </c:strRef>
+          </c:tx>
+          <c:spPr>
+            <a:solidFill>
+              <a:srgbClr val="1F2933"/>
+            </a:solidFill>
+            <a:ln w="38100" cap="flat">
+              <a:solidFill>
+                <a:srgbClr val="1F2933"/>
+              </a:solidFill>
+              <a:prstDash val="solid"/>
+              <a:round/>
+            </a:ln>
+            <a:effectLst/>
+          </c:spPr>
+          <c:invertIfNegative val="0"/>
+          <c:dLbls>
+            <c:numFmt formatCode="#,##0" sourceLinked="0"/>
+            <c:txPr>
+              <a:bodyPr/>
+              <a:lstStyle/>
+              <a:p>
+                <a:pPr>
+                  <a:defRPr b="0" i="0" strike="noStrike" sz="1200" u="none">
+                    <a:solidFill>
+                      <a:srgbClr val="3A3935"/>
+                    </a:solidFill>
+                    <a:latin typeface="+mn-lt"/>
+                  </a:defRPr>
+                </a:pPr>
+              </a:p>
+            </c:txPr>
+            <c:showLegendKey val="0"/>
+            <c:showVal val="0"/>
+            <c:showCatName val="0"/>
+            <c:showSerName val="0"/>
+            <c:showPercent val="0"/>
+            <c:showBubbleSize val="0"/>
+            <c:showLeaderLines val="0"/>
+          </c:dLbls>
+          <c:marker>
+            <c:symbol val="none"/>
+            <c:size val="6"/>
+            <c:spPr>
+              <a:solidFill>
+                <a:srgbClr val="1F2933"/>
+              </a:solidFill>
+              <a:ln w="9525" cap="flat">
+                <a:solidFill>
+                  <a:srgbClr val="1F2933"/>
+                </a:solidFill>
+                <a:prstDash val="solid"/>
+                <a:round/>
+              </a:ln>
+              <a:effectLst/>
+            </c:spPr>
+          </c:marker>
+          <c:cat>
+            <c:multiLvlStrRef>
+              <c:f>Sheet1!$A$2:$A$12</c:f>
+              <c:multiLvlStrCache>
+                <c:ptCount val="11"/>
+                <c:lvl>
+                  <c:pt idx="0">
+                    <c:v>20</c:v>
+                  </c:pt>
+                  <c:pt idx="1">
+                    <c:v>25</c:v>
+                  </c:pt>
+                  <c:pt idx="2">
+                    <c:v>30</c:v>
+                  </c:pt>
+                  <c:pt idx="3">
+                    <c:v>35</c:v>
+                  </c:pt>
+                  <c:pt idx="4">
+                    <c:v>40</c:v>
+                  </c:pt>
+                  <c:pt idx="5">
+                    <c:v>45</c:v>
+                  </c:pt>
+                  <c:pt idx="6">
+                    <c:v>50</c:v>
+                  </c:pt>
+                  <c:pt idx="7">
+                    <c:v>55</c:v>
+                  </c:pt>
+                  <c:pt idx="8">
+                    <c:v>60</c:v>
+                  </c:pt>
+                  <c:pt idx="9">
+                    <c:v>65</c:v>
+                  </c:pt>
+                  <c:pt idx="10">
+                    <c:v>70</c:v>
+                  </c:pt>
+                </c:lvl>
+              </c:multiLvlStrCache>
+            </c:multiLvlStrRef>
+          </c:cat>
+          <c:val>
+            <c:numRef>
+              <c:f>Sheet1!$D$2:$D$12</c:f>
+              <c:numCache>
+                <c:formatCode>General</c:formatCode>
+                <c:ptCount val="11"/>
+                <c:pt idx="0">
+                  <c:v>-3.01</c:v>
+                </c:pt>
+                <c:pt idx="1">
+                  <c:v>-2.02</c:v>
+                </c:pt>
+                <c:pt idx="2">
+                  <c:v>-1.02</c:v>
+                </c:pt>
+                <c:pt idx="3">
+                  <c:v>-0.03</c:v>
+                </c:pt>
+                <c:pt idx="4">
+                  <c:v>0.97</c:v>
+                </c:pt>
+                <c:pt idx="5">
+                  <c:v>1.96</c:v>
+                </c:pt>
+                <c:pt idx="6">
+                  <c:v>2.95</c:v>
+                </c:pt>
+                <c:pt idx="7">
+                  <c:v>3.95</c:v>
+                </c:pt>
+                <c:pt idx="8">
+                  <c:v>4.94</c:v>
+                </c:pt>
+                <c:pt idx="9">
+                  <c:v>5.93</c:v>
+                </c:pt>
+                <c:pt idx="10">
+                  <c:v>6.93</c:v>
+                </c:pt>
+              </c:numCache>
+            </c:numRef>
+          </c:val>
+          <c:smooth val="0"/>
+        </c:ser>
+        <c:dLbls>
+          <c:numFmt formatCode="#,##0" sourceLinked="0"/>
+          <c:txPr>
+            <a:bodyPr/>
+            <a:lstStyle/>
+            <a:p>
+              <a:pPr>
+                <a:defRPr b="0" i="0" strike="noStrike" sz="1200" u="none">
+                  <a:solidFill>
+                    <a:srgbClr val="3A3935"/>
+                  </a:solidFill>
+                  <a:latin typeface="+mn-lt"/>
+                </a:defRPr>
+              </a:pPr>
+            </a:p>
+          </c:txPr>
+          <c:showLegendKey val="0"/>
+          <c:showVal val="0"/>
+          <c:showCatName val="0"/>
+          <c:showSerName val="0"/>
+          <c:showPercent val="0"/>
+          <c:showBubbleSize val="0"/>
+          <c:showLeaderLines val="0"/>
+        </c:dLbls>
+        <c:marker val="1"/>
+        <c:axId val="2094734554"/>
+        <c:axId val="2094734552"/>
+        <c:axId val="2094734556"/>
+      </c:lineChart>
+      <c:catAx>
+        <c:axId val="2094734554"/>
+        <c:scaling>
+          <c:orientation val="minMax"/>
+        </c:scaling>
+        <c:delete val="0"/>
+        <c:axPos val="b"/>
+        <c:title>
+          <c:tx>
+            <c:rich>
+              <a:bodyPr/>
+              <a:lstStyle/>
+              <a:p>
+                <a:pPr>
+                  <a:defRPr sz="1200" b="0" i="0" u="none" strike="noStrike">
+                    <a:solidFill>
+                      <a:srgbClr val="3A3935"/>
+                    </a:solidFill>
+                    <a:latin typeface="+mn-lt"/>
+                  </a:defRPr>
+                </a:pPr>
+                <a:r>
+                  <a:rPr sz="1200" b="0" i="0" u="none" strike="noStrike">
+                    <a:solidFill>
+                      <a:srgbClr val="3A3935"/>
+                    </a:solidFill>
+                    <a:latin typeface="+mn-lt"/>
+                  </a:rPr>
+                  <a:t>Electrolyser energy, kWh per kg H₂ produced</a:t>
+                </a:r>
+              </a:p>
+            </c:rich>
+          </c:tx>
+          <c:layout/>
+          <c:overlay val="0"/>
+        </c:title>
+        <c:numFmt formatCode="General" sourceLinked="1"/>
+        <c:majorTickMark val="out"/>
+        <c:minorTickMark val="none"/>
+        <c:tickLblPos val="low"/>
+        <c:spPr>
+          <a:ln w="12700" cap="flat">
+            <a:solidFill>
+              <a:srgbClr val="888888"/>
+            </a:solidFill>
+            <a:prstDash val="solid"/>
+            <a:round/>
+          </a:ln>
+        </c:spPr>
+        <c:txPr>
+          <a:bodyPr/>
+          <a:lstStyle/>
+          <a:p>
+            <a:pPr>
+              <a:defRPr sz="1200" b="0" i="0" u="none" strike="noStrike">
+                <a:solidFill>
+                  <a:srgbClr val="3A3935"/>
+                </a:solidFill>
+                <a:latin typeface="+mn-lt"/>
+              </a:defRPr>
+            </a:pPr>
+            <a:endParaRPr lang="en-US"/>
+          </a:p>
+        </c:txPr>
+        <c:crossAx val="2094734552"/>
+        <c:crosses val="autoZero"/>
+        <c:auto val="1"/>
+        <c:lblAlgn val="ctr"/>
+        <c:noMultiLvlLbl val="1"/>
+      </c:catAx>
+      <c:valAx>
+        <c:axId val="2094734552"/>
+        <c:scaling>
+          <c:orientation val="minMax"/>
+          <c:max val="8"/>
+          <c:min val="-4"/>
+        </c:scaling>
+        <c:delete val="0"/>
+        <c:axPos val="l"/>
+        <c:majorGridlines>
+          <c:spPr>
+            <a:ln w="9525" cap="flat">
+              <a:solidFill>
+                <a:srgbClr val="E8E8E4"/>
+              </a:solidFill>
+              <a:prstDash val="solid"/>
+              <a:round/>
+            </a:ln>
+          </c:spPr>
+        </c:majorGridlines>
+        <c:numFmt formatCode="0" sourceLinked="0"/>
+        <c:majorTickMark val="out"/>
+        <c:minorTickMark val="none"/>
+        <c:tickLblPos val="nextTo"/>
+        <c:spPr>
+          <a:ln w="12700" cap="flat">
+            <a:solidFill>
+              <a:srgbClr val="888888"/>
+            </a:solidFill>
+            <a:prstDash val="solid"/>
+            <a:round/>
+          </a:ln>
+        </c:spPr>
+        <c:txPr>
+          <a:bodyPr/>
+          <a:lstStyle/>
+          <a:p>
+            <a:pPr>
+              <a:defRPr sz="1100" b="0" i="0" u="none" strike="noStrike">
+                <a:solidFill>
+                  <a:srgbClr val="3A3935"/>
+                </a:solidFill>
+                <a:latin typeface="+mn-lt"/>
+              </a:defRPr>
+            </a:pPr>
+            <a:endParaRPr lang="en-US"/>
+          </a:p>
+        </c:txPr>
+        <c:crossAx val="2094734554"/>
+        <c:crosses val="autoZero"/>
+        <c:crossBetween val="between"/>
+        <c:majorUnit val="2"/>
+      </c:valAx>
+      <c:spPr>
+        <a:noFill/>
+        <a:ln>
+          <a:noFill/>
+        </a:ln>
+        <a:effectLst/>
+      </c:spPr>
+    </c:plotArea>
+    <c:legend>
+      <c:legendPos val="t"/>
+      <c:overlay val="0"/>
+      <c:txPr>
+        <a:bodyPr/>
+        <a:lstStyle/>
+        <a:p>
+          <a:pPr>
+            <a:defRPr sz="1200">
+              <a:solidFill>
+                <a:srgbClr val="3A3935"/>
+              </a:solidFill>
+              <a:latin typeface="+mn-lt"/>
+              <a:cs typeface="+mn-lt"/>
+            </a:defRPr>
+          </a:pPr>
+          <a:endParaRPr lang="en-US"/>
+        </a:p>
+      </c:txPr>
+    </c:legend>
+    <c:plotVisOnly val="1"/>
+    <c:dispBlanksAs val="span"/>
+  </c:chart>
+  <c:spPr>
+    <a:noFill/>
+    <a:ln>
+      <a:noFill/>
+    </a:ln>
+    <a:effectLst/>
+  </c:spPr>
+  <c:externalData r:id="rId1">
+    <c:autoUpdate val="0"/>
+  </c:externalData>
+</c:chartSpace>
+</file>
+
+<file path=ppt/charts/chart8.xml><?xml version="1.0" encoding="utf-8"?>
 <c:chartSpace xmlns:c="http://schemas.openxmlformats.org/drawingml/2006/chart" xmlns:a="http://schemas.openxmlformats.org/drawingml/2006/main" xmlns:r="http://schemas.openxmlformats.org/officeDocument/2006/relationships">
   <c:date1904 val="0"/>
   <c:roundedCorners val="1"/>
@@ -3683,7 +4712,7 @@
           <a:p>
             <a:r>
               <a:rPr lang="en-US" dirty="0"/>
-              <a:t>Haber-Bosch energy is the swing input: the team value of 1 kWh/kg H2 may exclude the air separation unit. The placeholder range with air separation, 2.8-3.9 kWh/kg H2, is above the break-even.</a:t>
+              <a:t>Hold the ammonia route fixed and sweep the liquefier's energy use. The LH2 line rises with the liquefier energy; the NH3 lines are flat. They would cross at 3.27 kWh/kg with the placeholder Haber-Bosch demand and at 0.94 kWh/kg with the team's 1 kWh/kg H2. Both points sit inside the shaded region, below the minimum work to liquefy hydrogen, so no liquefier can reach them. Even at the top of the placeholder range, 0.7 kWh/kg NH3, the crossing is 3.83 kWh/kg, just below 3.9. Liquefaction cannot be engineered into a win on upstream electricity; it could only win if the ammonia plant drew far more than assumed.</a:t>
             </a:r>
             <a:endParaRPr lang="en-US" dirty="0"/>
           </a:p>
@@ -3771,7 +4800,7 @@
           <a:p>
             <a:r>
               <a:rPr lang="en-US" dirty="0"/>
-              <a:t>Only energy is priced: no capital, charter, port, carbon or hydrogen-feed cost. The hydrogen price only affects LH2, through the cargo it burns.</a:t>
+              <a:t>Haber-Bosch energy is the swing input: the team value of 1 kWh/kg H2 may exclude the air separation unit. The placeholder range with air separation, 2.8-3.9 kWh/kg H2, is above the break-even.</a:t>
             </a:r>
             <a:endParaRPr lang="en-US" dirty="0"/>
           </a:p>
@@ -3859,7 +4888,7 @@
           <a:p>
             <a:r>
               <a:rPr lang="en-US" dirty="0"/>
-              <a:t>This is a screening view of energy and energy cost. The capital-cost and shipping-economics comparison still needs feasibility-study cost data.</a:t>
+              <a:t>Until now both routes started from the same hydrogen gas. In practice each route consumes a different amount of hydrogen for the same delivery: 2,832 t per LH2 cargo and 4,871 t per NH3 cargo. Adding the electrolysis of that hydrogen on top of the earlier chain makes electrolysis 83-87 % of the energy. The NH3 routes pay more for it because they lose more hydrogen, which outweighs what they save in the rest of the chain. One point needs care: the earlier chain counts hydrogen burned on the ship and ammonia burned in the cracker as energy used, and once electrolysis is added those are already paid for, so counting them again overstates the totals. The corrected totals are 75.59, 76.35 and 80.53 kWh/kg, and LH2 is still lowest but by only about 1 %.</a:t>
             </a:r>
             <a:endParaRPr lang="en-US" dirty="0"/>
           </a:p>
@@ -3947,7 +4976,7 @@
           <a:p>
             <a:r>
               <a:rPr lang="en-US" dirty="0"/>
-              <a:t>These are the inputs to firm up next. The first two matter most for the ranking.</a:t>
+              <a:t>Plotted is the energy of each NH3 route minus the LH2 route as the electrolyser energy changes; above zero means NH3 uses more. As computed, gas-fired NH3 and LH2 tie at about 26 kWh/kg, below the 33.3 kWh/kg that the hydrogen itself contains, so LH2 would lead for any electrolyser above that. With the overlap removed they tie at about 50 kWh/kg, and the clean-fuel route at about 35. So the electrolyser energy needs a sourced value before the ranking can be settled. On cost, charging the hydrogen feed through the electrolysis electricity at USD 140/MWh makes the feed by far the largest cost, and the gap between the routes shrinks from USD 0.545 to USD 0.21 per kg. Gas-fired NH3 stays cheapest because part of its energy is natural gas, about USD 44/MWh against USD 140/MWh for electricity.</a:t>
             </a:r>
             <a:endParaRPr lang="en-US" dirty="0"/>
           </a:p>
@@ -4123,7 +5152,7 @@
           <a:p>
             <a:r>
               <a:rPr lang="en-US" dirty="0"/>
-              <a:t/>
+              <a:t>Only energy is priced: no capital, charter, port, carbon or hydrogen-feed cost. The hydrogen price only affects LH2, through the cargo it burns.</a:t>
             </a:r>
             <a:endParaRPr lang="en-US" dirty="0"/>
           </a:p>
@@ -4147,6 +5176,270 @@
             <a:fld id="{F7021451-1387-4CA6-816F-3879F97B5CBC}" type="slidenum">
               <a:rPr lang="en-US"/>
               <a:t>20</a:t>
+            </a:fld>
+            <a:endParaRPr lang="en-US"/>
+          </a:p>
+        </p:txBody>
+      </p:sp>
+    </p:spTree>
+    <p:extLst>
+      <p:ext uri="{BB962C8B-B14F-4D97-AF65-F5344CB8AC3E}">
+        <p14:creationId xmlns:p14="http://schemas.microsoft.com/office/powerpoint/2010/main" val="1024086991"/>
+      </p:ext>
+    </p:extLst>
+  </p:cSld>
+  <p:clrMapOvr>
+    <a:masterClrMapping/>
+  </p:clrMapOvr>
+</p:notes>
+</file>
+
+<file path=ppt/notesSlides/notesSlide21.xml><?xml version="1.0" encoding="utf-8"?>
+<p:notes xmlns:a="http://schemas.openxmlformats.org/drawingml/2006/main" xmlns:r="http://schemas.openxmlformats.org/officeDocument/2006/relationships" xmlns:p="http://schemas.openxmlformats.org/presentationml/2006/main">
+  <p:cSld>
+    <p:spTree>
+      <p:nvGrpSpPr>
+        <p:cNvPr id="1" name=""/>
+        <p:cNvGrpSpPr/>
+        <p:nvPr/>
+      </p:nvGrpSpPr>
+      <p:grpSpPr>
+        <a:xfrm>
+          <a:off x="0" y="0"/>
+          <a:ext cx="0" cy="0"/>
+          <a:chOff x="0" y="0"/>
+          <a:chExt cx="0" cy="0"/>
+        </a:xfrm>
+      </p:grpSpPr>
+      <p:sp>
+        <p:nvSpPr>
+          <p:cNvPr id="2" name="Slide Image Placeholder 1"/>
+          <p:cNvSpPr>
+            <a:spLocks noGrp="1" noRot="1" noChangeAspect="1"/>
+          </p:cNvSpPr>
+          <p:nvPr>
+            <p:ph type="sldImg"/>
+          </p:nvPr>
+        </p:nvSpPr>
+        <p:spPr/>
+      </p:sp>
+      <p:sp>
+        <p:nvSpPr>
+          <p:cNvPr id="3" name="Notes Placeholder 2"/>
+          <p:cNvSpPr>
+            <a:spLocks noGrp="1"/>
+          </p:cNvSpPr>
+          <p:nvPr>
+            <p:ph type="body" idx="1"/>
+          </p:nvPr>
+        </p:nvSpPr>
+        <p:spPr/>
+        <p:txBody>
+          <a:bodyPr/>
+          <a:lstStyle/>
+          <a:p>
+            <a:r>
+              <a:rPr lang="en-US" dirty="0"/>
+              <a:t>This is a screening view of energy and energy cost. The capital-cost and shipping-economics comparison still needs feasibility-study cost data.</a:t>
+            </a:r>
+            <a:endParaRPr lang="en-US" dirty="0"/>
+          </a:p>
+        </p:txBody>
+      </p:sp>
+      <p:sp>
+        <p:nvSpPr>
+          <p:cNvPr id="4" name="Slide Number Placeholder 3"/>
+          <p:cNvSpPr>
+            <a:spLocks noGrp="1"/>
+          </p:cNvSpPr>
+          <p:nvPr>
+            <p:ph type="sldNum" sz="quarter" idx="10"/>
+          </p:nvPr>
+        </p:nvSpPr>
+        <p:spPr/>
+        <p:txBody>
+          <a:bodyPr/>
+          <a:lstStyle/>
+          <a:p>
+            <a:fld id="{F7021451-1387-4CA6-816F-3879F97B5CBC}" type="slidenum">
+              <a:rPr lang="en-US"/>
+              <a:t>21</a:t>
+            </a:fld>
+            <a:endParaRPr lang="en-US"/>
+          </a:p>
+        </p:txBody>
+      </p:sp>
+    </p:spTree>
+    <p:extLst>
+      <p:ext uri="{BB962C8B-B14F-4D97-AF65-F5344CB8AC3E}">
+        <p14:creationId xmlns:p14="http://schemas.microsoft.com/office/powerpoint/2010/main" val="1024086991"/>
+      </p:ext>
+    </p:extLst>
+  </p:cSld>
+  <p:clrMapOvr>
+    <a:masterClrMapping/>
+  </p:clrMapOvr>
+</p:notes>
+</file>
+
+<file path=ppt/notesSlides/notesSlide22.xml><?xml version="1.0" encoding="utf-8"?>
+<p:notes xmlns:a="http://schemas.openxmlformats.org/drawingml/2006/main" xmlns:r="http://schemas.openxmlformats.org/officeDocument/2006/relationships" xmlns:p="http://schemas.openxmlformats.org/presentationml/2006/main">
+  <p:cSld>
+    <p:spTree>
+      <p:nvGrpSpPr>
+        <p:cNvPr id="1" name=""/>
+        <p:cNvGrpSpPr/>
+        <p:nvPr/>
+      </p:nvGrpSpPr>
+      <p:grpSpPr>
+        <a:xfrm>
+          <a:off x="0" y="0"/>
+          <a:ext cx="0" cy="0"/>
+          <a:chOff x="0" y="0"/>
+          <a:chExt cx="0" cy="0"/>
+        </a:xfrm>
+      </p:grpSpPr>
+      <p:sp>
+        <p:nvSpPr>
+          <p:cNvPr id="2" name="Slide Image Placeholder 1"/>
+          <p:cNvSpPr>
+            <a:spLocks noGrp="1" noRot="1" noChangeAspect="1"/>
+          </p:cNvSpPr>
+          <p:nvPr>
+            <p:ph type="sldImg"/>
+          </p:nvPr>
+        </p:nvSpPr>
+        <p:spPr/>
+      </p:sp>
+      <p:sp>
+        <p:nvSpPr>
+          <p:cNvPr id="3" name="Notes Placeholder 2"/>
+          <p:cNvSpPr>
+            <a:spLocks noGrp="1"/>
+          </p:cNvSpPr>
+          <p:nvPr>
+            <p:ph type="body" idx="1"/>
+          </p:nvPr>
+        </p:nvSpPr>
+        <p:spPr/>
+        <p:txBody>
+          <a:bodyPr/>
+          <a:lstStyle/>
+          <a:p>
+            <a:r>
+              <a:rPr lang="en-US" dirty="0"/>
+              <a:t>These are the inputs to firm up next. The first two matter most for the ranking.</a:t>
+            </a:r>
+            <a:endParaRPr lang="en-US" dirty="0"/>
+          </a:p>
+        </p:txBody>
+      </p:sp>
+      <p:sp>
+        <p:nvSpPr>
+          <p:cNvPr id="4" name="Slide Number Placeholder 3"/>
+          <p:cNvSpPr>
+            <a:spLocks noGrp="1"/>
+          </p:cNvSpPr>
+          <p:nvPr>
+            <p:ph type="sldNum" sz="quarter" idx="10"/>
+          </p:nvPr>
+        </p:nvSpPr>
+        <p:spPr/>
+        <p:txBody>
+          <a:bodyPr/>
+          <a:lstStyle/>
+          <a:p>
+            <a:fld id="{F7021451-1387-4CA6-816F-3879F97B5CBC}" type="slidenum">
+              <a:rPr lang="en-US"/>
+              <a:t>22</a:t>
+            </a:fld>
+            <a:endParaRPr lang="en-US"/>
+          </a:p>
+        </p:txBody>
+      </p:sp>
+    </p:spTree>
+    <p:extLst>
+      <p:ext uri="{BB962C8B-B14F-4D97-AF65-F5344CB8AC3E}">
+        <p14:creationId xmlns:p14="http://schemas.microsoft.com/office/powerpoint/2010/main" val="1024086991"/>
+      </p:ext>
+    </p:extLst>
+  </p:cSld>
+  <p:clrMapOvr>
+    <a:masterClrMapping/>
+  </p:clrMapOvr>
+</p:notes>
+</file>
+
+<file path=ppt/notesSlides/notesSlide23.xml><?xml version="1.0" encoding="utf-8"?>
+<p:notes xmlns:a="http://schemas.openxmlformats.org/drawingml/2006/main" xmlns:r="http://schemas.openxmlformats.org/officeDocument/2006/relationships" xmlns:p="http://schemas.openxmlformats.org/presentationml/2006/main">
+  <p:cSld>
+    <p:spTree>
+      <p:nvGrpSpPr>
+        <p:cNvPr id="1" name=""/>
+        <p:cNvGrpSpPr/>
+        <p:nvPr/>
+      </p:nvGrpSpPr>
+      <p:grpSpPr>
+        <a:xfrm>
+          <a:off x="0" y="0"/>
+          <a:ext cx="0" cy="0"/>
+          <a:chOff x="0" y="0"/>
+          <a:chExt cx="0" cy="0"/>
+        </a:xfrm>
+      </p:grpSpPr>
+      <p:sp>
+        <p:nvSpPr>
+          <p:cNvPr id="2" name="Slide Image Placeholder 1"/>
+          <p:cNvSpPr>
+            <a:spLocks noGrp="1" noRot="1" noChangeAspect="1"/>
+          </p:cNvSpPr>
+          <p:nvPr>
+            <p:ph type="sldImg"/>
+          </p:nvPr>
+        </p:nvSpPr>
+        <p:spPr/>
+      </p:sp>
+      <p:sp>
+        <p:nvSpPr>
+          <p:cNvPr id="3" name="Notes Placeholder 2"/>
+          <p:cNvSpPr>
+            <a:spLocks noGrp="1"/>
+          </p:cNvSpPr>
+          <p:nvPr>
+            <p:ph type="body" idx="1"/>
+          </p:nvPr>
+        </p:nvSpPr>
+        <p:spPr/>
+        <p:txBody>
+          <a:bodyPr/>
+          <a:lstStyle/>
+          <a:p>
+            <a:r>
+              <a:rPr lang="en-US" dirty="0"/>
+              <a:t/>
+            </a:r>
+            <a:endParaRPr lang="en-US" dirty="0"/>
+          </a:p>
+        </p:txBody>
+      </p:sp>
+      <p:sp>
+        <p:nvSpPr>
+          <p:cNvPr id="4" name="Slide Number Placeholder 3"/>
+          <p:cNvSpPr>
+            <a:spLocks noGrp="1"/>
+          </p:cNvSpPr>
+          <p:nvPr>
+            <p:ph type="sldNum" sz="quarter" idx="10"/>
+          </p:nvPr>
+        </p:nvSpPr>
+        <p:spPr/>
+        <p:txBody>
+          <a:bodyPr/>
+          <a:lstStyle/>
+          <a:p>
+            <a:fld id="{F7021451-1387-4CA6-816F-3879F97B5CBC}" type="slidenum">
+              <a:rPr lang="en-US"/>
+              <a:t>23</a:t>
             </a:fld>
             <a:endParaRPr lang="en-US"/>
           </a:p>
@@ -12104,7 +13397,7 @@
                   <a:schemeClr val="accent1"/>
                 </a:solidFill>
               </a:rPr>
-              <a:t>The ranking can flip: LH₂ uses the least energy if Haber-Bosch needs more than ~2.65 kWh/kg H₂, or once hydrogen production is counted</a:t>
+              <a:t>To match the ammonia plant a liquefier would need 3.27 kWh/kg H₂, below the 3.9 minimum, so no liquefier can close the upstream gap</a:t>
             </a:r>
             <a:endParaRPr lang="en-US" sz="2800" dirty="0"/>
           </a:p>
@@ -12142,7 +13435,1709 @@
                   <a:schemeClr val="tx1"/>
                 </a:solidFill>
               </a:rPr>
-              <a:t>LiqH₂VC Database Rev 0 · Sections 13.3, 13.6 and 13.7 · kWh per kg H₂ delivered; supply case 100,000 t H₂ a year</a:t>
+              <a:t>LiqH₂VC Database Rev 0 · Section 13.3 · power at the plant fence, MW · 100,000 t H₂ a year, 8,000 operating hours a year</a:t>
+            </a:r>
+            <a:endParaRPr lang="en-US" sz="1100" dirty="0"/>
+          </a:p>
+        </p:txBody>
+      </p:sp>
+      <p:sp>
+        <p:nvSpPr>
+          <p:cNvPr id="5" name="Text 2"/>
+          <p:cNvSpPr txBox="1"/>
+          <p:nvPr/>
+        </p:nvSpPr>
+        <p:spPr>
+          <a:xfrm>
+            <a:off x="548640" y="1417320"/>
+            <a:ext cx="3657600" cy="274320"/>
+          </a:xfrm>
+          <a:prstGeom prst="rect">
+            <a:avLst/>
+          </a:prstGeom>
+          <a:noFill/>
+          <a:ln/>
+        </p:spPr>
+        <p:txBody>
+          <a:bodyPr wrap="square" lIns="0" tIns="0" rIns="0" bIns="0" rtlCol="0" anchor="t"/>
+          <a:lstStyle/>
+          <a:p>
+            <a:pPr indent="0" marL="0">
+              <a:buNone/>
+            </a:pPr>
+            <a:r>
+              <a:rPr lang="en-US" sz="1200" b="1" dirty="0">
+                <a:solidFill>
+                  <a:schemeClr val="tx2"/>
+                </a:solidFill>
+              </a:rPr>
+              <a:t>Power at the plant fence, MW</a:t>
+            </a:r>
+            <a:endParaRPr lang="en-US" sz="1200" dirty="0"/>
+          </a:p>
+        </p:txBody>
+      </p:sp>
+      <p:sp>
+        <p:nvSpPr>
+          <p:cNvPr id="6" name="liq-unreachable-zone"/>
+          <p:cNvSpPr/>
+          <p:nvPr/>
+        </p:nvSpPr>
+        <p:spPr>
+          <a:xfrm>
+            <a:off x="1143000" y="1783080"/>
+            <a:ext cx="2095119" cy="2971800"/>
+          </a:xfrm>
+          <a:prstGeom prst="rect">
+            <a:avLst/>
+          </a:prstGeom>
+          <a:solidFill>
+            <a:srgbClr val="F1EAF6"/>
+          </a:solidFill>
+          <a:ln w="12700">
+            <a:solidFill>
+              <a:srgbClr val="F1EAF6"/>
+            </a:solidFill>
+            <a:prstDash val="solid"/>
+          </a:ln>
+        </p:spPr>
+      </p:sp>
+      <p:sp>
+        <p:nvSpPr>
+          <p:cNvPr id="7" name="liq-khi-band"/>
+          <p:cNvSpPr/>
+          <p:nvPr/>
+        </p:nvSpPr>
+        <p:spPr>
+          <a:xfrm>
+            <a:off x="5440680" y="1783080"/>
+            <a:ext cx="537210" cy="2971800"/>
+          </a:xfrm>
+          <a:prstGeom prst="rect">
+            <a:avLst/>
+          </a:prstGeom>
+          <a:solidFill>
+            <a:srgbClr val="B4AAE6">
+              <a:alpha val="55000"/>
+            </a:srgbClr>
+          </a:solidFill>
+          <a:ln/>
+        </p:spPr>
+      </p:sp>
+      <p:sp>
+        <p:nvSpPr>
+          <p:cNvPr id="8" name="Shape 5"/>
+          <p:cNvSpPr/>
+          <p:nvPr/>
+        </p:nvSpPr>
+        <p:spPr>
+          <a:xfrm>
+            <a:off x="1143000" y="4754880"/>
+            <a:ext cx="6446520" cy="0"/>
+          </a:xfrm>
+          <a:prstGeom prst="line">
+            <a:avLst/>
+          </a:prstGeom>
+          <a:noFill/>
+          <a:ln w="9525">
+            <a:solidFill>
+              <a:srgbClr val="E8E8E4"/>
+            </a:solidFill>
+            <a:prstDash val="solid"/>
+          </a:ln>
+        </p:spPr>
+      </p:sp>
+      <p:sp>
+        <p:nvSpPr>
+          <p:cNvPr id="9" name="Text 6"/>
+          <p:cNvSpPr txBox="1"/>
+          <p:nvPr/>
+        </p:nvSpPr>
+        <p:spPr>
+          <a:xfrm>
+            <a:off x="548640" y="4645152"/>
+            <a:ext cx="457200" cy="219456"/>
+          </a:xfrm>
+          <a:prstGeom prst="rect">
+            <a:avLst/>
+          </a:prstGeom>
+          <a:noFill/>
+          <a:ln/>
+        </p:spPr>
+        <p:txBody>
+          <a:bodyPr wrap="square" lIns="0" tIns="0" rIns="0" bIns="0" rtlCol="0" anchor="ctr"/>
+          <a:lstStyle/>
+          <a:p>
+            <a:pPr algn="r" indent="0" marL="0">
+              <a:buNone/>
+            </a:pPr>
+            <a:r>
+              <a:rPr lang="en-US" sz="1100" dirty="0">
+                <a:solidFill>
+                  <a:schemeClr val="tx1"/>
+                </a:solidFill>
+              </a:rPr>
+              <a:t>0</a:t>
+            </a:r>
+            <a:endParaRPr lang="en-US" sz="1100" dirty="0"/>
+          </a:p>
+        </p:txBody>
+      </p:sp>
+      <p:sp>
+        <p:nvSpPr>
+          <p:cNvPr id="10" name="Shape 7"/>
+          <p:cNvSpPr/>
+          <p:nvPr/>
+        </p:nvSpPr>
+        <p:spPr>
+          <a:xfrm>
+            <a:off x="1143000" y="3764280"/>
+            <a:ext cx="6446520" cy="0"/>
+          </a:xfrm>
+          <a:prstGeom prst="line">
+            <a:avLst/>
+          </a:prstGeom>
+          <a:noFill/>
+          <a:ln w="9525">
+            <a:solidFill>
+              <a:srgbClr val="E8E8E4"/>
+            </a:solidFill>
+            <a:prstDash val="solid"/>
+          </a:ln>
+        </p:spPr>
+      </p:sp>
+      <p:sp>
+        <p:nvSpPr>
+          <p:cNvPr id="11" name="Text 8"/>
+          <p:cNvSpPr txBox="1"/>
+          <p:nvPr/>
+        </p:nvSpPr>
+        <p:spPr>
+          <a:xfrm>
+            <a:off x="548640" y="3654552"/>
+            <a:ext cx="457200" cy="219456"/>
+          </a:xfrm>
+          <a:prstGeom prst="rect">
+            <a:avLst/>
+          </a:prstGeom>
+          <a:noFill/>
+          <a:ln/>
+        </p:spPr>
+        <p:txBody>
+          <a:bodyPr wrap="square" lIns="0" tIns="0" rIns="0" bIns="0" rtlCol="0" anchor="ctr"/>
+          <a:lstStyle/>
+          <a:p>
+            <a:pPr algn="r" indent="0" marL="0">
+              <a:buNone/>
+            </a:pPr>
+            <a:r>
+              <a:rPr lang="en-US" sz="1100" dirty="0">
+                <a:solidFill>
+                  <a:schemeClr val="tx1"/>
+                </a:solidFill>
+              </a:rPr>
+              <a:t>50</a:t>
+            </a:r>
+            <a:endParaRPr lang="en-US" sz="1100" dirty="0"/>
+          </a:p>
+        </p:txBody>
+      </p:sp>
+      <p:sp>
+        <p:nvSpPr>
+          <p:cNvPr id="12" name="Shape 9"/>
+          <p:cNvSpPr/>
+          <p:nvPr/>
+        </p:nvSpPr>
+        <p:spPr>
+          <a:xfrm>
+            <a:off x="1143000" y="2773680"/>
+            <a:ext cx="6446520" cy="0"/>
+          </a:xfrm>
+          <a:prstGeom prst="line">
+            <a:avLst/>
+          </a:prstGeom>
+          <a:noFill/>
+          <a:ln w="9525">
+            <a:solidFill>
+              <a:srgbClr val="E8E8E4"/>
+            </a:solidFill>
+            <a:prstDash val="solid"/>
+          </a:ln>
+        </p:spPr>
+      </p:sp>
+      <p:sp>
+        <p:nvSpPr>
+          <p:cNvPr id="13" name="Text 10"/>
+          <p:cNvSpPr txBox="1"/>
+          <p:nvPr/>
+        </p:nvSpPr>
+        <p:spPr>
+          <a:xfrm>
+            <a:off x="548640" y="2663952"/>
+            <a:ext cx="457200" cy="219456"/>
+          </a:xfrm>
+          <a:prstGeom prst="rect">
+            <a:avLst/>
+          </a:prstGeom>
+          <a:noFill/>
+          <a:ln/>
+        </p:spPr>
+        <p:txBody>
+          <a:bodyPr wrap="square" lIns="0" tIns="0" rIns="0" bIns="0" rtlCol="0" anchor="ctr"/>
+          <a:lstStyle/>
+          <a:p>
+            <a:pPr algn="r" indent="0" marL="0">
+              <a:buNone/>
+            </a:pPr>
+            <a:r>
+              <a:rPr lang="en-US" sz="1100" dirty="0">
+                <a:solidFill>
+                  <a:schemeClr val="tx1"/>
+                </a:solidFill>
+              </a:rPr>
+              <a:t>100</a:t>
+            </a:r>
+            <a:endParaRPr lang="en-US" sz="1100" dirty="0"/>
+          </a:p>
+        </p:txBody>
+      </p:sp>
+      <p:sp>
+        <p:nvSpPr>
+          <p:cNvPr id="14" name="Shape 11"/>
+          <p:cNvSpPr/>
+          <p:nvPr/>
+        </p:nvSpPr>
+        <p:spPr>
+          <a:xfrm>
+            <a:off x="1143000" y="1783080"/>
+            <a:ext cx="6446520" cy="0"/>
+          </a:xfrm>
+          <a:prstGeom prst="line">
+            <a:avLst/>
+          </a:prstGeom>
+          <a:noFill/>
+          <a:ln w="9525">
+            <a:solidFill>
+              <a:srgbClr val="E8E8E4"/>
+            </a:solidFill>
+            <a:prstDash val="solid"/>
+          </a:ln>
+        </p:spPr>
+      </p:sp>
+      <p:sp>
+        <p:nvSpPr>
+          <p:cNvPr id="15" name="Text 12"/>
+          <p:cNvSpPr txBox="1"/>
+          <p:nvPr/>
+        </p:nvSpPr>
+        <p:spPr>
+          <a:xfrm>
+            <a:off x="548640" y="1673352"/>
+            <a:ext cx="457200" cy="219456"/>
+          </a:xfrm>
+          <a:prstGeom prst="rect">
+            <a:avLst/>
+          </a:prstGeom>
+          <a:noFill/>
+          <a:ln/>
+        </p:spPr>
+        <p:txBody>
+          <a:bodyPr wrap="square" lIns="0" tIns="0" rIns="0" bIns="0" rtlCol="0" anchor="ctr"/>
+          <a:lstStyle/>
+          <a:p>
+            <a:pPr algn="r" indent="0" marL="0">
+              <a:buNone/>
+            </a:pPr>
+            <a:r>
+              <a:rPr lang="en-US" sz="1100" dirty="0">
+                <a:solidFill>
+                  <a:schemeClr val="tx1"/>
+                </a:solidFill>
+              </a:rPr>
+              <a:t>150</a:t>
+            </a:r>
+            <a:endParaRPr lang="en-US" sz="1100" dirty="0"/>
+          </a:p>
+        </p:txBody>
+      </p:sp>
+      <p:sp>
+        <p:nvSpPr>
+          <p:cNvPr id="16" name="Shape 13"/>
+          <p:cNvSpPr/>
+          <p:nvPr/>
+        </p:nvSpPr>
+        <p:spPr>
+          <a:xfrm>
+            <a:off x="1143000" y="4754880"/>
+            <a:ext cx="0" cy="73152"/>
+          </a:xfrm>
+          <a:prstGeom prst="line">
+            <a:avLst/>
+          </a:prstGeom>
+          <a:noFill/>
+          <a:ln w="9525">
+            <a:solidFill>
+              <a:srgbClr val="3A3935"/>
+            </a:solidFill>
+            <a:prstDash val="solid"/>
+          </a:ln>
+        </p:spPr>
+      </p:sp>
+      <p:sp>
+        <p:nvSpPr>
+          <p:cNvPr id="17" name="Text 14"/>
+          <p:cNvSpPr txBox="1"/>
+          <p:nvPr/>
+        </p:nvSpPr>
+        <p:spPr>
+          <a:xfrm>
+            <a:off x="868680" y="4846320"/>
+            <a:ext cx="548640" cy="228600"/>
+          </a:xfrm>
+          <a:prstGeom prst="rect">
+            <a:avLst/>
+          </a:prstGeom>
+          <a:noFill/>
+          <a:ln/>
+        </p:spPr>
+        <p:txBody>
+          <a:bodyPr wrap="square" lIns="0" tIns="0" rIns="0" bIns="0" rtlCol="0" anchor="t"/>
+          <a:lstStyle/>
+          <a:p>
+            <a:pPr algn="ctr" indent="0" marL="0">
+              <a:buNone/>
+            </a:pPr>
+            <a:r>
+              <a:rPr lang="en-US" sz="1100" dirty="0">
+                <a:solidFill>
+                  <a:schemeClr val="tx1"/>
+                </a:solidFill>
+              </a:rPr>
+              <a:t>0</a:t>
+            </a:r>
+            <a:endParaRPr lang="en-US" sz="1100" dirty="0"/>
+          </a:p>
+        </p:txBody>
+      </p:sp>
+      <p:sp>
+        <p:nvSpPr>
+          <p:cNvPr id="18" name="Shape 15"/>
+          <p:cNvSpPr/>
+          <p:nvPr/>
+        </p:nvSpPr>
+        <p:spPr>
+          <a:xfrm>
+            <a:off x="2217420" y="4754880"/>
+            <a:ext cx="0" cy="73152"/>
+          </a:xfrm>
+          <a:prstGeom prst="line">
+            <a:avLst/>
+          </a:prstGeom>
+          <a:noFill/>
+          <a:ln w="9525">
+            <a:solidFill>
+              <a:srgbClr val="3A3935"/>
+            </a:solidFill>
+            <a:prstDash val="solid"/>
+          </a:ln>
+        </p:spPr>
+      </p:sp>
+      <p:sp>
+        <p:nvSpPr>
+          <p:cNvPr id="19" name="Text 16"/>
+          <p:cNvSpPr txBox="1"/>
+          <p:nvPr/>
+        </p:nvSpPr>
+        <p:spPr>
+          <a:xfrm>
+            <a:off x="1943100" y="4846320"/>
+            <a:ext cx="548640" cy="228600"/>
+          </a:xfrm>
+          <a:prstGeom prst="rect">
+            <a:avLst/>
+          </a:prstGeom>
+          <a:noFill/>
+          <a:ln/>
+        </p:spPr>
+        <p:txBody>
+          <a:bodyPr wrap="square" lIns="0" tIns="0" rIns="0" bIns="0" rtlCol="0" anchor="t"/>
+          <a:lstStyle/>
+          <a:p>
+            <a:pPr algn="ctr" indent="0" marL="0">
+              <a:buNone/>
+            </a:pPr>
+            <a:r>
+              <a:rPr lang="en-US" sz="1100" dirty="0">
+                <a:solidFill>
+                  <a:schemeClr val="tx1"/>
+                </a:solidFill>
+              </a:rPr>
+              <a:t>2</a:t>
+            </a:r>
+            <a:endParaRPr lang="en-US" sz="1100" dirty="0"/>
+          </a:p>
+        </p:txBody>
+      </p:sp>
+      <p:sp>
+        <p:nvSpPr>
+          <p:cNvPr id="20" name="Shape 17"/>
+          <p:cNvSpPr/>
+          <p:nvPr/>
+        </p:nvSpPr>
+        <p:spPr>
+          <a:xfrm>
+            <a:off x="3291840" y="4754880"/>
+            <a:ext cx="0" cy="73152"/>
+          </a:xfrm>
+          <a:prstGeom prst="line">
+            <a:avLst/>
+          </a:prstGeom>
+          <a:noFill/>
+          <a:ln w="9525">
+            <a:solidFill>
+              <a:srgbClr val="3A3935"/>
+            </a:solidFill>
+            <a:prstDash val="solid"/>
+          </a:ln>
+        </p:spPr>
+      </p:sp>
+      <p:sp>
+        <p:nvSpPr>
+          <p:cNvPr id="21" name="Text 18"/>
+          <p:cNvSpPr txBox="1"/>
+          <p:nvPr/>
+        </p:nvSpPr>
+        <p:spPr>
+          <a:xfrm>
+            <a:off x="3017520" y="4846320"/>
+            <a:ext cx="548640" cy="228600"/>
+          </a:xfrm>
+          <a:prstGeom prst="rect">
+            <a:avLst/>
+          </a:prstGeom>
+          <a:noFill/>
+          <a:ln/>
+        </p:spPr>
+        <p:txBody>
+          <a:bodyPr wrap="square" lIns="0" tIns="0" rIns="0" bIns="0" rtlCol="0" anchor="t"/>
+          <a:lstStyle/>
+          <a:p>
+            <a:pPr algn="ctr" indent="0" marL="0">
+              <a:buNone/>
+            </a:pPr>
+            <a:r>
+              <a:rPr lang="en-US" sz="1100" dirty="0">
+                <a:solidFill>
+                  <a:schemeClr val="tx1"/>
+                </a:solidFill>
+              </a:rPr>
+              <a:t>4</a:t>
+            </a:r>
+            <a:endParaRPr lang="en-US" sz="1100" dirty="0"/>
+          </a:p>
+        </p:txBody>
+      </p:sp>
+      <p:sp>
+        <p:nvSpPr>
+          <p:cNvPr id="22" name="Shape 19"/>
+          <p:cNvSpPr/>
+          <p:nvPr/>
+        </p:nvSpPr>
+        <p:spPr>
+          <a:xfrm>
+            <a:off x="4366260" y="4754880"/>
+            <a:ext cx="0" cy="73152"/>
+          </a:xfrm>
+          <a:prstGeom prst="line">
+            <a:avLst/>
+          </a:prstGeom>
+          <a:noFill/>
+          <a:ln w="9525">
+            <a:solidFill>
+              <a:srgbClr val="3A3935"/>
+            </a:solidFill>
+            <a:prstDash val="solid"/>
+          </a:ln>
+        </p:spPr>
+      </p:sp>
+      <p:sp>
+        <p:nvSpPr>
+          <p:cNvPr id="23" name="Text 20"/>
+          <p:cNvSpPr txBox="1"/>
+          <p:nvPr/>
+        </p:nvSpPr>
+        <p:spPr>
+          <a:xfrm>
+            <a:off x="4091940" y="4846320"/>
+            <a:ext cx="548640" cy="228600"/>
+          </a:xfrm>
+          <a:prstGeom prst="rect">
+            <a:avLst/>
+          </a:prstGeom>
+          <a:noFill/>
+          <a:ln/>
+        </p:spPr>
+        <p:txBody>
+          <a:bodyPr wrap="square" lIns="0" tIns="0" rIns="0" bIns="0" rtlCol="0" anchor="t"/>
+          <a:lstStyle/>
+          <a:p>
+            <a:pPr algn="ctr" indent="0" marL="0">
+              <a:buNone/>
+            </a:pPr>
+            <a:r>
+              <a:rPr lang="en-US" sz="1100" dirty="0">
+                <a:solidFill>
+                  <a:schemeClr val="tx1"/>
+                </a:solidFill>
+              </a:rPr>
+              <a:t>6</a:t>
+            </a:r>
+            <a:endParaRPr lang="en-US" sz="1100" dirty="0"/>
+          </a:p>
+        </p:txBody>
+      </p:sp>
+      <p:sp>
+        <p:nvSpPr>
+          <p:cNvPr id="24" name="Shape 21"/>
+          <p:cNvSpPr/>
+          <p:nvPr/>
+        </p:nvSpPr>
+        <p:spPr>
+          <a:xfrm>
+            <a:off x="5440680" y="4754880"/>
+            <a:ext cx="0" cy="73152"/>
+          </a:xfrm>
+          <a:prstGeom prst="line">
+            <a:avLst/>
+          </a:prstGeom>
+          <a:noFill/>
+          <a:ln w="9525">
+            <a:solidFill>
+              <a:srgbClr val="3A3935"/>
+            </a:solidFill>
+            <a:prstDash val="solid"/>
+          </a:ln>
+        </p:spPr>
+      </p:sp>
+      <p:sp>
+        <p:nvSpPr>
+          <p:cNvPr id="25" name="Text 22"/>
+          <p:cNvSpPr txBox="1"/>
+          <p:nvPr/>
+        </p:nvSpPr>
+        <p:spPr>
+          <a:xfrm>
+            <a:off x="5166360" y="4846320"/>
+            <a:ext cx="548640" cy="228600"/>
+          </a:xfrm>
+          <a:prstGeom prst="rect">
+            <a:avLst/>
+          </a:prstGeom>
+          <a:noFill/>
+          <a:ln/>
+        </p:spPr>
+        <p:txBody>
+          <a:bodyPr wrap="square" lIns="0" tIns="0" rIns="0" bIns="0" rtlCol="0" anchor="t"/>
+          <a:lstStyle/>
+          <a:p>
+            <a:pPr algn="ctr" indent="0" marL="0">
+              <a:buNone/>
+            </a:pPr>
+            <a:r>
+              <a:rPr lang="en-US" sz="1100" dirty="0">
+                <a:solidFill>
+                  <a:schemeClr val="tx1"/>
+                </a:solidFill>
+              </a:rPr>
+              <a:t>8</a:t>
+            </a:r>
+            <a:endParaRPr lang="en-US" sz="1100" dirty="0"/>
+          </a:p>
+        </p:txBody>
+      </p:sp>
+      <p:sp>
+        <p:nvSpPr>
+          <p:cNvPr id="26" name="Shape 23"/>
+          <p:cNvSpPr/>
+          <p:nvPr/>
+        </p:nvSpPr>
+        <p:spPr>
+          <a:xfrm>
+            <a:off x="6515100" y="4754880"/>
+            <a:ext cx="0" cy="73152"/>
+          </a:xfrm>
+          <a:prstGeom prst="line">
+            <a:avLst/>
+          </a:prstGeom>
+          <a:noFill/>
+          <a:ln w="9525">
+            <a:solidFill>
+              <a:srgbClr val="3A3935"/>
+            </a:solidFill>
+            <a:prstDash val="solid"/>
+          </a:ln>
+        </p:spPr>
+      </p:sp>
+      <p:sp>
+        <p:nvSpPr>
+          <p:cNvPr id="27" name="Text 24"/>
+          <p:cNvSpPr txBox="1"/>
+          <p:nvPr/>
+        </p:nvSpPr>
+        <p:spPr>
+          <a:xfrm>
+            <a:off x="6240780" y="4846320"/>
+            <a:ext cx="548640" cy="228600"/>
+          </a:xfrm>
+          <a:prstGeom prst="rect">
+            <a:avLst/>
+          </a:prstGeom>
+          <a:noFill/>
+          <a:ln/>
+        </p:spPr>
+        <p:txBody>
+          <a:bodyPr wrap="square" lIns="0" tIns="0" rIns="0" bIns="0" rtlCol="0" anchor="t"/>
+          <a:lstStyle/>
+          <a:p>
+            <a:pPr algn="ctr" indent="0" marL="0">
+              <a:buNone/>
+            </a:pPr>
+            <a:r>
+              <a:rPr lang="en-US" sz="1100" dirty="0">
+                <a:solidFill>
+                  <a:schemeClr val="tx1"/>
+                </a:solidFill>
+              </a:rPr>
+              <a:t>10</a:t>
+            </a:r>
+            <a:endParaRPr lang="en-US" sz="1100" dirty="0"/>
+          </a:p>
+        </p:txBody>
+      </p:sp>
+      <p:sp>
+        <p:nvSpPr>
+          <p:cNvPr id="28" name="Shape 25"/>
+          <p:cNvSpPr/>
+          <p:nvPr/>
+        </p:nvSpPr>
+        <p:spPr>
+          <a:xfrm>
+            <a:off x="7589520" y="4754880"/>
+            <a:ext cx="0" cy="73152"/>
+          </a:xfrm>
+          <a:prstGeom prst="line">
+            <a:avLst/>
+          </a:prstGeom>
+          <a:noFill/>
+          <a:ln w="9525">
+            <a:solidFill>
+              <a:srgbClr val="3A3935"/>
+            </a:solidFill>
+            <a:prstDash val="solid"/>
+          </a:ln>
+        </p:spPr>
+      </p:sp>
+      <p:sp>
+        <p:nvSpPr>
+          <p:cNvPr id="29" name="Text 26"/>
+          <p:cNvSpPr txBox="1"/>
+          <p:nvPr/>
+        </p:nvSpPr>
+        <p:spPr>
+          <a:xfrm>
+            <a:off x="7315200" y="4846320"/>
+            <a:ext cx="548640" cy="228600"/>
+          </a:xfrm>
+          <a:prstGeom prst="rect">
+            <a:avLst/>
+          </a:prstGeom>
+          <a:noFill/>
+          <a:ln/>
+        </p:spPr>
+        <p:txBody>
+          <a:bodyPr wrap="square" lIns="0" tIns="0" rIns="0" bIns="0" rtlCol="0" anchor="t"/>
+          <a:lstStyle/>
+          <a:p>
+            <a:pPr algn="ctr" indent="0" marL="0">
+              <a:buNone/>
+            </a:pPr>
+            <a:r>
+              <a:rPr lang="en-US" sz="1100" dirty="0">
+                <a:solidFill>
+                  <a:schemeClr val="tx1"/>
+                </a:solidFill>
+              </a:rPr>
+              <a:t>12</a:t>
+            </a:r>
+            <a:endParaRPr lang="en-US" sz="1100" dirty="0"/>
+          </a:p>
+        </p:txBody>
+      </p:sp>
+      <p:sp>
+        <p:nvSpPr>
+          <p:cNvPr id="30" name="liq-axis"/>
+          <p:cNvSpPr/>
+          <p:nvPr/>
+        </p:nvSpPr>
+        <p:spPr>
+          <a:xfrm>
+            <a:off x="1143000" y="4754880"/>
+            <a:ext cx="6446520" cy="0"/>
+          </a:xfrm>
+          <a:prstGeom prst="line">
+            <a:avLst/>
+          </a:prstGeom>
+          <a:noFill/>
+          <a:ln w="9525">
+            <a:solidFill>
+              <a:srgbClr val="3A3935"/>
+            </a:solidFill>
+            <a:prstDash val="solid"/>
+          </a:ln>
+        </p:spPr>
+      </p:sp>
+      <p:sp>
+        <p:nvSpPr>
+          <p:cNvPr id="31" name="Text 28"/>
+          <p:cNvSpPr txBox="1"/>
+          <p:nvPr/>
+        </p:nvSpPr>
+        <p:spPr>
+          <a:xfrm>
+            <a:off x="4846320" y="5084064"/>
+            <a:ext cx="2743200" cy="228600"/>
+          </a:xfrm>
+          <a:prstGeom prst="rect">
+            <a:avLst/>
+          </a:prstGeom>
+          <a:noFill/>
+          <a:ln/>
+        </p:spPr>
+        <p:txBody>
+          <a:bodyPr wrap="square" lIns="0" tIns="0" rIns="0" bIns="0" rtlCol="0" anchor="t"/>
+          <a:lstStyle/>
+          <a:p>
+            <a:pPr algn="r" indent="0" marL="0">
+              <a:buNone/>
+            </a:pPr>
+            <a:r>
+              <a:rPr lang="en-US" sz="1100" dirty="0">
+                <a:solidFill>
+                  <a:schemeClr val="tx1"/>
+                </a:solidFill>
+              </a:rPr>
+              <a:t>Liquefier energy, kWh per kg H₂</a:t>
+            </a:r>
+            <a:endParaRPr lang="en-US" sz="1100" dirty="0"/>
+          </a:p>
+        </p:txBody>
+      </p:sp>
+      <p:sp>
+        <p:nvSpPr>
+          <p:cNvPr id="32" name="liq-min-3.3"/>
+          <p:cNvSpPr/>
+          <p:nvPr/>
+        </p:nvSpPr>
+        <p:spPr>
+          <a:xfrm>
+            <a:off x="2915793" y="1783080"/>
+            <a:ext cx="0" cy="2971800"/>
+          </a:xfrm>
+          <a:prstGeom prst="line">
+            <a:avLst/>
+          </a:prstGeom>
+          <a:noFill/>
+          <a:ln w="15875">
+            <a:solidFill>
+              <a:srgbClr val="7030A0"/>
+            </a:solidFill>
+            <a:prstDash val="dash"/>
+          </a:ln>
+        </p:spPr>
+      </p:sp>
+      <p:sp>
+        <p:nvSpPr>
+          <p:cNvPr id="33" name="liq-min-3.9"/>
+          <p:cNvSpPr/>
+          <p:nvPr/>
+        </p:nvSpPr>
+        <p:spPr>
+          <a:xfrm>
+            <a:off x="3238119" y="1783080"/>
+            <a:ext cx="0" cy="2971800"/>
+          </a:xfrm>
+          <a:prstGeom prst="line">
+            <a:avLst/>
+          </a:prstGeom>
+          <a:noFill/>
+          <a:ln w="15875">
+            <a:solidFill>
+              <a:srgbClr val="7030A0"/>
+            </a:solidFill>
+            <a:prstDash val="solid"/>
+          </a:ln>
+        </p:spPr>
+      </p:sp>
+      <p:sp>
+        <p:nvSpPr>
+          <p:cNvPr id="34" name="Text 31"/>
+          <p:cNvSpPr txBox="1"/>
+          <p:nvPr/>
+        </p:nvSpPr>
+        <p:spPr>
+          <a:xfrm>
+            <a:off x="1216152" y="1856232"/>
+            <a:ext cx="1645920" cy="1005840"/>
+          </a:xfrm>
+          <a:prstGeom prst="rect">
+            <a:avLst/>
+          </a:prstGeom>
+          <a:noFill/>
+          <a:ln/>
+        </p:spPr>
+        <p:txBody>
+          <a:bodyPr wrap="square" lIns="0" tIns="0" rIns="0" bIns="0" rtlCol="0" anchor="t"/>
+          <a:lstStyle/>
+          <a:p>
+            <a:pPr indent="0" marL="0">
+              <a:buNone/>
+            </a:pPr>
+            <a:r>
+              <a:rPr lang="en-US" sz="1100" dirty="0">
+                <a:solidFill>
+                  <a:schemeClr val="accent1"/>
+                </a:solidFill>
+              </a:rPr>
+              <a:t>Unreachable: below the minimum work to liquefy, 3.3 kWh/kg (dashed) or 3.9 with ortho-para conversion</a:t>
+            </a:r>
+            <a:endParaRPr lang="en-US" sz="1100" dirty="0"/>
+          </a:p>
+        </p:txBody>
+      </p:sp>
+      <p:sp>
+        <p:nvSpPr>
+          <p:cNvPr id="35" name="Text 32"/>
+          <p:cNvSpPr txBox="1"/>
+          <p:nvPr/>
+        </p:nvSpPr>
+        <p:spPr>
+          <a:xfrm>
+            <a:off x="5257800" y="1828800"/>
+            <a:ext cx="902970" cy="228600"/>
+          </a:xfrm>
+          <a:prstGeom prst="rect">
+            <a:avLst/>
+          </a:prstGeom>
+          <a:noFill/>
+          <a:ln/>
+        </p:spPr>
+        <p:txBody>
+          <a:bodyPr wrap="square" lIns="0" tIns="0" rIns="0" bIns="0" rtlCol="0" anchor="t"/>
+          <a:lstStyle/>
+          <a:p>
+            <a:pPr algn="ctr" indent="0" marL="0">
+              <a:buNone/>
+            </a:pPr>
+            <a:r>
+              <a:rPr lang="en-US" sz="1100" b="1" dirty="0">
+                <a:solidFill>
+                  <a:schemeClr val="tx1"/>
+                </a:solidFill>
+              </a:rPr>
+              <a:t>KHI 8–9</a:t>
+            </a:r>
+            <a:endParaRPr lang="en-US" sz="1100" dirty="0"/>
+          </a:p>
+        </p:txBody>
+      </p:sp>
+      <p:sp>
+        <p:nvSpPr>
+          <p:cNvPr id="36" name="liq-lh2-line"/>
+          <p:cNvSpPr/>
+          <p:nvPr/>
+        </p:nvSpPr>
+        <p:spPr>
+          <a:xfrm flipV="1">
+            <a:off x="1143000" y="1783080"/>
+            <a:ext cx="6417167" cy="2958268"/>
+          </a:xfrm>
+          <a:prstGeom prst="line">
+            <a:avLst/>
+          </a:prstGeom>
+          <a:noFill/>
+          <a:ln w="38100">
+            <a:solidFill>
+              <a:srgbClr val="4A3AA7"/>
+            </a:solidFill>
+            <a:prstDash val="solid"/>
+          </a:ln>
+        </p:spPr>
+      </p:sp>
+      <p:sp>
+        <p:nvSpPr>
+          <p:cNvPr id="37" name="liq-nh3-placeholder"/>
+          <p:cNvSpPr/>
+          <p:nvPr/>
+        </p:nvSpPr>
+        <p:spPr>
+          <a:xfrm>
+            <a:off x="1143000" y="3930701"/>
+            <a:ext cx="6446520" cy="0"/>
+          </a:xfrm>
+          <a:prstGeom prst="line">
+            <a:avLst/>
+          </a:prstGeom>
+          <a:noFill/>
+          <a:ln w="38100">
+            <a:solidFill>
+              <a:srgbClr val="2977D6"/>
+            </a:solidFill>
+            <a:prstDash val="solid"/>
+          </a:ln>
+        </p:spPr>
+      </p:sp>
+      <p:sp>
+        <p:nvSpPr>
+          <p:cNvPr id="38" name="liq-nh3-team"/>
+          <p:cNvSpPr/>
+          <p:nvPr/>
+        </p:nvSpPr>
+        <p:spPr>
+          <a:xfrm>
+            <a:off x="1143000" y="4507230"/>
+            <a:ext cx="6446520" cy="0"/>
+          </a:xfrm>
+          <a:prstGeom prst="line">
+            <a:avLst/>
+          </a:prstGeom>
+          <a:noFill/>
+          <a:ln w="38100">
+            <a:solidFill>
+              <a:srgbClr val="2977D6"/>
+            </a:solidFill>
+            <a:prstDash val="dash"/>
+          </a:ln>
+        </p:spPr>
+      </p:sp>
+      <p:sp>
+        <p:nvSpPr>
+          <p:cNvPr id="39" name="liq-parity-1"/>
+          <p:cNvSpPr/>
+          <p:nvPr/>
+        </p:nvSpPr>
+        <p:spPr>
+          <a:xfrm>
+            <a:off x="2808237" y="3839261"/>
+            <a:ext cx="182880" cy="182880"/>
+          </a:xfrm>
+          <a:prstGeom prst="ellipse">
+            <a:avLst/>
+          </a:prstGeom>
+          <a:solidFill>
+            <a:srgbClr val="1F2933"/>
+          </a:solidFill>
+          <a:ln w="19050">
+            <a:solidFill>
+              <a:srgbClr val="FFFFFF"/>
+            </a:solidFill>
+            <a:prstDash val="solid"/>
+          </a:ln>
+        </p:spPr>
+      </p:sp>
+      <p:sp>
+        <p:nvSpPr>
+          <p:cNvPr id="40" name="liq-parity-2"/>
+          <p:cNvSpPr/>
+          <p:nvPr/>
+        </p:nvSpPr>
+        <p:spPr>
+          <a:xfrm>
+            <a:off x="1556537" y="4415790"/>
+            <a:ext cx="182880" cy="182880"/>
+          </a:xfrm>
+          <a:prstGeom prst="ellipse">
+            <a:avLst/>
+          </a:prstGeom>
+          <a:solidFill>
+            <a:srgbClr val="1F2933"/>
+          </a:solidFill>
+          <a:ln w="19050">
+            <a:solidFill>
+              <a:srgbClr val="FFFFFF"/>
+            </a:solidFill>
+            <a:prstDash val="solid"/>
+          </a:ln>
+        </p:spPr>
+      </p:sp>
+      <p:sp>
+        <p:nvSpPr>
+          <p:cNvPr id="41" name="Text 38"/>
+          <p:cNvSpPr txBox="1"/>
+          <p:nvPr/>
+        </p:nvSpPr>
+        <p:spPr>
+          <a:xfrm>
+            <a:off x="2277885" y="3647237"/>
+            <a:ext cx="457200" cy="228600"/>
+          </a:xfrm>
+          <a:prstGeom prst="rect">
+            <a:avLst/>
+          </a:prstGeom>
+          <a:noFill/>
+          <a:ln/>
+        </p:spPr>
+        <p:txBody>
+          <a:bodyPr wrap="square" lIns="0" tIns="0" rIns="0" bIns="0" rtlCol="0" anchor="t"/>
+          <a:lstStyle/>
+          <a:p>
+            <a:pPr algn="r" indent="0" marL="0">
+              <a:buNone/>
+            </a:pPr>
+            <a:r>
+              <a:rPr lang="en-US" sz="1200" b="1" dirty="0">
+                <a:solidFill>
+                  <a:schemeClr val="tx1"/>
+                </a:solidFill>
+              </a:rPr>
+              <a:t>3.27</a:t>
+            </a:r>
+            <a:endParaRPr lang="en-US" sz="1200" dirty="0"/>
+          </a:p>
+        </p:txBody>
+      </p:sp>
+      <p:sp>
+        <p:nvSpPr>
+          <p:cNvPr id="42" name="Text 39"/>
+          <p:cNvSpPr txBox="1"/>
+          <p:nvPr/>
+        </p:nvSpPr>
+        <p:spPr>
+          <a:xfrm>
+            <a:off x="1830857" y="4552950"/>
+            <a:ext cx="640080" cy="201168"/>
+          </a:xfrm>
+          <a:prstGeom prst="rect">
+            <a:avLst/>
+          </a:prstGeom>
+          <a:noFill/>
+          <a:ln/>
+        </p:spPr>
+        <p:txBody>
+          <a:bodyPr wrap="square" lIns="0" tIns="0" rIns="0" bIns="0" rtlCol="0" anchor="t"/>
+          <a:lstStyle/>
+          <a:p>
+            <a:pPr indent="0" marL="0">
+              <a:buNone/>
+            </a:pPr>
+            <a:r>
+              <a:rPr lang="en-US" sz="1200" b="1" dirty="0">
+                <a:solidFill>
+                  <a:schemeClr val="tx1"/>
+                </a:solidFill>
+              </a:rPr>
+              <a:t>0.94</a:t>
+            </a:r>
+            <a:endParaRPr lang="en-US" sz="1200" dirty="0"/>
+          </a:p>
+        </p:txBody>
+      </p:sp>
+      <p:sp>
+        <p:nvSpPr>
+          <p:cNvPr id="43" name="liq-legend-line-1"/>
+          <p:cNvSpPr/>
+          <p:nvPr/>
+        </p:nvSpPr>
+        <p:spPr>
+          <a:xfrm>
+            <a:off x="1143000" y="5504688"/>
+            <a:ext cx="365760" cy="0"/>
+          </a:xfrm>
+          <a:prstGeom prst="line">
+            <a:avLst/>
+          </a:prstGeom>
+          <a:noFill/>
+          <a:ln w="38100">
+            <a:solidFill>
+              <a:srgbClr val="4A3AA7"/>
+            </a:solidFill>
+            <a:prstDash val="solid"/>
+          </a:ln>
+        </p:spPr>
+      </p:sp>
+      <p:sp>
+        <p:nvSpPr>
+          <p:cNvPr id="44" name="Text 41"/>
+          <p:cNvSpPr txBox="1"/>
+          <p:nvPr/>
+        </p:nvSpPr>
+        <p:spPr>
+          <a:xfrm>
+            <a:off x="1600200" y="5376672"/>
+            <a:ext cx="914400" cy="256032"/>
+          </a:xfrm>
+          <a:prstGeom prst="rect">
+            <a:avLst/>
+          </a:prstGeom>
+          <a:noFill/>
+          <a:ln/>
+        </p:spPr>
+        <p:txBody>
+          <a:bodyPr wrap="square" lIns="0" tIns="0" rIns="0" bIns="0" rtlCol="0" anchor="ctr"/>
+          <a:lstStyle/>
+          <a:p>
+            <a:pPr indent="0" marL="0">
+              <a:buNone/>
+            </a:pPr>
+            <a:r>
+              <a:rPr lang="en-US" sz="1200" dirty="0">
+                <a:solidFill>
+                  <a:schemeClr val="tx1"/>
+                </a:solidFill>
+              </a:rPr>
+              <a:t>LH₂ route</a:t>
+            </a:r>
+            <a:endParaRPr lang="en-US" sz="1200" dirty="0"/>
+          </a:p>
+        </p:txBody>
+      </p:sp>
+      <p:sp>
+        <p:nvSpPr>
+          <p:cNvPr id="45" name="liq-legend-line-2"/>
+          <p:cNvSpPr/>
+          <p:nvPr/>
+        </p:nvSpPr>
+        <p:spPr>
+          <a:xfrm>
+            <a:off x="2834640" y="5504688"/>
+            <a:ext cx="365760" cy="0"/>
+          </a:xfrm>
+          <a:prstGeom prst="line">
+            <a:avLst/>
+          </a:prstGeom>
+          <a:noFill/>
+          <a:ln w="38100">
+            <a:solidFill>
+              <a:srgbClr val="2977D6"/>
+            </a:solidFill>
+            <a:prstDash val="solid"/>
+          </a:ln>
+        </p:spPr>
+      </p:sp>
+      <p:sp>
+        <p:nvSpPr>
+          <p:cNvPr id="46" name="Text 43"/>
+          <p:cNvSpPr txBox="1"/>
+          <p:nvPr/>
+        </p:nvSpPr>
+        <p:spPr>
+          <a:xfrm>
+            <a:off x="3291840" y="5376672"/>
+            <a:ext cx="2240280" cy="256032"/>
+          </a:xfrm>
+          <a:prstGeom prst="rect">
+            <a:avLst/>
+          </a:prstGeom>
+          <a:noFill/>
+          <a:ln/>
+        </p:spPr>
+        <p:txBody>
+          <a:bodyPr wrap="square" lIns="0" tIns="0" rIns="0" bIns="0" rtlCol="0" anchor="ctr"/>
+          <a:lstStyle/>
+          <a:p>
+            <a:pPr indent="0" marL="0">
+              <a:buNone/>
+            </a:pPr>
+            <a:r>
+              <a:rPr lang="en-US" sz="1200" dirty="0">
+                <a:solidFill>
+                  <a:schemeClr val="tx1"/>
+                </a:solidFill>
+              </a:rPr>
+              <a:t>NH₃ placeholder Haber-Bosch</a:t>
+            </a:r>
+            <a:endParaRPr lang="en-US" sz="1200" dirty="0"/>
+          </a:p>
+        </p:txBody>
+      </p:sp>
+      <p:sp>
+        <p:nvSpPr>
+          <p:cNvPr id="47" name="liq-legend-line-3"/>
+          <p:cNvSpPr/>
+          <p:nvPr/>
+        </p:nvSpPr>
+        <p:spPr>
+          <a:xfrm>
+            <a:off x="5806440" y="5504688"/>
+            <a:ext cx="365760" cy="0"/>
+          </a:xfrm>
+          <a:prstGeom prst="line">
+            <a:avLst/>
+          </a:prstGeom>
+          <a:noFill/>
+          <a:ln w="38100">
+            <a:solidFill>
+              <a:srgbClr val="2977D6"/>
+            </a:solidFill>
+            <a:prstDash val="dash"/>
+          </a:ln>
+        </p:spPr>
+      </p:sp>
+      <p:sp>
+        <p:nvSpPr>
+          <p:cNvPr id="48" name="Text 45"/>
+          <p:cNvSpPr txBox="1"/>
+          <p:nvPr/>
+        </p:nvSpPr>
+        <p:spPr>
+          <a:xfrm>
+            <a:off x="6263640" y="5376672"/>
+            <a:ext cx="1828800" cy="256032"/>
+          </a:xfrm>
+          <a:prstGeom prst="rect">
+            <a:avLst/>
+          </a:prstGeom>
+          <a:noFill/>
+          <a:ln/>
+        </p:spPr>
+        <p:txBody>
+          <a:bodyPr wrap="square" lIns="0" tIns="0" rIns="0" bIns="0" rtlCol="0" anchor="ctr"/>
+          <a:lstStyle/>
+          <a:p>
+            <a:pPr indent="0" marL="0">
+              <a:buNone/>
+            </a:pPr>
+            <a:r>
+              <a:rPr lang="en-US" sz="1200" dirty="0">
+                <a:solidFill>
+                  <a:schemeClr val="tx1"/>
+                </a:solidFill>
+              </a:rPr>
+              <a:t>NH₃ team input (dashed)</a:t>
+            </a:r>
+            <a:endParaRPr lang="en-US" sz="1200" dirty="0"/>
+          </a:p>
+        </p:txBody>
+      </p:sp>
+      <p:sp>
+        <p:nvSpPr>
+          <p:cNvPr id="49" name="liq-stats"/>
+          <p:cNvSpPr/>
+          <p:nvPr/>
+        </p:nvSpPr>
+        <p:spPr>
+          <a:xfrm>
+            <a:off x="7909560" y="1508760"/>
+            <a:ext cx="3730752" cy="4069080"/>
+          </a:xfrm>
+          <a:prstGeom prst="roundRect">
+            <a:avLst>
+              <a:gd name="adj" fmla="val 1471"/>
+            </a:avLst>
+          </a:prstGeom>
+          <a:solidFill>
+            <a:srgbClr val="F1EAF6"/>
+          </a:solidFill>
+          <a:ln w="9525">
+            <a:solidFill>
+              <a:srgbClr val="F1EAF6"/>
+            </a:solidFill>
+            <a:prstDash val="solid"/>
+          </a:ln>
+        </p:spPr>
+      </p:sp>
+      <p:sp>
+        <p:nvSpPr>
+          <p:cNvPr id="50" name="stat-liq-power"/>
+          <p:cNvSpPr txBox="1"/>
+          <p:nvPr/>
+        </p:nvSpPr>
+        <p:spPr>
+          <a:xfrm>
+            <a:off x="8138160" y="1645920"/>
+            <a:ext cx="3291840" cy="457200"/>
+          </a:xfrm>
+          <a:prstGeom prst="rect">
+            <a:avLst/>
+          </a:prstGeom>
+          <a:noFill/>
+          <a:ln/>
+        </p:spPr>
+        <p:txBody>
+          <a:bodyPr wrap="square" lIns="0" tIns="0" rIns="0" bIns="0" rtlCol="0" anchor="b"/>
+          <a:lstStyle/>
+          <a:p>
+            <a:pPr indent="0" marL="0">
+              <a:buNone/>
+            </a:pPr>
+            <a:r>
+              <a:rPr lang="en-US" sz="2600" b="1" dirty="0">
+                <a:solidFill>
+                  <a:schemeClr val="accent4"/>
+                </a:solidFill>
+              </a:rPr>
+              <a:t>113 vs 42 MW</a:t>
+            </a:r>
+            <a:endParaRPr lang="en-US" sz="2600" dirty="0"/>
+          </a:p>
+        </p:txBody>
+      </p:sp>
+      <p:sp>
+        <p:nvSpPr>
+          <p:cNvPr id="51" name="stat-label-liq-power"/>
+          <p:cNvSpPr txBox="1"/>
+          <p:nvPr/>
+        </p:nvSpPr>
+        <p:spPr>
+          <a:xfrm>
+            <a:off x="8138160" y="2176272"/>
+            <a:ext cx="3291840" cy="594360"/>
+          </a:xfrm>
+          <a:prstGeom prst="rect">
+            <a:avLst/>
+          </a:prstGeom>
+          <a:noFill/>
+          <a:ln/>
+        </p:spPr>
+        <p:txBody>
+          <a:bodyPr wrap="square" lIns="0" tIns="0" rIns="0" bIns="0" rtlCol="0" anchor="t"/>
+          <a:lstStyle/>
+          <a:p>
+            <a:pPr indent="0" marL="0">
+              <a:buNone/>
+            </a:pPr>
+            <a:r>
+              <a:rPr lang="en-US" sz="1400" dirty="0">
+                <a:solidFill>
+                  <a:schemeClr val="tx1"/>
+                </a:solidFill>
+              </a:rPr>
+              <a:t>LH₂ liquefier route against the ammonia route at 9 kWh/kg: 2.7 times the power</a:t>
+            </a:r>
+            <a:endParaRPr lang="en-US" sz="1400" dirty="0"/>
+          </a:p>
+        </p:txBody>
+      </p:sp>
+      <p:sp>
+        <p:nvSpPr>
+          <p:cNvPr id="52" name="stat-liq-parity"/>
+          <p:cNvSpPr txBox="1"/>
+          <p:nvPr/>
+        </p:nvSpPr>
+        <p:spPr>
+          <a:xfrm>
+            <a:off x="8138160" y="2834640"/>
+            <a:ext cx="3291840" cy="457200"/>
+          </a:xfrm>
+          <a:prstGeom prst="rect">
+            <a:avLst/>
+          </a:prstGeom>
+          <a:noFill/>
+          <a:ln/>
+        </p:spPr>
+        <p:txBody>
+          <a:bodyPr wrap="square" lIns="0" tIns="0" rIns="0" bIns="0" rtlCol="0" anchor="b"/>
+          <a:lstStyle/>
+          <a:p>
+            <a:pPr indent="0" marL="0">
+              <a:buNone/>
+            </a:pPr>
+            <a:r>
+              <a:rPr lang="en-US" sz="2400" b="1" dirty="0">
+                <a:solidFill>
+                  <a:schemeClr val="accent4"/>
+                </a:solidFill>
+              </a:rPr>
+              <a:t>3.27 → 0.94 kWh/kg</a:t>
+            </a:r>
+            <a:endParaRPr lang="en-US" sz="2400" dirty="0"/>
+          </a:p>
+        </p:txBody>
+      </p:sp>
+      <p:sp>
+        <p:nvSpPr>
+          <p:cNvPr id="53" name="stat-label-liq-parity"/>
+          <p:cNvSpPr txBox="1"/>
+          <p:nvPr/>
+        </p:nvSpPr>
+        <p:spPr>
+          <a:xfrm>
+            <a:off x="8138160" y="3364992"/>
+            <a:ext cx="3291840" cy="731520"/>
+          </a:xfrm>
+          <a:prstGeom prst="rect">
+            <a:avLst/>
+          </a:prstGeom>
+          <a:noFill/>
+          <a:ln/>
+        </p:spPr>
+        <p:txBody>
+          <a:bodyPr wrap="square" lIns="0" tIns="0" rIns="0" bIns="0" rtlCol="0" anchor="t"/>
+          <a:lstStyle/>
+          <a:p>
+            <a:pPr indent="0" marL="0">
+              <a:buNone/>
+            </a:pPr>
+            <a:r>
+              <a:rPr lang="en-US" sz="1400" dirty="0">
+                <a:solidFill>
+                  <a:schemeClr val="tx1"/>
+                </a:solidFill>
+              </a:rPr>
+              <a:t>Liquefier energy that would match ammonia, with the placeholder and then the team Haber-Bosch input</a:t>
+            </a:r>
+            <a:endParaRPr lang="en-US" sz="1400" dirty="0"/>
+          </a:p>
+        </p:txBody>
+      </p:sp>
+      <p:sp>
+        <p:nvSpPr>
+          <p:cNvPr id="54" name="stat-liq-min"/>
+          <p:cNvSpPr txBox="1"/>
+          <p:nvPr/>
+        </p:nvSpPr>
+        <p:spPr>
+          <a:xfrm>
+            <a:off x="8138160" y="4206240"/>
+            <a:ext cx="3291840" cy="457200"/>
+          </a:xfrm>
+          <a:prstGeom prst="rect">
+            <a:avLst/>
+          </a:prstGeom>
+          <a:noFill/>
+          <a:ln/>
+        </p:spPr>
+        <p:txBody>
+          <a:bodyPr wrap="square" lIns="0" tIns="0" rIns="0" bIns="0" rtlCol="0" anchor="b"/>
+          <a:lstStyle/>
+          <a:p>
+            <a:pPr indent="0" marL="0">
+              <a:buNone/>
+            </a:pPr>
+            <a:r>
+              <a:rPr lang="en-US" sz="2600" b="1" dirty="0">
+                <a:solidFill>
+                  <a:schemeClr val="accent4"/>
+                </a:solidFill>
+              </a:rPr>
+              <a:t>3.9 kWh/kg</a:t>
+            </a:r>
+            <a:endParaRPr lang="en-US" sz="2600" dirty="0"/>
+          </a:p>
+        </p:txBody>
+      </p:sp>
+      <p:sp>
+        <p:nvSpPr>
+          <p:cNvPr id="55" name="stat-label-liq-min"/>
+          <p:cNvSpPr txBox="1"/>
+          <p:nvPr/>
+        </p:nvSpPr>
+        <p:spPr>
+          <a:xfrm>
+            <a:off x="8138160" y="4736592"/>
+            <a:ext cx="3291840" cy="731520"/>
+          </a:xfrm>
+          <a:prstGeom prst="rect">
+            <a:avLst/>
+          </a:prstGeom>
+          <a:noFill/>
+          <a:ln/>
+        </p:spPr>
+        <p:txBody>
+          <a:bodyPr wrap="square" lIns="0" tIns="0" rIns="0" bIns="0" rtlCol="0" anchor="t"/>
+          <a:lstStyle/>
+          <a:p>
+            <a:pPr indent="0" marL="0">
+              <a:buNone/>
+            </a:pPr>
+            <a:r>
+              <a:rPr lang="en-US" sz="1400" dirty="0">
+                <a:solidFill>
+                  <a:schemeClr val="tx1"/>
+                </a:solidFill>
+              </a:rPr>
+              <a:t>Minimum work to liquefy (3.3 without ortho-para conversion); Kawasaki's 8–9 is 49–43 % of it</a:t>
+            </a:r>
+            <a:endParaRPr lang="en-US" sz="1400" dirty="0"/>
+          </a:p>
+        </p:txBody>
+      </p:sp>
+      <p:sp>
+        <p:nvSpPr>
+          <p:cNvPr id="56" name="basis-note"/>
+          <p:cNvSpPr txBox="1"/>
+          <p:nvPr/>
+        </p:nvSpPr>
+        <p:spPr>
+          <a:xfrm>
+            <a:off x="548640" y="5760720"/>
+            <a:ext cx="11091672" cy="594360"/>
+          </a:xfrm>
+          <a:prstGeom prst="rect">
+            <a:avLst/>
+          </a:prstGeom>
+          <a:noFill/>
+          <a:ln/>
+        </p:spPr>
+        <p:txBody>
+          <a:bodyPr wrap="square" lIns="0" tIns="0" rIns="0" bIns="0" rtlCol="0" anchor="t"/>
+          <a:lstStyle/>
+          <a:p>
+            <a:pPr indent="0" marL="0">
+              <a:buNone/>
+            </a:pPr>
+            <a:r>
+              <a:rPr lang="en-US" sz="1100" dirty="0">
+                <a:solidFill>
+                  <a:schemeClr val="tx1"/>
+                </a:solidFill>
+              </a:rPr>
+              <a:t>Placeholder Haber-Bosch 0.60 kWh/kg NH₃ (about 3.4 kWh/kg H₂, estimate, source needed); team input 1 kWh/kg H₂; 60,000 m³ export tank each route. Minimum work: US DOE Hydrogen Program Record 9013 (2009); the 49–43 % is an upper bound because Kawasaki's feed pressure is unconfirmed. Today's liquefier would match ammonia only if Haber-Bosch drew 1.46–1.64 kWh/kg NH₃, 2.4–2.7 times the placeholder.</a:t>
+            </a:r>
+            <a:endParaRPr lang="en-US" sz="1100" dirty="0"/>
+          </a:p>
+        </p:txBody>
+      </p:sp>
+      <p:sp>
+        <p:nvSpPr>
+          <p:cNvPr id="25" name="Slide Number Placeholder 0"/>
+          <p:cNvSpPr>
+            <a:spLocks noGrp="1"/>
+          </p:cNvSpPr>
+          <p:nvPr>
+            <p:ph type="sldNum" sz="quarter" idx="4294967295"/>
+          </p:nvPr>
+        </p:nvSpPr>
+        <p:spPr>
+          <a:xfrm>
+            <a:off x="11228832" y="6446520"/>
+            <a:ext cx="411480" cy="274320"/>
+          </a:xfrm>
+          <a:prstGeom prst="rect">
+            <a:avLst/>
+          </a:prstGeom>
+          <a:extLst>
+            <a:ext uri="{C572A759-6A51-4108-AA02-DFA0A04FC94B}">
+              <ma14:wrappingTextBoxFlag xmlns:ma14="http://schemas.microsoft.com/office/mac/drawingml/2011/main" val="0"/>
+            </a:ext>
+          </a:extLst>
+        </p:spPr>
+        <p:txBody>
+          <a:bodyPr/>
+          <a:lstStyle>
+            <a:lvl1pPr>
+              <a:defRPr sz="1100">
+                <a:solidFill>
+                  <a:schemeClr val="tx1"/>
+                </a:solidFill>
+              </a:defRPr>
+            </a:lvl1pPr>
+          </a:lstStyle>
+          <a:p>
+            <a:pPr algn="r"/>
+            <a:fld id="{F7021451-1387-4CA6-816F-3879F97B5CBC}" type="slidenum">
+              <a:rPr b="0" lang="en-US"/>
+              <a:t>16</a:t>
+            </a:fld>
+            <a:endParaRPr lang="en-US"/>
+          </a:p>
+        </p:txBody>
+      </p:sp>
+    </p:spTree>
+  </p:cSld>
+  <p:clrMapOvr>
+    <a:masterClrMapping/>
+  </p:clrMapOvr>
+</p:sld>
+</file>
+
+<file path=ppt/slides/slide17.xml><?xml version="1.0" encoding="utf-8"?>
+<p:sld xmlns:a="http://schemas.openxmlformats.org/drawingml/2006/main" xmlns:r="http://schemas.openxmlformats.org/officeDocument/2006/relationships" xmlns:p="http://schemas.openxmlformats.org/presentationml/2006/main">
+  <p:cSld name="Slide 17">
+    <p:spTree>
+      <p:nvGrpSpPr>
+        <p:cNvPr id="1" name=""/>
+        <p:cNvGrpSpPr/>
+        <p:nvPr/>
+      </p:nvGrpSpPr>
+      <p:grpSpPr>
+        <a:xfrm>
+          <a:off x="0" y="0"/>
+          <a:ext cx="0" cy="0"/>
+          <a:chOff x="0" y="0"/>
+          <a:chExt cx="0" cy="0"/>
+        </a:xfrm>
+      </p:grpSpPr>
+      <p:sp>
+        <p:nvSpPr>
+          <p:cNvPr id="2" name="Text 1"/>
+          <p:cNvSpPr/>
+          <p:nvPr>
+            <p:ph idx="101" type="title" hasCustomPrompt="1"/>
+          </p:nvPr>
+        </p:nvSpPr>
+        <p:spPr>
+          <a:xfrm>
+            <a:off x="548640" y="347472"/>
+            <a:ext cx="11091672" cy="868680"/>
+          </a:xfrm>
+          <a:prstGeom prst="rect">
+            <a:avLst/>
+          </a:prstGeom>
+          <a:noFill/>
+          <a:ln/>
+        </p:spPr>
+        <p:txBody>
+          <a:bodyPr wrap="square" lIns="0" tIns="0" rIns="0" bIns="0" rtlCol="0" anchor="t"/>
+          <a:lstStyle/>
+          <a:p>
+            <a:pPr algn="l" indent="0" marL="0">
+              <a:buNone/>
+            </a:pPr>
+            <a:r>
+              <a:rPr lang="en-US" sz="2800" b="1" dirty="0">
+                <a:solidFill>
+                  <a:schemeClr val="accent1"/>
+                </a:solidFill>
+              </a:rPr>
+              <a:t>The ranking can flip: LH₂ uses the least energy if Haber-Bosch needs more than ~2.65 kWh/kg H₂, or once electrolysis is counted</a:t>
+            </a:r>
+            <a:endParaRPr lang="en-US" sz="2800" dirty="0"/>
+          </a:p>
+        </p:txBody>
+      </p:sp>
+      <p:sp>
+        <p:nvSpPr>
+          <p:cNvPr id="3" name="Text 1"/>
+          <p:cNvSpPr/>
+          <p:nvPr>
+            <p:ph idx="102" type="body" hasCustomPrompt="1"/>
+          </p:nvPr>
+        </p:nvSpPr>
+        <p:spPr>
+          <a:xfrm>
+            <a:off x="548640" y="6446520"/>
+            <a:ext cx="9875520" cy="274320"/>
+          </a:xfrm>
+          <a:prstGeom prst="rect">
+            <a:avLst/>
+          </a:prstGeom>
+          <a:noFill/>
+          <a:ln/>
+        </p:spPr>
+        <p:txBody>
+          <a:bodyPr wrap="square" lIns="0" tIns="0" rIns="0" bIns="0" rtlCol="0" anchor="ctr"/>
+          <a:lstStyle/>
+          <a:p>
+            <a:pPr indent="0" marL="0">
+              <a:buNone/>
+            </a:pPr>
+            <a:r>
+              <a:rPr lang="en-US" sz="1100" dirty="0">
+                <a:solidFill>
+                  <a:schemeClr val="tx1"/>
+                </a:solidFill>
+              </a:rPr>
+              <a:t>LiqH₂VC Database Rev 0 · Sections 13.6 and 13.8 · kWh per kg H₂ delivered; supply case 100,000 t H₂ a year</a:t>
             </a:r>
             <a:endParaRPr lang="en-US" sz="1100" dirty="0"/>
           </a:p>
@@ -12150,7 +15145,7 @@
       </p:sp>
       <p:graphicFrame>
         <p:nvGraphicFramePr>
-          <p:cNvPr id="17" name="sensitivity-table"/>
+          <p:cNvPr id="18" name="sensitivity-table"/>
           <p:cNvGraphicFramePr>
             <a:graphicFrameLocks noGrp="1"/>
           </p:cNvGraphicFramePr>
@@ -13516,7 +16511,7 @@
                           <a:ea typeface="Calibri" pitchFamily="34" charset="-122"/>
                           <a:cs typeface="Calibri" pitchFamily="34" charset="-120"/>
                         </a:rPr>
-                        <a:t>Hydrogen production included (electrolysis 60 kWh/kg)</a:t>
+                        <a:t>Electrolysis counted, 60 kWh/kg</a:t>
                       </a:r>
                       <a:endParaRPr lang="en-US" sz="1400" dirty="0">
                         <a:latin typeface="Calibri" charset="0"/>
@@ -13794,7 +16789,7 @@
                   <a:schemeClr val="tx1"/>
                 </a:solidFill>
               </a:rPr>
-              <a:t>Lowest energy in each case shown in purple.</a:t>
+              <a:t>Lowest energy in each case shown in purple. Electrolysis case: slides 18 and 19.</a:t>
             </a:r>
             <a:endParaRPr lang="en-US" sz="1200" dirty="0"/>
           </a:p>
@@ -14110,447 +17105,6 @@
                 </a:solidFill>
               </a:rPr>
               <a:t>Round trip 42.5 days (two 20-day legs, two 1.25-day port calls), 90 % ship availability (assumption), 7.73 voyages per ship a year. The liquefier draws about 112 MW here, against 103 MW in Section 12.1, because it must make 108.7 ktpa.</a:t>
-            </a:r>
-            <a:endParaRPr lang="en-US" sz="1100" dirty="0"/>
-          </a:p>
-        </p:txBody>
-      </p:sp>
-      <p:sp>
-        <p:nvSpPr>
-          <p:cNvPr id="25" name="Slide Number Placeholder 0"/>
-          <p:cNvSpPr>
-            <a:spLocks noGrp="1"/>
-          </p:cNvSpPr>
-          <p:nvPr>
-            <p:ph type="sldNum" sz="quarter" idx="4294967295"/>
-          </p:nvPr>
-        </p:nvSpPr>
-        <p:spPr>
-          <a:xfrm>
-            <a:off x="11228832" y="6446520"/>
-            <a:ext cx="411480" cy="274320"/>
-          </a:xfrm>
-          <a:prstGeom prst="rect">
-            <a:avLst/>
-          </a:prstGeom>
-          <a:extLst>
-            <a:ext uri="{C572A759-6A51-4108-AA02-DFA0A04FC94B}">
-              <ma14:wrappingTextBoxFlag xmlns:ma14="http://schemas.microsoft.com/office/mac/drawingml/2011/main" val="0"/>
-            </a:ext>
-          </a:extLst>
-        </p:spPr>
-        <p:txBody>
-          <a:bodyPr/>
-          <a:lstStyle>
-            <a:lvl1pPr>
-              <a:defRPr sz="1100">
-                <a:solidFill>
-                  <a:schemeClr val="tx1"/>
-                </a:solidFill>
-              </a:defRPr>
-            </a:lvl1pPr>
-          </a:lstStyle>
-          <a:p>
-            <a:pPr algn="r"/>
-            <a:fld id="{F7021451-1387-4CA6-816F-3879F97B5CBC}" type="slidenum">
-              <a:rPr b="0" lang="en-US"/>
-              <a:t>16</a:t>
-            </a:fld>
-            <a:endParaRPr lang="en-US"/>
-          </a:p>
-        </p:txBody>
-      </p:sp>
-    </p:spTree>
-  </p:cSld>
-  <p:clrMapOvr>
-    <a:masterClrMapping/>
-  </p:clrMapOvr>
-</p:sld>
-</file>
-
-<file path=ppt/slides/slide17.xml><?xml version="1.0" encoding="utf-8"?>
-<p:sld xmlns:a="http://schemas.openxmlformats.org/drawingml/2006/main" xmlns:r="http://schemas.openxmlformats.org/officeDocument/2006/relationships" xmlns:p="http://schemas.openxmlformats.org/presentationml/2006/main">
-  <p:cSld name="Slide 17">
-    <p:spTree>
-      <p:nvGrpSpPr>
-        <p:cNvPr id="1" name=""/>
-        <p:cNvGrpSpPr/>
-        <p:nvPr/>
-      </p:nvGrpSpPr>
-      <p:grpSpPr>
-        <a:xfrm>
-          <a:off x="0" y="0"/>
-          <a:ext cx="0" cy="0"/>
-          <a:chOff x="0" y="0"/>
-          <a:chExt cx="0" cy="0"/>
-        </a:xfrm>
-      </p:grpSpPr>
-      <p:sp>
-        <p:nvSpPr>
-          <p:cNvPr id="2" name="Text 1"/>
-          <p:cNvSpPr/>
-          <p:nvPr>
-            <p:ph idx="101" type="title" hasCustomPrompt="1"/>
-          </p:nvPr>
-        </p:nvSpPr>
-        <p:spPr>
-          <a:xfrm>
-            <a:off x="548640" y="347472"/>
-            <a:ext cx="11091672" cy="868680"/>
-          </a:xfrm>
-          <a:prstGeom prst="rect">
-            <a:avLst/>
-          </a:prstGeom>
-          <a:noFill/>
-          <a:ln/>
-        </p:spPr>
-        <p:txBody>
-          <a:bodyPr wrap="square" lIns="0" tIns="0" rIns="0" bIns="0" rtlCol="0" anchor="t"/>
-          <a:lstStyle/>
-          <a:p>
-            <a:pPr algn="l" indent="0" marL="0">
-              <a:buNone/>
-            </a:pPr>
-            <a:r>
-              <a:rPr lang="en-US" sz="2800" b="1" dirty="0">
-                <a:solidFill>
-                  <a:schemeClr val="accent1"/>
-                </a:solidFill>
-              </a:rPr>
-              <a:t>On energy cost alone, gas-fired ammonia is cheapest at USD 1.208/kg H₂ against USD 1.754 for LH₂; liquefier power is ~78 % of the LH₂ bill</a:t>
-            </a:r>
-            <a:endParaRPr lang="en-US" sz="2800" dirty="0"/>
-          </a:p>
-        </p:txBody>
-      </p:sp>
-      <p:sp>
-        <p:nvSpPr>
-          <p:cNvPr id="3" name="Text 1"/>
-          <p:cNvSpPr/>
-          <p:nvPr>
-            <p:ph idx="102" type="body" hasCustomPrompt="1"/>
-          </p:nvPr>
-        </p:nvSpPr>
-        <p:spPr>
-          <a:xfrm>
-            <a:off x="548640" y="6446520"/>
-            <a:ext cx="9875520" cy="274320"/>
-          </a:xfrm>
-          <a:prstGeom prst="rect">
-            <a:avLst/>
-          </a:prstGeom>
-          <a:noFill/>
-          <a:ln/>
-        </p:spPr>
-        <p:txBody>
-          <a:bodyPr wrap="square" lIns="0" tIns="0" rIns="0" bIns="0" rtlCol="0" anchor="ctr"/>
-          <a:lstStyle/>
-          <a:p>
-            <a:pPr indent="0" marL="0">
-              <a:buNone/>
-            </a:pPr>
-            <a:r>
-              <a:rPr lang="en-US" sz="1100" dirty="0">
-                <a:solidFill>
-                  <a:schemeClr val="tx1"/>
-                </a:solidFill>
-              </a:rPr>
-              <a:t>LiqH₂VC Database Rev 0 · Section 13.8 · energy cost · USD per kg H₂ delivered, cost year not stated</a:t>
-            </a:r>
-            <a:endParaRPr lang="en-US" sz="1100" dirty="0"/>
-          </a:p>
-        </p:txBody>
-      </p:sp>
-      <p:graphicFrame>
-        <p:nvGraphicFramePr>
-          <p:cNvPr id="5" name="energy-cost-chart" descr=""/>
-          <p:cNvGraphicFramePr/>
-          <p:nvPr/>
-        </p:nvGraphicFramePr>
-        <p:xfrm>
-          <a:off x="457200" y="1417320"/>
-          <a:ext cx="7315200" cy="4206240"/>
-        </p:xfrm>
-        <a:graphic xmlns:a="http://schemas.openxmlformats.org/drawingml/2006/main">
-          <a:graphicData uri="http://schemas.openxmlformats.org/drawingml/2006/chart">
-            <c:chart xmlns:c="http://schemas.openxmlformats.org/drawingml/2006/chart" r:id="rId1"/>
-          </a:graphicData>
-        </a:graphic>
-      </p:graphicFrame>
-      <p:sp>
-        <p:nvSpPr>
-          <p:cNvPr id="6" name="cost-stats"/>
-          <p:cNvSpPr/>
-          <p:nvPr/>
-        </p:nvSpPr>
-        <p:spPr>
-          <a:xfrm>
-            <a:off x="8138160" y="1508760"/>
-            <a:ext cx="3502152" cy="4069080"/>
-          </a:xfrm>
-          <a:prstGeom prst="roundRect">
-            <a:avLst>
-              <a:gd name="adj" fmla="val 1567"/>
-            </a:avLst>
-          </a:prstGeom>
-          <a:solidFill>
-            <a:srgbClr val="F1EAF6"/>
-          </a:solidFill>
-          <a:ln w="9525">
-            <a:solidFill>
-              <a:srgbClr val="F1EAF6"/>
-            </a:solidFill>
-            <a:prstDash val="solid"/>
-          </a:ln>
-        </p:spPr>
-      </p:sp>
-      <p:sp>
-        <p:nvSpPr>
-          <p:cNvPr id="7" name="stat-gap"/>
-          <p:cNvSpPr txBox="1"/>
-          <p:nvPr/>
-        </p:nvSpPr>
-        <p:spPr>
-          <a:xfrm>
-            <a:off x="8366760" y="1645920"/>
-            <a:ext cx="3108960" cy="457200"/>
-          </a:xfrm>
-          <a:prstGeom prst="rect">
-            <a:avLst/>
-          </a:prstGeom>
-          <a:noFill/>
-          <a:ln/>
-        </p:spPr>
-        <p:txBody>
-          <a:bodyPr wrap="square" lIns="0" tIns="0" rIns="0" bIns="0" rtlCol="0" anchor="b"/>
-          <a:lstStyle/>
-          <a:p>
-            <a:pPr indent="0" marL="0">
-              <a:buNone/>
-            </a:pPr>
-            <a:r>
-              <a:rPr lang="en-US" sz="2600" b="1" dirty="0">
-                <a:solidFill>
-                  <a:schemeClr val="accent4"/>
-                </a:solidFill>
-              </a:rPr>
-              <a:t>USD 54.5 M a year</a:t>
-            </a:r>
-            <a:endParaRPr lang="en-US" sz="2600" dirty="0"/>
-          </a:p>
-        </p:txBody>
-      </p:sp>
-      <p:sp>
-        <p:nvSpPr>
-          <p:cNvPr id="8" name="stat-label-gap"/>
-          <p:cNvSpPr txBox="1"/>
-          <p:nvPr/>
-        </p:nvSpPr>
-        <p:spPr>
-          <a:xfrm>
-            <a:off x="8366760" y="2176272"/>
-            <a:ext cx="3108960" cy="594360"/>
-          </a:xfrm>
-          <a:prstGeom prst="rect">
-            <a:avLst/>
-          </a:prstGeom>
-          <a:noFill/>
-          <a:ln/>
-        </p:spPr>
-        <p:txBody>
-          <a:bodyPr wrap="square" lIns="0" tIns="0" rIns="0" bIns="0" rtlCol="0" anchor="t"/>
-          <a:lstStyle/>
-          <a:p>
-            <a:pPr indent="0" marL="0">
-              <a:buNone/>
-            </a:pPr>
-            <a:r>
-              <a:rPr lang="en-US" sz="1400" dirty="0">
-                <a:solidFill>
-                  <a:schemeClr val="tx1"/>
-                </a:solidFill>
-              </a:rPr>
-              <a:t>Energy-cost gap between LH₂ and gas-fired NH₃ at 100,000 t a year</a:t>
-            </a:r>
-            <a:endParaRPr lang="en-US" sz="1400" dirty="0"/>
-          </a:p>
-        </p:txBody>
-      </p:sp>
-      <p:sp>
-        <p:nvSpPr>
-          <p:cNvPr id="9" name="stat-zero"/>
-          <p:cNvSpPr txBox="1"/>
-          <p:nvPr/>
-        </p:nvSpPr>
-        <p:spPr>
-          <a:xfrm>
-            <a:off x="8366760" y="2834640"/>
-            <a:ext cx="3108960" cy="457200"/>
-          </a:xfrm>
-          <a:prstGeom prst="rect">
-            <a:avLst/>
-          </a:prstGeom>
-          <a:noFill/>
-          <a:ln/>
-        </p:spPr>
-        <p:txBody>
-          <a:bodyPr wrap="square" lIns="0" tIns="0" rIns="0" bIns="0" rtlCol="0" anchor="b"/>
-          <a:lstStyle/>
-          <a:p>
-            <a:pPr indent="0" marL="0">
-              <a:buNone/>
-            </a:pPr>
-            <a:r>
-              <a:rPr lang="en-US" sz="2600" b="1" dirty="0">
-                <a:solidFill>
-                  <a:schemeClr val="accent4"/>
-                </a:solidFill>
-              </a:rPr>
-              <a:t>USD 1.406/kg</a:t>
-            </a:r>
-            <a:endParaRPr lang="en-US" sz="2600" dirty="0"/>
-          </a:p>
-        </p:txBody>
-      </p:sp>
-      <p:sp>
-        <p:nvSpPr>
-          <p:cNvPr id="10" name="stat-label-zero"/>
-          <p:cNvSpPr txBox="1"/>
-          <p:nvPr/>
-        </p:nvSpPr>
-        <p:spPr>
-          <a:xfrm>
-            <a:off x="8366760" y="3364992"/>
-            <a:ext cx="3108960" cy="594360"/>
-          </a:xfrm>
-          <a:prstGeom prst="rect">
-            <a:avLst/>
-          </a:prstGeom>
-          <a:noFill/>
-          <a:ln/>
-        </p:spPr>
-        <p:txBody>
-          <a:bodyPr wrap="square" lIns="0" tIns="0" rIns="0" bIns="0" rtlCol="0" anchor="t"/>
-          <a:lstStyle/>
-          <a:p>
-            <a:pPr indent="0" marL="0">
-              <a:buNone/>
-            </a:pPr>
-            <a:r>
-              <a:rPr lang="en-US" sz="1400" dirty="0">
-                <a:solidFill>
-                  <a:schemeClr val="tx1"/>
-                </a:solidFill>
-              </a:rPr>
-              <a:t>LH₂ energy cost even at a hydrogen price of zero, still above gas-fired NH₃</a:t>
-            </a:r>
-            <a:endParaRPr lang="en-US" sz="1400" dirty="0"/>
-          </a:p>
-        </p:txBody>
-      </p:sp>
-      <p:sp>
-        <p:nvSpPr>
-          <p:cNvPr id="11" name="stat-breakeven"/>
-          <p:cNvSpPr txBox="1"/>
-          <p:nvPr/>
-        </p:nvSpPr>
-        <p:spPr>
-          <a:xfrm>
-            <a:off x="8366760" y="4023360"/>
-            <a:ext cx="3108960" cy="457200"/>
-          </a:xfrm>
-          <a:prstGeom prst="rect">
-            <a:avLst/>
-          </a:prstGeom>
-          <a:noFill/>
-          <a:ln/>
-        </p:spPr>
-        <p:txBody>
-          <a:bodyPr wrap="square" lIns="0" tIns="0" rIns="0" bIns="0" rtlCol="0" anchor="b"/>
-          <a:lstStyle/>
-          <a:p>
-            <a:pPr indent="0" marL="0">
-              <a:buNone/>
-            </a:pPr>
-            <a:r>
-              <a:rPr lang="en-US" sz="2600" b="1" dirty="0">
-                <a:solidFill>
-                  <a:schemeClr val="accent4"/>
-                </a:solidFill>
-              </a:rPr>
-              <a:t>USD 1.99/kg</a:t>
-            </a:r>
-            <a:endParaRPr lang="en-US" sz="2600" dirty="0"/>
-          </a:p>
-        </p:txBody>
-      </p:sp>
-      <p:sp>
-        <p:nvSpPr>
-          <p:cNvPr id="12" name="stat-label-breakeven"/>
-          <p:cNvSpPr txBox="1"/>
-          <p:nvPr/>
-        </p:nvSpPr>
-        <p:spPr>
-          <a:xfrm>
-            <a:off x="8366760" y="4553712"/>
-            <a:ext cx="3108960" cy="594360"/>
-          </a:xfrm>
-          <a:prstGeom prst="rect">
-            <a:avLst/>
-          </a:prstGeom>
-          <a:noFill/>
-          <a:ln/>
-        </p:spPr>
-        <p:txBody>
-          <a:bodyPr wrap="square" lIns="0" tIns="0" rIns="0" bIns="0" rtlCol="0" anchor="t"/>
-          <a:lstStyle/>
-          <a:p>
-            <a:pPr indent="0" marL="0">
-              <a:buNone/>
-            </a:pPr>
-            <a:r>
-              <a:rPr lang="en-US" sz="1400" dirty="0">
-                <a:solidFill>
-                  <a:schemeClr val="tx1"/>
-                </a:solidFill>
-              </a:rPr>
-              <a:t>Hydrogen price below which LH₂ beats the clean-fuel NH₃ route</a:t>
-            </a:r>
-            <a:endParaRPr lang="en-US" sz="1400" dirty="0"/>
-          </a:p>
-        </p:txBody>
-      </p:sp>
-      <p:sp>
-        <p:nvSpPr>
-          <p:cNvPr id="13" name="basis-note"/>
-          <p:cNvSpPr txBox="1"/>
-          <p:nvPr/>
-        </p:nvSpPr>
-        <p:spPr>
-          <a:xfrm>
-            <a:off x="548640" y="5760720"/>
-            <a:ext cx="11091672" cy="548640"/>
-          </a:xfrm>
-          <a:prstGeom prst="rect">
-            <a:avLst/>
-          </a:prstGeom>
-          <a:noFill/>
-          <a:ln/>
-        </p:spPr>
-        <p:txBody>
-          <a:bodyPr wrap="square" lIns="0" tIns="0" rIns="0" bIns="0" rtlCol="0" anchor="t"/>
-          <a:lstStyle/>
-          <a:p>
-            <a:pPr indent="0" marL="0">
-              <a:buNone/>
-            </a:pPr>
-            <a:r>
-              <a:rPr lang="en-US" sz="1100" dirty="0">
-                <a:solidFill>
-                  <a:schemeClr val="tx1"/>
-                </a:solidFill>
-              </a:rPr>
-              <a:t>Prices are team inputs in USD with no cost year: electricity 140 USD/MWh, marine fuel oil 553 USD/t, natural gas 13 USD/MMBtu (LHV), ammonia 700 USD/t; hydrogen 4.00 USD/kg (assumption); import electricity held equal to export (placeholder). Labels under 0.10 hidden.</a:t>
             </a:r>
             <a:endParaRPr lang="en-US" sz="1100" dirty="0"/>
           </a:p>
@@ -14658,7 +17212,7 @@
                   <a:schemeClr val="accent1"/>
                 </a:solidFill>
               </a:rPr>
-              <a:t>Neither carrier wins on every measure: ammonia leads on energy, energy cost and ship count, while LH₂ delivers more of its hydrogen</a:t>
+              <a:t>Counting the electrolysis of the hydrogen each route consumes adds 65–77 kWh/kg and puts LH₂ ahead: 78.49 against 81.00 kWh/kg</a:t>
             </a:r>
             <a:endParaRPr lang="en-US" sz="2800" dirty="0"/>
           </a:p>
@@ -14696,47 +17250,38 @@
                   <a:schemeClr val="tx1"/>
                 </a:solidFill>
               </a:rPr>
-              <a:t>LiqH₂VC Database Rev 0 · Section 13.9 · summary of the LH₂ vs NH₃ screening</a:t>
+              <a:t>LiqH₂VC Database Rev 0 · Section 13.7 · full value chain with electrolysis · kWh per kg H₂ delivered · electrolyser 60 kWh/kg H₂ (assumption)</a:t>
             </a:r>
             <a:endParaRPr lang="en-US" sz="1100" dirty="0"/>
           </a:p>
         </p:txBody>
       </p:sp>
-      <p:sp>
-        <p:nvSpPr>
-          <p:cNvPr id="5" name="summary-head-1"/>
-          <p:cNvSpPr/>
-          <p:nvPr/>
-        </p:nvSpPr>
-        <p:spPr>
-          <a:xfrm>
-            <a:off x="548640" y="1508760"/>
-            <a:ext cx="5454396" cy="548640"/>
-          </a:xfrm>
-          <a:prstGeom prst="rect">
-            <a:avLst/>
-          </a:prstGeom>
-          <a:solidFill>
-            <a:srgbClr val="4A3AA7"/>
-          </a:solidFill>
-          <a:ln w="12700">
-            <a:solidFill>
-              <a:srgbClr val="4A3AA7"/>
-            </a:solidFill>
-            <a:prstDash val="solid"/>
-          </a:ln>
-        </p:spPr>
-      </p:sp>
-      <p:sp>
-        <p:nvSpPr>
-          <p:cNvPr id="6" name="Text 3"/>
+      <p:graphicFrame>
+        <p:nvGraphicFramePr>
+          <p:cNvPr id="5" name="electrolysis-chart" descr=""/>
+          <p:cNvGraphicFramePr/>
+          <p:nvPr/>
+        </p:nvGraphicFramePr>
+        <p:xfrm>
+          <a:off x="457200" y="1417320"/>
+          <a:ext cx="7315200" cy="4206240"/>
+        </p:xfrm>
+        <a:graphic xmlns:a="http://schemas.openxmlformats.org/drawingml/2006/main">
+          <a:graphicData uri="http://schemas.openxmlformats.org/drawingml/2006/chart">
+            <c:chart xmlns:c="http://schemas.openxmlformats.org/drawingml/2006/chart" r:id="rId1"/>
+          </a:graphicData>
+        </a:graphic>
+      </p:graphicFrame>
+      <p:sp>
+        <p:nvSpPr>
+          <p:cNvPr id="6" name="Text 2"/>
           <p:cNvSpPr txBox="1"/>
           <p:nvPr/>
         </p:nvSpPr>
         <p:spPr>
           <a:xfrm>
-            <a:off x="731520" y="1508760"/>
-            <a:ext cx="5088636" cy="548640"/>
+            <a:off x="8138160" y="1508760"/>
+            <a:ext cx="3502152" cy="320040"/>
           </a:xfrm>
           <a:prstGeom prst="rect">
             <a:avLst/>
@@ -14745,61 +17290,864 @@
           <a:ln/>
         </p:spPr>
         <p:txBody>
-          <a:bodyPr wrap="square" lIns="0" tIns="0" rIns="0" bIns="0" rtlCol="0" anchor="ctr"/>
+          <a:bodyPr wrap="square" lIns="0" tIns="0" rIns="0" bIns="0" rtlCol="0" anchor="t"/>
           <a:lstStyle/>
           <a:p>
             <a:pPr indent="0" marL="0">
               <a:buNone/>
             </a:pPr>
             <a:r>
-              <a:rPr lang="en-US" sz="1800" b="1" dirty="0">
-                <a:solidFill>
-                  <a:schemeClr val="bg1"/>
-                </a:solidFill>
-              </a:rPr>
-              <a:t>Where LH₂ is ahead</a:t>
-            </a:r>
-            <a:endParaRPr lang="en-US" sz="1800" dirty="0"/>
-          </a:p>
-        </p:txBody>
-      </p:sp>
-      <p:sp>
-        <p:nvSpPr>
-          <p:cNvPr id="7" name="summary-body-1"/>
-          <p:cNvSpPr/>
-          <p:nvPr/>
-        </p:nvSpPr>
-        <p:spPr>
-          <a:xfrm>
-            <a:off x="548640" y="2057400"/>
-            <a:ext cx="5454396" cy="3063240"/>
-          </a:xfrm>
-          <a:prstGeom prst="roundRect">
-            <a:avLst>
-              <a:gd name="adj" fmla="val 1791"/>
-            </a:avLst>
-          </a:prstGeom>
-          <a:solidFill>
-            <a:srgbClr val="F1EAF6"/>
-          </a:solidFill>
-          <a:ln w="9525">
-            <a:solidFill>
-              <a:srgbClr val="F1EAF6"/>
-            </a:solidFill>
-            <a:prstDash val="solid"/>
-          </a:ln>
-        </p:spPr>
-      </p:sp>
-      <p:sp>
-        <p:nvSpPr>
-          <p:cNvPr id="8" name="Text 5"/>
+              <a:rPr lang="en-US" sz="1500" b="1" dirty="0">
+                <a:solidFill>
+                  <a:schemeClr val="tx2"/>
+                </a:solidFill>
+              </a:rPr>
+              <a:t>NH₃ energy as % of LH₂ (LH₂ = 100)</a:t>
+            </a:r>
+            <a:endParaRPr lang="en-US" sz="1500" dirty="0"/>
+          </a:p>
+        </p:txBody>
+      </p:sp>
+      <p:graphicFrame>
+        <p:nvGraphicFramePr>
+          <p:cNvPr id="19" name="electrolysis-views-table"/>
+          <p:cNvGraphicFramePr>
+            <a:graphicFrameLocks noGrp="1"/>
+          </p:cNvGraphicFramePr>
+          <p:nvPr>
+            <p:extLst>
+              <p:ext uri="{D42A27DB-BD31-4B8C-83A1-F6EECF244321}">
+                <p14:modId xmlns:p14="http://schemas.microsoft.com/office/powerpoint/2010/main" val="1579011935"/>
+              </p:ext>
+            </p:extLst>
+          </p:nvPr>
+        </p:nvGraphicFramePr>
+        <p:xfrm>
+          <a:off x="8138160" y="1920240"/>
+          <a:ext cx="3502152" cy="914400"/>
+        </p:xfrm>
+        <a:graphic>
+          <a:graphicData uri="http://schemas.openxmlformats.org/drawingml/2006/table">
+            <a:tbl>
+              <a:tblPr/>
+              <a:tblGrid>
+                <a:gridCol w="960120"/>
+                <a:gridCol w="822960"/>
+                <a:gridCol w="640080"/>
+                <a:gridCol w="1078992"/>
+              </a:tblGrid>
+              <a:tr h="411480">
+                <a:tc>
+                  <a:txBody>
+                    <a:bodyPr/>
+                    <a:lstStyle/>
+                    <a:p>
+                      <a:pPr indent="0" marL="0">
+                        <a:buNone/>
+                      </a:pPr>
+                      <a:r>
+                        <a:rPr lang="en-US" sz="1200" b="1" dirty="0">
+                          <a:solidFill>
+                            <a:srgbClr val="FFFFFF"/>
+                          </a:solidFill>
+                          <a:latin typeface="Calibri" pitchFamily="34" charset="0"/>
+                          <a:ea typeface="Calibri" pitchFamily="34" charset="-122"/>
+                          <a:cs typeface="Calibri" pitchFamily="34" charset="-120"/>
+                        </a:rPr>
+                        <a:t>NH₃ route</a:t>
+                      </a:r>
+                      <a:endParaRPr lang="en-US" sz="1200" dirty="0">
+                        <a:latin typeface="Calibri" charset="0"/>
+                        <a:ea typeface="Calibri" charset="0"/>
+                        <a:cs typeface="Calibri" charset="0"/>
+                      </a:endParaRPr>
+                    </a:p>
+                  </a:txBody>
+                  <a:tcPr marL="76200" marR="76200" marT="38100" marB="38100" anchor="ctr">
+                    <a:lnL w="9525" cap="flat" cmpd="sng" algn="ctr">
+                      <a:solidFill>
+                        <a:srgbClr val="E8E8E4"/>
+                      </a:solidFill>
+                      <a:prstDash val="solid"/>
+                      <a:round/>
+                      <a:headEnd type="none" w="med" len="med"/>
+                      <a:tailEnd type="none" w="med" len="med"/>
+                    </a:lnL>
+                    <a:lnR w="9525" cap="flat" cmpd="sng" algn="ctr">
+                      <a:solidFill>
+                        <a:srgbClr val="E8E8E4"/>
+                      </a:solidFill>
+                      <a:prstDash val="solid"/>
+                      <a:round/>
+                      <a:headEnd type="none" w="med" len="med"/>
+                      <a:tailEnd type="none" w="med" len="med"/>
+                    </a:lnR>
+                    <a:lnT w="9525" cap="flat" cmpd="sng" algn="ctr">
+                      <a:solidFill>
+                        <a:srgbClr val="E8E8E4"/>
+                      </a:solidFill>
+                      <a:prstDash val="solid"/>
+                      <a:round/>
+                      <a:headEnd type="none" w="med" len="med"/>
+                      <a:tailEnd type="none" w="med" len="med"/>
+                    </a:lnT>
+                    <a:lnB w="9525" cap="flat" cmpd="sng" algn="ctr">
+                      <a:solidFill>
+                        <a:srgbClr val="E8E8E4"/>
+                      </a:solidFill>
+                      <a:prstDash val="solid"/>
+                      <a:round/>
+                      <a:headEnd type="none" w="med" len="med"/>
+                      <a:tailEnd type="none" w="med" len="med"/>
+                    </a:lnB>
+                    <a:solidFill>
+                      <a:srgbClr val="1F2933"/>
+                    </a:solidFill>
+                  </a:tcPr>
+                </a:tc>
+                <a:tc>
+                  <a:txBody>
+                    <a:bodyPr/>
+                    <a:lstStyle/>
+                    <a:p>
+                      <a:pPr indent="0" marL="0">
+                        <a:buNone/>
+                      </a:pPr>
+                      <a:r>
+                        <a:rPr lang="en-US" sz="1200" b="1" dirty="0">
+                          <a:solidFill>
+                            <a:srgbClr val="FFFFFF"/>
+                          </a:solidFill>
+                          <a:latin typeface="Calibri" pitchFamily="34" charset="0"/>
+                          <a:ea typeface="Calibri" pitchFamily="34" charset="-122"/>
+                          <a:cs typeface="Calibri" pitchFamily="34" charset="-120"/>
+                        </a:rPr>
+                        <a:t>Without</a:t>
+                      </a:r>
+                      <a:endParaRPr lang="en-US" sz="1200" dirty="0">
+                        <a:latin typeface="Calibri" charset="0"/>
+                        <a:ea typeface="Calibri" charset="0"/>
+                        <a:cs typeface="Calibri" charset="0"/>
+                      </a:endParaRPr>
+                    </a:p>
+                  </a:txBody>
+                  <a:tcPr marL="76200" marR="76200" marT="38100" marB="38100" anchor="ctr">
+                    <a:lnL w="9525" cap="flat" cmpd="sng" algn="ctr">
+                      <a:solidFill>
+                        <a:srgbClr val="E8E8E4"/>
+                      </a:solidFill>
+                      <a:prstDash val="solid"/>
+                      <a:round/>
+                      <a:headEnd type="none" w="med" len="med"/>
+                      <a:tailEnd type="none" w="med" len="med"/>
+                    </a:lnL>
+                    <a:lnR w="9525" cap="flat" cmpd="sng" algn="ctr">
+                      <a:solidFill>
+                        <a:srgbClr val="E8E8E4"/>
+                      </a:solidFill>
+                      <a:prstDash val="solid"/>
+                      <a:round/>
+                      <a:headEnd type="none" w="med" len="med"/>
+                      <a:tailEnd type="none" w="med" len="med"/>
+                    </a:lnR>
+                    <a:lnT w="9525" cap="flat" cmpd="sng" algn="ctr">
+                      <a:solidFill>
+                        <a:srgbClr val="E8E8E4"/>
+                      </a:solidFill>
+                      <a:prstDash val="solid"/>
+                      <a:round/>
+                      <a:headEnd type="none" w="med" len="med"/>
+                      <a:tailEnd type="none" w="med" len="med"/>
+                    </a:lnT>
+                    <a:lnB w="9525" cap="flat" cmpd="sng" algn="ctr">
+                      <a:solidFill>
+                        <a:srgbClr val="E8E8E4"/>
+                      </a:solidFill>
+                      <a:prstDash val="solid"/>
+                      <a:round/>
+                      <a:headEnd type="none" w="med" len="med"/>
+                      <a:tailEnd type="none" w="med" len="med"/>
+                    </a:lnB>
+                    <a:solidFill>
+                      <a:srgbClr val="1F2933"/>
+                    </a:solidFill>
+                  </a:tcPr>
+                </a:tc>
+                <a:tc>
+                  <a:txBody>
+                    <a:bodyPr/>
+                    <a:lstStyle/>
+                    <a:p>
+                      <a:pPr indent="0" marL="0">
+                        <a:buNone/>
+                      </a:pPr>
+                      <a:r>
+                        <a:rPr lang="en-US" sz="1200" b="1" dirty="0">
+                          <a:solidFill>
+                            <a:srgbClr val="FFFFFF"/>
+                          </a:solidFill>
+                          <a:latin typeface="Calibri" pitchFamily="34" charset="0"/>
+                          <a:ea typeface="Calibri" pitchFamily="34" charset="-122"/>
+                          <a:cs typeface="Calibri" pitchFamily="34" charset="-120"/>
+                        </a:rPr>
+                        <a:t>With</a:t>
+                      </a:r>
+                      <a:endParaRPr lang="en-US" sz="1200" dirty="0">
+                        <a:latin typeface="Calibri" charset="0"/>
+                        <a:ea typeface="Calibri" charset="0"/>
+                        <a:cs typeface="Calibri" charset="0"/>
+                      </a:endParaRPr>
+                    </a:p>
+                  </a:txBody>
+                  <a:tcPr marL="76200" marR="76200" marT="38100" marB="38100" anchor="ctr">
+                    <a:lnL w="9525" cap="flat" cmpd="sng" algn="ctr">
+                      <a:solidFill>
+                        <a:srgbClr val="E8E8E4"/>
+                      </a:solidFill>
+                      <a:prstDash val="solid"/>
+                      <a:round/>
+                      <a:headEnd type="none" w="med" len="med"/>
+                      <a:tailEnd type="none" w="med" len="med"/>
+                    </a:lnL>
+                    <a:lnR w="9525" cap="flat" cmpd="sng" algn="ctr">
+                      <a:solidFill>
+                        <a:srgbClr val="E8E8E4"/>
+                      </a:solidFill>
+                      <a:prstDash val="solid"/>
+                      <a:round/>
+                      <a:headEnd type="none" w="med" len="med"/>
+                      <a:tailEnd type="none" w="med" len="med"/>
+                    </a:lnR>
+                    <a:lnT w="9525" cap="flat" cmpd="sng" algn="ctr">
+                      <a:solidFill>
+                        <a:srgbClr val="E8E8E4"/>
+                      </a:solidFill>
+                      <a:prstDash val="solid"/>
+                      <a:round/>
+                      <a:headEnd type="none" w="med" len="med"/>
+                      <a:tailEnd type="none" w="med" len="med"/>
+                    </a:lnT>
+                    <a:lnB w="9525" cap="flat" cmpd="sng" algn="ctr">
+                      <a:solidFill>
+                        <a:srgbClr val="E8E8E4"/>
+                      </a:solidFill>
+                      <a:prstDash val="solid"/>
+                      <a:round/>
+                      <a:headEnd type="none" w="med" len="med"/>
+                      <a:tailEnd type="none" w="med" len="med"/>
+                    </a:lnB>
+                    <a:solidFill>
+                      <a:srgbClr val="1F2933"/>
+                    </a:solidFill>
+                  </a:tcPr>
+                </a:tc>
+                <a:tc>
+                  <a:txBody>
+                    <a:bodyPr/>
+                    <a:lstStyle/>
+                    <a:p>
+                      <a:pPr indent="0" marL="0">
+                        <a:buNone/>
+                      </a:pPr>
+                      <a:r>
+                        <a:rPr lang="en-US" sz="1200" b="1" dirty="0">
+                          <a:solidFill>
+                            <a:srgbClr val="FFFFFF"/>
+                          </a:solidFill>
+                          <a:latin typeface="Calibri" pitchFamily="34" charset="0"/>
+                          <a:ea typeface="Calibri" pitchFamily="34" charset="-122"/>
+                          <a:cs typeface="Calibri" pitchFamily="34" charset="-120"/>
+                        </a:rPr>
+                        <a:t>Corrected*</a:t>
+                      </a:r>
+                      <a:endParaRPr lang="en-US" sz="1200" dirty="0">
+                        <a:latin typeface="Calibri" charset="0"/>
+                        <a:ea typeface="Calibri" charset="0"/>
+                        <a:cs typeface="Calibri" charset="0"/>
+                      </a:endParaRPr>
+                    </a:p>
+                  </a:txBody>
+                  <a:tcPr marL="76200" marR="76200" marT="38100" marB="38100" anchor="ctr">
+                    <a:lnL w="9525" cap="flat" cmpd="sng" algn="ctr">
+                      <a:solidFill>
+                        <a:srgbClr val="E8E8E4"/>
+                      </a:solidFill>
+                      <a:prstDash val="solid"/>
+                      <a:round/>
+                      <a:headEnd type="none" w="med" len="med"/>
+                      <a:tailEnd type="none" w="med" len="med"/>
+                    </a:lnL>
+                    <a:lnR w="9525" cap="flat" cmpd="sng" algn="ctr">
+                      <a:solidFill>
+                        <a:srgbClr val="E8E8E4"/>
+                      </a:solidFill>
+                      <a:prstDash val="solid"/>
+                      <a:round/>
+                      <a:headEnd type="none" w="med" len="med"/>
+                      <a:tailEnd type="none" w="med" len="med"/>
+                    </a:lnR>
+                    <a:lnT w="9525" cap="flat" cmpd="sng" algn="ctr">
+                      <a:solidFill>
+                        <a:srgbClr val="E8E8E4"/>
+                      </a:solidFill>
+                      <a:prstDash val="solid"/>
+                      <a:round/>
+                      <a:headEnd type="none" w="med" len="med"/>
+                      <a:tailEnd type="none" w="med" len="med"/>
+                    </a:lnT>
+                    <a:lnB w="9525" cap="flat" cmpd="sng" algn="ctr">
+                      <a:solidFill>
+                        <a:srgbClr val="E8E8E4"/>
+                      </a:solidFill>
+                      <a:prstDash val="solid"/>
+                      <a:round/>
+                      <a:headEnd type="none" w="med" len="med"/>
+                      <a:tailEnd type="none" w="med" len="med"/>
+                    </a:lnB>
+                    <a:solidFill>
+                      <a:srgbClr val="1F2933"/>
+                    </a:solidFill>
+                  </a:tcPr>
+                </a:tc>
+              </a:tr>
+              <a:tr h="411480">
+                <a:tc>
+                  <a:txBody>
+                    <a:bodyPr/>
+                    <a:lstStyle/>
+                    <a:p>
+                      <a:pPr indent="0" marL="0">
+                        <a:buNone/>
+                      </a:pPr>
+                      <a:r>
+                        <a:rPr lang="en-US" sz="1200" b="1" dirty="0">
+                          <a:solidFill>
+                            <a:srgbClr val="3A3935"/>
+                          </a:solidFill>
+                          <a:latin typeface="Calibri" pitchFamily="34" charset="0"/>
+                          <a:ea typeface="Calibri" pitchFamily="34" charset="-122"/>
+                          <a:cs typeface="Calibri" pitchFamily="34" charset="-120"/>
+                        </a:rPr>
+                        <a:t>Gas-fired</a:t>
+                      </a:r>
+                      <a:endParaRPr lang="en-US" sz="1200" dirty="0">
+                        <a:latin typeface="Calibri" charset="0"/>
+                        <a:ea typeface="Calibri" charset="0"/>
+                        <a:cs typeface="Calibri" charset="0"/>
+                      </a:endParaRPr>
+                    </a:p>
+                  </a:txBody>
+                  <a:tcPr marL="76200" marR="76200" marT="38100" marB="38100" anchor="ctr">
+                    <a:lnL w="9525" cap="flat" cmpd="sng" algn="ctr">
+                      <a:solidFill>
+                        <a:srgbClr val="E8E8E4"/>
+                      </a:solidFill>
+                      <a:prstDash val="solid"/>
+                      <a:round/>
+                      <a:headEnd type="none" w="med" len="med"/>
+                      <a:tailEnd type="none" w="med" len="med"/>
+                    </a:lnL>
+                    <a:lnR w="9525" cap="flat" cmpd="sng" algn="ctr">
+                      <a:solidFill>
+                        <a:srgbClr val="E8E8E4"/>
+                      </a:solidFill>
+                      <a:prstDash val="solid"/>
+                      <a:round/>
+                      <a:headEnd type="none" w="med" len="med"/>
+                      <a:tailEnd type="none" w="med" len="med"/>
+                    </a:lnR>
+                    <a:lnT w="9525" cap="flat" cmpd="sng" algn="ctr">
+                      <a:solidFill>
+                        <a:srgbClr val="E8E8E4"/>
+                      </a:solidFill>
+                      <a:prstDash val="solid"/>
+                      <a:round/>
+                      <a:headEnd type="none" w="med" len="med"/>
+                      <a:tailEnd type="none" w="med" len="med"/>
+                    </a:lnT>
+                    <a:lnB w="9525" cap="flat" cmpd="sng" algn="ctr">
+                      <a:solidFill>
+                        <a:srgbClr val="E8E8E4"/>
+                      </a:solidFill>
+                      <a:prstDash val="solid"/>
+                      <a:round/>
+                      <a:headEnd type="none" w="med" len="med"/>
+                      <a:tailEnd type="none" w="med" len="med"/>
+                    </a:lnB>
+                  </a:tcPr>
+                </a:tc>
+                <a:tc>
+                  <a:txBody>
+                    <a:bodyPr/>
+                    <a:lstStyle/>
+                    <a:p>
+                      <a:pPr indent="0" marL="0">
+                        <a:buNone/>
+                      </a:pPr>
+                      <a:r>
+                        <a:rPr lang="en-US" sz="1200" dirty="0">
+                          <a:solidFill>
+                            <a:srgbClr val="3A3935"/>
+                          </a:solidFill>
+                          <a:latin typeface="Calibri" pitchFamily="34" charset="0"/>
+                          <a:ea typeface="Calibri" pitchFamily="34" charset="-122"/>
+                          <a:cs typeface="Calibri" pitchFamily="34" charset="-120"/>
+                        </a:rPr>
+                        <a:t>86</a:t>
+                      </a:r>
+                      <a:endParaRPr lang="en-US" sz="1200" dirty="0">
+                        <a:latin typeface="Calibri" charset="0"/>
+                        <a:ea typeface="Calibri" charset="0"/>
+                        <a:cs typeface="Calibri" charset="0"/>
+                      </a:endParaRPr>
+                    </a:p>
+                  </a:txBody>
+                  <a:tcPr marL="76200" marR="76200" marT="38100" marB="38100" anchor="ctr">
+                    <a:lnL w="9525" cap="flat" cmpd="sng" algn="ctr">
+                      <a:solidFill>
+                        <a:srgbClr val="E8E8E4"/>
+                      </a:solidFill>
+                      <a:prstDash val="solid"/>
+                      <a:round/>
+                      <a:headEnd type="none" w="med" len="med"/>
+                      <a:tailEnd type="none" w="med" len="med"/>
+                    </a:lnL>
+                    <a:lnR w="9525" cap="flat" cmpd="sng" algn="ctr">
+                      <a:solidFill>
+                        <a:srgbClr val="E8E8E4"/>
+                      </a:solidFill>
+                      <a:prstDash val="solid"/>
+                      <a:round/>
+                      <a:headEnd type="none" w="med" len="med"/>
+                      <a:tailEnd type="none" w="med" len="med"/>
+                    </a:lnR>
+                    <a:lnT w="9525" cap="flat" cmpd="sng" algn="ctr">
+                      <a:solidFill>
+                        <a:srgbClr val="E8E8E4"/>
+                      </a:solidFill>
+                      <a:prstDash val="solid"/>
+                      <a:round/>
+                      <a:headEnd type="none" w="med" len="med"/>
+                      <a:tailEnd type="none" w="med" len="med"/>
+                    </a:lnT>
+                    <a:lnB w="9525" cap="flat" cmpd="sng" algn="ctr">
+                      <a:solidFill>
+                        <a:srgbClr val="E8E8E4"/>
+                      </a:solidFill>
+                      <a:prstDash val="solid"/>
+                      <a:round/>
+                      <a:headEnd type="none" w="med" len="med"/>
+                      <a:tailEnd type="none" w="med" len="med"/>
+                    </a:lnB>
+                  </a:tcPr>
+                </a:tc>
+                <a:tc>
+                  <a:txBody>
+                    <a:bodyPr/>
+                    <a:lstStyle/>
+                    <a:p>
+                      <a:pPr indent="0" marL="0">
+                        <a:buNone/>
+                      </a:pPr>
+                      <a:r>
+                        <a:rPr lang="en-US" sz="1200" b="1" dirty="0">
+                          <a:solidFill>
+                            <a:srgbClr val="7030A0"/>
+                          </a:solidFill>
+                          <a:latin typeface="Calibri" pitchFamily="34" charset="0"/>
+                          <a:ea typeface="Calibri" pitchFamily="34" charset="-122"/>
+                          <a:cs typeface="Calibri" pitchFamily="34" charset="-120"/>
+                        </a:rPr>
+                        <a:t>103</a:t>
+                      </a:r>
+                      <a:endParaRPr lang="en-US" sz="1200" dirty="0">
+                        <a:latin typeface="Calibri" charset="0"/>
+                        <a:ea typeface="Calibri" charset="0"/>
+                        <a:cs typeface="Calibri" charset="0"/>
+                      </a:endParaRPr>
+                    </a:p>
+                  </a:txBody>
+                  <a:tcPr marL="76200" marR="76200" marT="38100" marB="38100" anchor="ctr">
+                    <a:lnL w="9525" cap="flat" cmpd="sng" algn="ctr">
+                      <a:solidFill>
+                        <a:srgbClr val="E8E8E4"/>
+                      </a:solidFill>
+                      <a:prstDash val="solid"/>
+                      <a:round/>
+                      <a:headEnd type="none" w="med" len="med"/>
+                      <a:tailEnd type="none" w="med" len="med"/>
+                    </a:lnL>
+                    <a:lnR w="9525" cap="flat" cmpd="sng" algn="ctr">
+                      <a:solidFill>
+                        <a:srgbClr val="E8E8E4"/>
+                      </a:solidFill>
+                      <a:prstDash val="solid"/>
+                      <a:round/>
+                      <a:headEnd type="none" w="med" len="med"/>
+                      <a:tailEnd type="none" w="med" len="med"/>
+                    </a:lnR>
+                    <a:lnT w="9525" cap="flat" cmpd="sng" algn="ctr">
+                      <a:solidFill>
+                        <a:srgbClr val="E8E8E4"/>
+                      </a:solidFill>
+                      <a:prstDash val="solid"/>
+                      <a:round/>
+                      <a:headEnd type="none" w="med" len="med"/>
+                      <a:tailEnd type="none" w="med" len="med"/>
+                    </a:lnT>
+                    <a:lnB w="9525" cap="flat" cmpd="sng" algn="ctr">
+                      <a:solidFill>
+                        <a:srgbClr val="E8E8E4"/>
+                      </a:solidFill>
+                      <a:prstDash val="solid"/>
+                      <a:round/>
+                      <a:headEnd type="none" w="med" len="med"/>
+                      <a:tailEnd type="none" w="med" len="med"/>
+                    </a:lnB>
+                  </a:tcPr>
+                </a:tc>
+                <a:tc>
+                  <a:txBody>
+                    <a:bodyPr/>
+                    <a:lstStyle/>
+                    <a:p>
+                      <a:pPr indent="0" marL="0">
+                        <a:buNone/>
+                      </a:pPr>
+                      <a:r>
+                        <a:rPr lang="en-US" sz="1200" b="1" dirty="0">
+                          <a:solidFill>
+                            <a:srgbClr val="7030A0"/>
+                          </a:solidFill>
+                          <a:latin typeface="Calibri" pitchFamily="34" charset="0"/>
+                          <a:ea typeface="Calibri" pitchFamily="34" charset="-122"/>
+                          <a:cs typeface="Calibri" pitchFamily="34" charset="-120"/>
+                        </a:rPr>
+                        <a:t>101</a:t>
+                      </a:r>
+                      <a:endParaRPr lang="en-US" sz="1200" dirty="0">
+                        <a:latin typeface="Calibri" charset="0"/>
+                        <a:ea typeface="Calibri" charset="0"/>
+                        <a:cs typeface="Calibri" charset="0"/>
+                      </a:endParaRPr>
+                    </a:p>
+                  </a:txBody>
+                  <a:tcPr marL="76200" marR="76200" marT="38100" marB="38100" anchor="ctr">
+                    <a:lnL w="9525" cap="flat" cmpd="sng" algn="ctr">
+                      <a:solidFill>
+                        <a:srgbClr val="E8E8E4"/>
+                      </a:solidFill>
+                      <a:prstDash val="solid"/>
+                      <a:round/>
+                      <a:headEnd type="none" w="med" len="med"/>
+                      <a:tailEnd type="none" w="med" len="med"/>
+                    </a:lnL>
+                    <a:lnR w="9525" cap="flat" cmpd="sng" algn="ctr">
+                      <a:solidFill>
+                        <a:srgbClr val="E8E8E4"/>
+                      </a:solidFill>
+                      <a:prstDash val="solid"/>
+                      <a:round/>
+                      <a:headEnd type="none" w="med" len="med"/>
+                      <a:tailEnd type="none" w="med" len="med"/>
+                    </a:lnR>
+                    <a:lnT w="9525" cap="flat" cmpd="sng" algn="ctr">
+                      <a:solidFill>
+                        <a:srgbClr val="E8E8E4"/>
+                      </a:solidFill>
+                      <a:prstDash val="solid"/>
+                      <a:round/>
+                      <a:headEnd type="none" w="med" len="med"/>
+                      <a:tailEnd type="none" w="med" len="med"/>
+                    </a:lnT>
+                    <a:lnB w="9525" cap="flat" cmpd="sng" algn="ctr">
+                      <a:solidFill>
+                        <a:srgbClr val="E8E8E4"/>
+                      </a:solidFill>
+                      <a:prstDash val="solid"/>
+                      <a:round/>
+                      <a:headEnd type="none" w="med" len="med"/>
+                      <a:tailEnd type="none" w="med" len="med"/>
+                    </a:lnB>
+                  </a:tcPr>
+                </a:tc>
+              </a:tr>
+              <a:tr h="411480">
+                <a:tc>
+                  <a:txBody>
+                    <a:bodyPr/>
+                    <a:lstStyle/>
+                    <a:p>
+                      <a:pPr indent="0" marL="0">
+                        <a:buNone/>
+                      </a:pPr>
+                      <a:r>
+                        <a:rPr lang="en-US" sz="1200" b="1" dirty="0">
+                          <a:solidFill>
+                            <a:srgbClr val="3A3935"/>
+                          </a:solidFill>
+                          <a:latin typeface="Calibri" pitchFamily="34" charset="0"/>
+                          <a:ea typeface="Calibri" pitchFamily="34" charset="-122"/>
+                          <a:cs typeface="Calibri" pitchFamily="34" charset="-120"/>
+                        </a:rPr>
+                        <a:t>Clean fuel</a:t>
+                      </a:r>
+                      <a:endParaRPr lang="en-US" sz="1200" dirty="0">
+                        <a:latin typeface="Calibri" charset="0"/>
+                        <a:ea typeface="Calibri" charset="0"/>
+                        <a:cs typeface="Calibri" charset="0"/>
+                      </a:endParaRPr>
+                    </a:p>
+                  </a:txBody>
+                  <a:tcPr marL="76200" marR="76200" marT="38100" marB="38100" anchor="ctr">
+                    <a:lnL w="9525" cap="flat" cmpd="sng" algn="ctr">
+                      <a:solidFill>
+                        <a:srgbClr val="E8E8E4"/>
+                      </a:solidFill>
+                      <a:prstDash val="solid"/>
+                      <a:round/>
+                      <a:headEnd type="none" w="med" len="med"/>
+                      <a:tailEnd type="none" w="med" len="med"/>
+                    </a:lnL>
+                    <a:lnR w="9525" cap="flat" cmpd="sng" algn="ctr">
+                      <a:solidFill>
+                        <a:srgbClr val="E8E8E4"/>
+                      </a:solidFill>
+                      <a:prstDash val="solid"/>
+                      <a:round/>
+                      <a:headEnd type="none" w="med" len="med"/>
+                      <a:tailEnd type="none" w="med" len="med"/>
+                    </a:lnR>
+                    <a:lnT w="9525" cap="flat" cmpd="sng" algn="ctr">
+                      <a:solidFill>
+                        <a:srgbClr val="E8E8E4"/>
+                      </a:solidFill>
+                      <a:prstDash val="solid"/>
+                      <a:round/>
+                      <a:headEnd type="none" w="med" len="med"/>
+                      <a:tailEnd type="none" w="med" len="med"/>
+                    </a:lnT>
+                    <a:lnB w="9525" cap="flat" cmpd="sng" algn="ctr">
+                      <a:solidFill>
+                        <a:srgbClr val="E8E8E4"/>
+                      </a:solidFill>
+                      <a:prstDash val="solid"/>
+                      <a:round/>
+                      <a:headEnd type="none" w="med" len="med"/>
+                      <a:tailEnd type="none" w="med" len="med"/>
+                    </a:lnB>
+                  </a:tcPr>
+                </a:tc>
+                <a:tc>
+                  <a:txBody>
+                    <a:bodyPr/>
+                    <a:lstStyle/>
+                    <a:p>
+                      <a:pPr indent="0" marL="0">
+                        <a:buNone/>
+                      </a:pPr>
+                      <a:r>
+                        <a:rPr lang="en-US" sz="1200" dirty="0">
+                          <a:solidFill>
+                            <a:srgbClr val="3A3935"/>
+                          </a:solidFill>
+                          <a:latin typeface="Calibri" pitchFamily="34" charset="0"/>
+                          <a:ea typeface="Calibri" pitchFamily="34" charset="-122"/>
+                          <a:cs typeface="Calibri" pitchFamily="34" charset="-120"/>
+                        </a:rPr>
+                        <a:t>88</a:t>
+                      </a:r>
+                      <a:endParaRPr lang="en-US" sz="1200" dirty="0">
+                        <a:latin typeface="Calibri" charset="0"/>
+                        <a:ea typeface="Calibri" charset="0"/>
+                        <a:cs typeface="Calibri" charset="0"/>
+                      </a:endParaRPr>
+                    </a:p>
+                  </a:txBody>
+                  <a:tcPr marL="76200" marR="76200" marT="38100" marB="38100" anchor="ctr">
+                    <a:lnL w="9525" cap="flat" cmpd="sng" algn="ctr">
+                      <a:solidFill>
+                        <a:srgbClr val="E8E8E4"/>
+                      </a:solidFill>
+                      <a:prstDash val="solid"/>
+                      <a:round/>
+                      <a:headEnd type="none" w="med" len="med"/>
+                      <a:tailEnd type="none" w="med" len="med"/>
+                    </a:lnL>
+                    <a:lnR w="9525" cap="flat" cmpd="sng" algn="ctr">
+                      <a:solidFill>
+                        <a:srgbClr val="E8E8E4"/>
+                      </a:solidFill>
+                      <a:prstDash val="solid"/>
+                      <a:round/>
+                      <a:headEnd type="none" w="med" len="med"/>
+                      <a:tailEnd type="none" w="med" len="med"/>
+                    </a:lnR>
+                    <a:lnT w="9525" cap="flat" cmpd="sng" algn="ctr">
+                      <a:solidFill>
+                        <a:srgbClr val="E8E8E4"/>
+                      </a:solidFill>
+                      <a:prstDash val="solid"/>
+                      <a:round/>
+                      <a:headEnd type="none" w="med" len="med"/>
+                      <a:tailEnd type="none" w="med" len="med"/>
+                    </a:lnT>
+                    <a:lnB w="9525" cap="flat" cmpd="sng" algn="ctr">
+                      <a:solidFill>
+                        <a:srgbClr val="E8E8E4"/>
+                      </a:solidFill>
+                      <a:prstDash val="solid"/>
+                      <a:round/>
+                      <a:headEnd type="none" w="med" len="med"/>
+                      <a:tailEnd type="none" w="med" len="med"/>
+                    </a:lnB>
+                  </a:tcPr>
+                </a:tc>
+                <a:tc>
+                  <a:txBody>
+                    <a:bodyPr/>
+                    <a:lstStyle/>
+                    <a:p>
+                      <a:pPr indent="0" marL="0">
+                        <a:buNone/>
+                      </a:pPr>
+                      <a:r>
+                        <a:rPr lang="en-US" sz="1200" b="1" dirty="0">
+                          <a:solidFill>
+                            <a:srgbClr val="7030A0"/>
+                          </a:solidFill>
+                          <a:latin typeface="Calibri" pitchFamily="34" charset="0"/>
+                          <a:ea typeface="Calibri" pitchFamily="34" charset="-122"/>
+                          <a:cs typeface="Calibri" pitchFamily="34" charset="-120"/>
+                        </a:rPr>
+                        <a:t>113</a:t>
+                      </a:r>
+                      <a:endParaRPr lang="en-US" sz="1200" dirty="0">
+                        <a:latin typeface="Calibri" charset="0"/>
+                        <a:ea typeface="Calibri" charset="0"/>
+                        <a:cs typeface="Calibri" charset="0"/>
+                      </a:endParaRPr>
+                    </a:p>
+                  </a:txBody>
+                  <a:tcPr marL="76200" marR="76200" marT="38100" marB="38100" anchor="ctr">
+                    <a:lnL w="9525" cap="flat" cmpd="sng" algn="ctr">
+                      <a:solidFill>
+                        <a:srgbClr val="E8E8E4"/>
+                      </a:solidFill>
+                      <a:prstDash val="solid"/>
+                      <a:round/>
+                      <a:headEnd type="none" w="med" len="med"/>
+                      <a:tailEnd type="none" w="med" len="med"/>
+                    </a:lnL>
+                    <a:lnR w="9525" cap="flat" cmpd="sng" algn="ctr">
+                      <a:solidFill>
+                        <a:srgbClr val="E8E8E4"/>
+                      </a:solidFill>
+                      <a:prstDash val="solid"/>
+                      <a:round/>
+                      <a:headEnd type="none" w="med" len="med"/>
+                      <a:tailEnd type="none" w="med" len="med"/>
+                    </a:lnR>
+                    <a:lnT w="9525" cap="flat" cmpd="sng" algn="ctr">
+                      <a:solidFill>
+                        <a:srgbClr val="E8E8E4"/>
+                      </a:solidFill>
+                      <a:prstDash val="solid"/>
+                      <a:round/>
+                      <a:headEnd type="none" w="med" len="med"/>
+                      <a:tailEnd type="none" w="med" len="med"/>
+                    </a:lnT>
+                    <a:lnB w="9525" cap="flat" cmpd="sng" algn="ctr">
+                      <a:solidFill>
+                        <a:srgbClr val="E8E8E4"/>
+                      </a:solidFill>
+                      <a:prstDash val="solid"/>
+                      <a:round/>
+                      <a:headEnd type="none" w="med" len="med"/>
+                      <a:tailEnd type="none" w="med" len="med"/>
+                    </a:lnB>
+                  </a:tcPr>
+                </a:tc>
+                <a:tc>
+                  <a:txBody>
+                    <a:bodyPr/>
+                    <a:lstStyle/>
+                    <a:p>
+                      <a:pPr indent="0" marL="0">
+                        <a:buNone/>
+                      </a:pPr>
+                      <a:r>
+                        <a:rPr lang="en-US" sz="1200" b="1" dirty="0">
+                          <a:solidFill>
+                            <a:srgbClr val="7030A0"/>
+                          </a:solidFill>
+                          <a:latin typeface="Calibri" pitchFamily="34" charset="0"/>
+                          <a:ea typeface="Calibri" pitchFamily="34" charset="-122"/>
+                          <a:cs typeface="Calibri" pitchFamily="34" charset="-120"/>
+                        </a:rPr>
+                        <a:t>107</a:t>
+                      </a:r>
+                      <a:endParaRPr lang="en-US" sz="1200" dirty="0">
+                        <a:latin typeface="Calibri" charset="0"/>
+                        <a:ea typeface="Calibri" charset="0"/>
+                        <a:cs typeface="Calibri" charset="0"/>
+                      </a:endParaRPr>
+                    </a:p>
+                  </a:txBody>
+                  <a:tcPr marL="76200" marR="76200" marT="38100" marB="38100" anchor="ctr">
+                    <a:lnL w="9525" cap="flat" cmpd="sng" algn="ctr">
+                      <a:solidFill>
+                        <a:srgbClr val="E8E8E4"/>
+                      </a:solidFill>
+                      <a:prstDash val="solid"/>
+                      <a:round/>
+                      <a:headEnd type="none" w="med" len="med"/>
+                      <a:tailEnd type="none" w="med" len="med"/>
+                    </a:lnL>
+                    <a:lnR w="9525" cap="flat" cmpd="sng" algn="ctr">
+                      <a:solidFill>
+                        <a:srgbClr val="E8E8E4"/>
+                      </a:solidFill>
+                      <a:prstDash val="solid"/>
+                      <a:round/>
+                      <a:headEnd type="none" w="med" len="med"/>
+                      <a:tailEnd type="none" w="med" len="med"/>
+                    </a:lnR>
+                    <a:lnT w="9525" cap="flat" cmpd="sng" algn="ctr">
+                      <a:solidFill>
+                        <a:srgbClr val="E8E8E4"/>
+                      </a:solidFill>
+                      <a:prstDash val="solid"/>
+                      <a:round/>
+                      <a:headEnd type="none" w="med" len="med"/>
+                      <a:tailEnd type="none" w="med" len="med"/>
+                    </a:lnT>
+                    <a:lnB w="9525" cap="flat" cmpd="sng" algn="ctr">
+                      <a:solidFill>
+                        <a:srgbClr val="E8E8E4"/>
+                      </a:solidFill>
+                      <a:prstDash val="solid"/>
+                      <a:round/>
+                      <a:headEnd type="none" w="med" len="med"/>
+                      <a:tailEnd type="none" w="med" len="med"/>
+                    </a:lnB>
+                  </a:tcPr>
+                </a:tc>
+              </a:tr>
+            </a:tbl>
+          </a:graphicData>
+        </a:graphic>
+      </p:graphicFrame>
+      <p:sp>
+        <p:nvSpPr>
+          <p:cNvPr id="8" name="Text 3"/>
           <p:cNvSpPr txBox="1"/>
           <p:nvPr/>
         </p:nvSpPr>
         <p:spPr>
           <a:xfrm>
-            <a:off x="777240" y="2286000"/>
-            <a:ext cx="4997196" cy="2743200"/>
+            <a:off x="8138160" y="3291840"/>
+            <a:ext cx="3502152" cy="777240"/>
           </a:xfrm>
           <a:prstGeom prst="rect">
             <a:avLst/>
@@ -14809,161 +18157,33 @@
         </p:spPr>
         <p:txBody>
           <a:bodyPr wrap="square" lIns="0" tIns="0" rIns="0" bIns="0" rtlCol="0" anchor="t"/>
-          <a:lstStyle/>
-          <a:p>
-            <a:pPr marL="177800" indent="-177800">
-              <a:spcAft>
-                <a:spcPts val="1400"/>
-              </a:spcAft>
-              <a:buSzPct val="100000"/>
-              <a:buChar char="•"/>
-            </a:pPr>
-            <a:r>
-              <a:rPr lang="en-US" sz="1700" dirty="0">
-                <a:solidFill>
-                  <a:schemeClr val="tx1"/>
-                </a:solidFill>
-              </a:rPr>
-              <a:t>Delivers 92.0 % of the hydrogen it starts with, against 86.2 % and 77.8 % for NH₃</a:t>
-            </a:r>
-            <a:endParaRPr lang="en-US" sz="1700" dirty="0"/>
-          </a:p>
-          <a:p>
-            <a:pPr marL="177800" indent="-177800">
-              <a:spcAft>
-                <a:spcPts val="1400"/>
-              </a:spcAft>
-              <a:buSzPct val="100000"/>
-              <a:buChar char="•"/>
-            </a:pPr>
-            <a:r>
-              <a:rPr lang="en-US" sz="1700" dirty="0">
-                <a:solidFill>
-                  <a:schemeClr val="tx1"/>
-                </a:solidFill>
-              </a:rPr>
-              <a:t>The import terminal only vaporises the liquid: 0.05 kWh/kg, no chemical conversion</a:t>
-            </a:r>
-            <a:endParaRPr lang="en-US" sz="1700" dirty="0"/>
-          </a:p>
-          <a:p>
-            <a:pPr marL="177800" indent="-177800">
-              <a:spcAft>
-                <a:spcPts val="1400"/>
-              </a:spcAft>
-              <a:buSzPct val="100000"/>
-              <a:buChar char="•"/>
-            </a:pPr>
-            <a:r>
-              <a:rPr lang="en-US" sz="1700" dirty="0">
-                <a:solidFill>
-                  <a:schemeClr val="tx1"/>
-                </a:solidFill>
-              </a:rPr>
-              <a:t>Uses the least energy once hydrogen production is counted: 78.49 against 81.00 kWh/kg</a:t>
-            </a:r>
-            <a:endParaRPr lang="en-US" sz="1700" dirty="0"/>
-          </a:p>
-        </p:txBody>
-      </p:sp>
-      <p:sp>
-        <p:nvSpPr>
-          <p:cNvPr id="9" name="summary-head-2"/>
-          <p:cNvSpPr/>
-          <p:nvPr/>
-        </p:nvSpPr>
-        <p:spPr>
-          <a:xfrm>
-            <a:off x="6185916" y="1508760"/>
-            <a:ext cx="5454396" cy="548640"/>
-          </a:xfrm>
-          <a:prstGeom prst="rect">
-            <a:avLst/>
-          </a:prstGeom>
-          <a:solidFill>
-            <a:srgbClr val="2977D6"/>
-          </a:solidFill>
-          <a:ln w="12700">
-            <a:solidFill>
-              <a:srgbClr val="2977D6"/>
-            </a:solidFill>
-            <a:prstDash val="solid"/>
-          </a:ln>
-        </p:spPr>
-      </p:sp>
-      <p:sp>
-        <p:nvSpPr>
-          <p:cNvPr id="10" name="Text 7"/>
-          <p:cNvSpPr txBox="1"/>
-          <p:nvPr/>
-        </p:nvSpPr>
-        <p:spPr>
-          <a:xfrm>
-            <a:off x="6368796" y="1508760"/>
-            <a:ext cx="5088636" cy="548640"/>
-          </a:xfrm>
-          <a:prstGeom prst="rect">
-            <a:avLst/>
-          </a:prstGeom>
-          <a:noFill/>
-          <a:ln/>
-        </p:spPr>
-        <p:txBody>
-          <a:bodyPr wrap="square" lIns="0" tIns="0" rIns="0" bIns="0" rtlCol="0" anchor="ctr"/>
           <a:lstStyle/>
           <a:p>
             <a:pPr indent="0" marL="0">
               <a:buNone/>
             </a:pPr>
             <a:r>
-              <a:rPr lang="en-US" sz="1800" b="1" dirty="0">
-                <a:solidFill>
-                  <a:schemeClr val="bg1"/>
-                </a:solidFill>
-              </a:rPr>
-              <a:t>Where NH₃ (gas-fired cracker) is ahead</a:t>
-            </a:r>
-            <a:endParaRPr lang="en-US" sz="1800" dirty="0"/>
-          </a:p>
-        </p:txBody>
-      </p:sp>
-      <p:sp>
-        <p:nvSpPr>
-          <p:cNvPr id="11" name="summary-body-2"/>
-          <p:cNvSpPr/>
-          <p:nvPr/>
-        </p:nvSpPr>
-        <p:spPr>
-          <a:xfrm>
-            <a:off x="6185916" y="2057400"/>
-            <a:ext cx="5454396" cy="3063240"/>
-          </a:xfrm>
-          <a:prstGeom prst="roundRect">
-            <a:avLst>
-              <a:gd name="adj" fmla="val 1791"/>
-            </a:avLst>
-          </a:prstGeom>
-          <a:solidFill>
-            <a:srgbClr val="F1EAF6"/>
-          </a:solidFill>
-          <a:ln w="9525">
-            <a:solidFill>
-              <a:srgbClr val="F1EAF6"/>
-            </a:solidFill>
-            <a:prstDash val="solid"/>
-          </a:ln>
-        </p:spPr>
-      </p:sp>
-      <p:sp>
-        <p:nvSpPr>
-          <p:cNvPr id="12" name="Text 9"/>
+              <a:rPr lang="en-US" sz="1200" dirty="0">
+                <a:solidFill>
+                  <a:schemeClr val="tx1"/>
+                </a:solidFill>
+              </a:rPr>
+              <a:t>Above 100 = NH₃ uses more energy than LH₂ (shown in purple). Without and With electrolysis are the chain on slide 14 and the same chain plus electrolysis.</a:t>
+            </a:r>
+            <a:endParaRPr lang="en-US" sz="1200" dirty="0"/>
+          </a:p>
+        </p:txBody>
+      </p:sp>
+      <p:sp>
+        <p:nvSpPr>
+          <p:cNvPr id="9" name="Text 4"/>
           <p:cNvSpPr txBox="1"/>
           <p:nvPr/>
         </p:nvSpPr>
         <p:spPr>
           <a:xfrm>
-            <a:off x="6414516" y="2286000"/>
-            <a:ext cx="4997196" cy="2743200"/>
+            <a:off x="8138160" y="4114800"/>
+            <a:ext cx="3502152" cy="1508760"/>
           </a:xfrm>
           <a:prstGeom prst="rect">
             <a:avLst/>
@@ -14973,152 +18193,67 @@
         </p:spPr>
         <p:txBody>
           <a:bodyPr wrap="square" lIns="0" tIns="0" rIns="0" bIns="0" rtlCol="0" anchor="t"/>
-          <a:lstStyle/>
-          <a:p>
-            <a:pPr marL="177800" indent="-177800">
-              <a:spcAft>
-                <a:spcPts val="1400"/>
-              </a:spcAft>
-              <a:buSzPct val="100000"/>
-              <a:buChar char="•"/>
-            </a:pPr>
-            <a:r>
-              <a:rPr lang="en-US" sz="1700" dirty="0">
-                <a:solidFill>
-                  <a:schemeClr val="tx1"/>
-                </a:solidFill>
-              </a:rPr>
-              <a:t>Less energy per kg delivered: 11.36 against 13.27 kWh/kg</a:t>
-            </a:r>
-            <a:endParaRPr lang="en-US" sz="1700" dirty="0"/>
-          </a:p>
-          <a:p>
-            <a:pPr marL="177800" indent="-177800">
-              <a:spcAft>
-                <a:spcPts val="1400"/>
-              </a:spcAft>
-              <a:buSzPct val="100000"/>
-              <a:buChar char="•"/>
-            </a:pPr>
-            <a:r>
-              <a:rPr lang="en-US" sz="1700" dirty="0">
-                <a:solidFill>
-                  <a:schemeClr val="tx1"/>
-                </a:solidFill>
-              </a:rPr>
-              <a:t>Lower energy cost: USD 1.208 against 1.754 per kg</a:t>
-            </a:r>
-            <a:endParaRPr lang="en-US" sz="1700" dirty="0"/>
-          </a:p>
-          <a:p>
-            <a:pPr marL="177800" indent="-177800">
-              <a:spcAft>
-                <a:spcPts val="1400"/>
-              </a:spcAft>
-              <a:buSzPct val="100000"/>
-              <a:buChar char="•"/>
-            </a:pPr>
-            <a:r>
-              <a:rPr lang="en-US" sz="1700" dirty="0">
-                <a:solidFill>
-                  <a:schemeClr val="tx1"/>
-                </a:solidFill>
-              </a:rPr>
-              <a:t>Fewer ships for 100,000 t a year: 4 against 5</a:t>
-            </a:r>
-            <a:endParaRPr lang="en-US" sz="1700" dirty="0"/>
-          </a:p>
-          <a:p>
-            <a:pPr marL="177800" indent="-177800">
-              <a:spcAft>
-                <a:spcPts val="1400"/>
-              </a:spcAft>
-              <a:buSzPct val="100000"/>
-              <a:buChar char="•"/>
-            </a:pPr>
-            <a:r>
-              <a:rPr lang="en-US" sz="1700" dirty="0">
-                <a:solidFill>
-                  <a:schemeClr val="tx1"/>
-                </a:solidFill>
-              </a:rPr>
-              <a:t>Upstream, even a perfect liquefier could not match the ammonia plant</a:t>
-            </a:r>
-            <a:endParaRPr lang="en-US" sz="1700" dirty="0"/>
-          </a:p>
-        </p:txBody>
-      </p:sp>
-      <p:sp>
-        <p:nvSpPr>
-          <p:cNvPr id="13" name="summary-caveat"/>
-          <p:cNvSpPr/>
-          <p:nvPr/>
-        </p:nvSpPr>
-        <p:spPr>
-          <a:xfrm>
-            <a:off x="548640" y="5303520"/>
-            <a:ext cx="11091672" cy="594360"/>
-          </a:xfrm>
-          <a:prstGeom prst="roundRect">
-            <a:avLst>
-              <a:gd name="adj" fmla="val 9231"/>
-            </a:avLst>
-          </a:prstGeom>
-          <a:solidFill>
-            <a:srgbClr val="FFFFFF"/>
-          </a:solidFill>
-          <a:ln w="9525">
-            <a:solidFill>
-              <a:srgbClr val="B4AAE6"/>
-            </a:solidFill>
-            <a:prstDash val="solid"/>
-          </a:ln>
-        </p:spPr>
-      </p:sp>
-      <p:sp>
-        <p:nvSpPr>
-          <p:cNvPr id="14" name="Text 11"/>
-          <p:cNvSpPr txBox="1"/>
-          <p:nvPr/>
-        </p:nvSpPr>
-        <p:spPr>
-          <a:xfrm>
-            <a:off x="731520" y="5303520"/>
-            <a:ext cx="10725912" cy="594360"/>
-          </a:xfrm>
-          <a:prstGeom prst="rect">
-            <a:avLst/>
-          </a:prstGeom>
-          <a:noFill/>
-          <a:ln/>
-        </p:spPr>
-        <p:txBody>
-          <a:bodyPr wrap="square" lIns="0" tIns="0" rIns="0" bIns="0" rtlCol="0" anchor="ctr"/>
           <a:lstStyle/>
           <a:p>
             <a:pPr indent="0" marL="0">
               <a:buNone/>
             </a:pPr>
             <a:r>
-              <a:rPr lang="en-US" sz="1500" b="1" dirty="0">
-                <a:solidFill>
-                  <a:schemeClr val="accent4"/>
-                </a:solidFill>
-              </a:rPr>
-              <a:t>Not yet decided:  </a:t>
+              <a:rPr lang="en-US" sz="1200" b="1" dirty="0">
+                <a:solidFill>
+                  <a:schemeClr val="tx1"/>
+                </a:solidFill>
+              </a:rPr>
+              <a:t>*Corrected: </a:t>
             </a:r>
             <a:pPr indent="0" marL="0">
               <a:buNone/>
             </a:pPr>
             <a:r>
-              <a:rPr lang="en-US" sz="1500" dirty="0">
+              <a:rPr lang="en-US" sz="1200" dirty="0">
                 <a:solidFill>
                   <a:schemeClr val="tx1"/>
                 </a:solidFill>
               </a:rPr>
-              <a:t>capital cost, ship cost and shipping economics still need cost data from a full feasibility study.</a:t>
-            </a:r>
-            <a:endParaRPr lang="en-US" sz="1500" dirty="0"/>
+              <a:t>the earlier chain counts hydrogen burned on the ship (2.90 kWh/kg) and ammonia burned in the cracker (4.65 and 8.27) as energy used. With electrolysis they are already paid for, so they are removed. Totals become 75.59, 76.35 and 80.53 kWh/kg.</a:t>
+            </a:r>
+            <a:endParaRPr lang="en-US" sz="1200" dirty="0"/>
+          </a:p>
+        </p:txBody>
+      </p:sp>
+      <p:sp>
+        <p:nvSpPr>
+          <p:cNvPr id="10" name="basis-note"/>
+          <p:cNvSpPr txBox="1"/>
+          <p:nvPr/>
+        </p:nvSpPr>
+        <p:spPr>
+          <a:xfrm>
+            <a:off x="548640" y="5760720"/>
+            <a:ext cx="11091672" cy="594360"/>
+          </a:xfrm>
+          <a:prstGeom prst="rect">
+            <a:avLst/>
+          </a:prstGeom>
+          <a:noFill/>
+          <a:ln/>
+        </p:spPr>
+        <p:txBody>
+          <a:bodyPr wrap="square" lIns="0" tIns="0" rIns="0" bIns="0" rtlCol="0" anchor="t"/>
+          <a:lstStyle/>
+          <a:p>
+            <a:pPr indent="0" marL="0">
+              <a:buNone/>
+            </a:pPr>
+            <a:r>
+              <a:rPr lang="en-US" sz="1100" dirty="0">
+                <a:solidFill>
+                  <a:schemeClr val="tx1"/>
+                </a:solidFill>
+              </a:rPr>
+              <a:t>Electrolysis is 83 % of the LH₂ route's energy and 86–87 % of the NH₃ routes'. The NH₃ routes consume more hydrogen per kg delivered (4,871 t against 2,832 t a cargo; 86.2 % and 77.8 % delivered against 92.0 %). At 100,000 t a year: 7,849, 8,100 and 8,880 GWh, or 896, 925 and 1,014 MW average.</a:t>
+            </a:r>
+            <a:endParaRPr lang="en-US" sz="1100" dirty="0"/>
           </a:p>
         </p:txBody>
       </p:sp>
@@ -15224,7 +18359,7 @@
                   <a:schemeClr val="accent1"/>
                 </a:solidFill>
               </a:rPr>
-              <a:t>Six open items could change the result; closing them needs supplier and vessel data, the internal ammonia dataset and a feasibility study</a:t>
+              <a:t>The tie hinges on the electrolyser: LH₂ leads above ~50 kWh/kg H₂, gas-fired NH₃ below it; the cost gap is only USD 0.21/kg</a:t>
             </a:r>
             <a:endParaRPr lang="en-US" sz="2800" dirty="0"/>
           </a:p>
@@ -15262,15 +18397,2409 @@
                   <a:schemeClr val="tx1"/>
                 </a:solidFill>
               </a:rPr>
-              <a:t>LiqH₂VC Database Rev 0 · Sections 10.2, 11, 12.3 and 13.9 · open items</a:t>
+              <a:t>LiqH₂VC Database Rev 0 · Sections 13.7 and 13.9 · NH₃ minus LH₂, kWh per kg H₂ delivered · cost in USD per kg H₂ delivered, cost year not stated</a:t>
             </a:r>
             <a:endParaRPr lang="en-US" sz="1100" dirty="0"/>
+          </a:p>
+        </p:txBody>
+      </p:sp>
+      <p:sp>
+        <p:nvSpPr>
+          <p:cNvPr id="5" name="Text 2"/>
+          <p:cNvSpPr txBox="1"/>
+          <p:nvPr/>
+        </p:nvSpPr>
+        <p:spPr>
+          <a:xfrm>
+            <a:off x="548640" y="1463040"/>
+            <a:ext cx="7223760" cy="274320"/>
+          </a:xfrm>
+          <a:prstGeom prst="rect">
+            <a:avLst/>
+          </a:prstGeom>
+          <a:noFill/>
+          <a:ln/>
+        </p:spPr>
+        <p:txBody>
+          <a:bodyPr wrap="square" lIns="0" tIns="0" rIns="0" bIns="0" rtlCol="0" anchor="t"/>
+          <a:lstStyle/>
+          <a:p>
+            <a:pPr indent="0" marL="0">
+              <a:buNone/>
+            </a:pPr>
+            <a:r>
+              <a:rPr lang="en-US" sz="1400" b="1" dirty="0">
+                <a:solidFill>
+                  <a:schemeClr val="tx2"/>
+                </a:solidFill>
+              </a:rPr>
+              <a:t>NH₃ minus LH₂, kWh per kg H₂ delivered (above zero = NH₃ uses more)</a:t>
+            </a:r>
+            <a:endParaRPr lang="en-US" sz="1400" dirty="0"/>
           </a:p>
         </p:txBody>
       </p:sp>
       <p:graphicFrame>
         <p:nvGraphicFramePr>
-          <p:cNvPr id="20" name="open-items-table"/>
+          <p:cNvPr id="6" name="electrolyser-sweep-chart" descr=""/>
+          <p:cNvGraphicFramePr/>
+          <p:nvPr/>
+        </p:nvGraphicFramePr>
+        <p:xfrm>
+          <a:off x="457200" y="1783080"/>
+          <a:ext cx="7315200" cy="3840480"/>
+        </p:xfrm>
+        <a:graphic xmlns:a="http://schemas.openxmlformats.org/drawingml/2006/main">
+          <a:graphicData uri="http://schemas.openxmlformats.org/drawingml/2006/chart">
+            <c:chart xmlns:c="http://schemas.openxmlformats.org/drawingml/2006/chart" r:id="rId1"/>
+          </a:graphicData>
+        </a:graphic>
+      </p:graphicFrame>
+      <p:sp>
+        <p:nvSpPr>
+          <p:cNvPr id="7" name="electrolysis-stats"/>
+          <p:cNvSpPr/>
+          <p:nvPr/>
+        </p:nvSpPr>
+        <p:spPr>
+          <a:xfrm>
+            <a:off x="8138160" y="1508760"/>
+            <a:ext cx="3502152" cy="4114800"/>
+          </a:xfrm>
+          <a:prstGeom prst="roundRect">
+            <a:avLst>
+              <a:gd name="adj" fmla="val 1567"/>
+            </a:avLst>
+          </a:prstGeom>
+          <a:solidFill>
+            <a:srgbClr val="F1EAF6"/>
+          </a:solidFill>
+          <a:ln w="9525">
+            <a:solidFill>
+              <a:srgbClr val="F1EAF6"/>
+            </a:solidFill>
+            <a:prstDash val="solid"/>
+          </a:ln>
+        </p:spPr>
+      </p:sp>
+      <p:sp>
+        <p:nvSpPr>
+          <p:cNvPr id="8" name="stat-tie"/>
+          <p:cNvSpPr txBox="1"/>
+          <p:nvPr/>
+        </p:nvSpPr>
+        <p:spPr>
+          <a:xfrm>
+            <a:off x="8366760" y="1645920"/>
+            <a:ext cx="3108960" cy="457200"/>
+          </a:xfrm>
+          <a:prstGeom prst="rect">
+            <a:avLst/>
+          </a:prstGeom>
+          <a:noFill/>
+          <a:ln/>
+        </p:spPr>
+        <p:txBody>
+          <a:bodyPr wrap="square" lIns="0" tIns="0" rIns="0" bIns="0" rtlCol="0" anchor="b"/>
+          <a:lstStyle/>
+          <a:p>
+            <a:pPr indent="0" marL="0">
+              <a:buNone/>
+            </a:pPr>
+            <a:r>
+              <a:rPr lang="en-US" sz="2600" b="1" dirty="0">
+                <a:solidFill>
+                  <a:schemeClr val="accent4"/>
+                </a:solidFill>
+              </a:rPr>
+              <a:t>~50 kWh/kg</a:t>
+            </a:r>
+            <a:endParaRPr lang="en-US" sz="2600" dirty="0"/>
+          </a:p>
+        </p:txBody>
+      </p:sp>
+      <p:sp>
+        <p:nvSpPr>
+          <p:cNvPr id="9" name="stat-label-tie"/>
+          <p:cNvSpPr txBox="1"/>
+          <p:nvPr/>
+        </p:nvSpPr>
+        <p:spPr>
+          <a:xfrm>
+            <a:off x="8366760" y="2176272"/>
+            <a:ext cx="3108960" cy="822960"/>
+          </a:xfrm>
+          <a:prstGeom prst="rect">
+            <a:avLst/>
+          </a:prstGeom>
+          <a:noFill/>
+          <a:ln/>
+        </p:spPr>
+        <p:txBody>
+          <a:bodyPr wrap="square" lIns="0" tIns="0" rIns="0" bIns="0" rtlCol="0" anchor="t"/>
+          <a:lstStyle/>
+          <a:p>
+            <a:pPr indent="0" marL="0">
+              <a:buNone/>
+            </a:pPr>
+            <a:r>
+              <a:rPr lang="en-US" sz="1400" dirty="0">
+                <a:solidFill>
+                  <a:schemeClr val="tx1"/>
+                </a:solidFill>
+              </a:rPr>
+              <a:t>Electrolyser energy at which gas-fired NH₃ and LH₂ tie, overlap removed (about 35 for clean fuel; 26 as computed)</a:t>
+            </a:r>
+            <a:endParaRPr lang="en-US" sz="1400" dirty="0"/>
+          </a:p>
+        </p:txBody>
+      </p:sp>
+      <p:sp>
+        <p:nvSpPr>
+          <p:cNvPr id="10" name="stat-cost-feed"/>
+          <p:cNvSpPr txBox="1"/>
+          <p:nvPr/>
+        </p:nvSpPr>
+        <p:spPr>
+          <a:xfrm>
+            <a:off x="8366760" y="2926080"/>
+            <a:ext cx="3108960" cy="457200"/>
+          </a:xfrm>
+          <a:prstGeom prst="rect">
+            <a:avLst/>
+          </a:prstGeom>
+          <a:noFill/>
+          <a:ln/>
+        </p:spPr>
+        <p:txBody>
+          <a:bodyPr wrap="square" lIns="0" tIns="0" rIns="0" bIns="0" rtlCol="0" anchor="b"/>
+          <a:lstStyle/>
+          <a:p>
+            <a:pPr indent="0" marL="0">
+              <a:buNone/>
+            </a:pPr>
+            <a:r>
+              <a:rPr lang="en-US" sz="2400" b="1" dirty="0">
+                <a:solidFill>
+                  <a:schemeClr val="accent4"/>
+                </a:solidFill>
+              </a:rPr>
+              <a:t>USD 10.33 vs 10.54</a:t>
+            </a:r>
+            <a:endParaRPr lang="en-US" sz="2400" dirty="0"/>
+          </a:p>
+        </p:txBody>
+      </p:sp>
+      <p:sp>
+        <p:nvSpPr>
+          <p:cNvPr id="11" name="stat-label-cost-feed"/>
+          <p:cNvSpPr txBox="1"/>
+          <p:nvPr/>
+        </p:nvSpPr>
+        <p:spPr>
+          <a:xfrm>
+            <a:off x="8366760" y="3456432"/>
+            <a:ext cx="3108960" cy="822960"/>
+          </a:xfrm>
+          <a:prstGeom prst="rect">
+            <a:avLst/>
+          </a:prstGeom>
+          <a:noFill/>
+          <a:ln/>
+        </p:spPr>
+        <p:txBody>
+          <a:bodyPr wrap="square" lIns="0" tIns="0" rIns="0" bIns="0" rtlCol="0" anchor="t"/>
+          <a:lstStyle/>
+          <a:p>
+            <a:pPr indent="0" marL="0">
+              <a:buNone/>
+            </a:pPr>
+            <a:r>
+              <a:rPr lang="en-US" sz="1400" dirty="0">
+                <a:solidFill>
+                  <a:schemeClr val="tx1"/>
+                </a:solidFill>
+              </a:rPr>
+              <a:t>per kg with the hydrogen feed charged, gas-fired NH₃ against LH₂; the gap falls from USD 0.545 to 0.21</a:t>
+            </a:r>
+            <a:endParaRPr lang="en-US" sz="1400" dirty="0"/>
+          </a:p>
+        </p:txBody>
+      </p:sp>
+      <p:sp>
+        <p:nvSpPr>
+          <p:cNvPr id="12" name="stat-electrolyser-size"/>
+          <p:cNvSpPr txBox="1"/>
+          <p:nvPr/>
+        </p:nvSpPr>
+        <p:spPr>
+          <a:xfrm>
+            <a:off x="8366760" y="4251960"/>
+            <a:ext cx="3108960" cy="457200"/>
+          </a:xfrm>
+          <a:prstGeom prst="rect">
+            <a:avLst/>
+          </a:prstGeom>
+          <a:noFill/>
+          <a:ln/>
+        </p:spPr>
+        <p:txBody>
+          <a:bodyPr wrap="square" lIns="0" tIns="0" rIns="0" bIns="0" rtlCol="0" anchor="b"/>
+          <a:lstStyle/>
+          <a:p>
+            <a:pPr indent="0" marL="0">
+              <a:buNone/>
+            </a:pPr>
+            <a:r>
+              <a:rPr lang="en-US" sz="2200" b="1" dirty="0">
+                <a:solidFill>
+                  <a:schemeClr val="accent4"/>
+                </a:solidFill>
+              </a:rPr>
+              <a:t>795 / 881 vs 744 MW</a:t>
+            </a:r>
+            <a:endParaRPr lang="en-US" sz="2200" dirty="0"/>
+          </a:p>
+        </p:txBody>
+      </p:sp>
+      <p:sp>
+        <p:nvSpPr>
+          <p:cNvPr id="13" name="stat-label-electrolyser-size"/>
+          <p:cNvSpPr txBox="1"/>
+          <p:nvPr/>
+        </p:nvSpPr>
+        <p:spPr>
+          <a:xfrm>
+            <a:off x="8366760" y="4782312"/>
+            <a:ext cx="3108960" cy="731520"/>
+          </a:xfrm>
+          <a:prstGeom prst="rect">
+            <a:avLst/>
+          </a:prstGeom>
+          <a:noFill/>
+          <a:ln/>
+        </p:spPr>
+        <p:txBody>
+          <a:bodyPr wrap="square" lIns="0" tIns="0" rIns="0" bIns="0" rtlCol="0" anchor="t"/>
+          <a:lstStyle/>
+          <a:p>
+            <a:pPr indent="0" marL="0">
+              <a:buNone/>
+            </a:pPr>
+            <a:r>
+              <a:rPr lang="en-US" sz="1400" dirty="0">
+                <a:solidFill>
+                  <a:schemeClr val="tx1"/>
+                </a:solidFill>
+              </a:rPr>
+              <a:t>Average electrolyser power, gas-fired / clean-fuel NH₃ against LH₂: 7 % and 18 % more</a:t>
+            </a:r>
+            <a:endParaRPr lang="en-US" sz="1400" dirty="0"/>
+          </a:p>
+        </p:txBody>
+      </p:sp>
+      <p:sp>
+        <p:nvSpPr>
+          <p:cNvPr id="14" name="basis-note"/>
+          <p:cNvSpPr txBox="1"/>
+          <p:nvPr/>
+        </p:nvSpPr>
+        <p:spPr>
+          <a:xfrm>
+            <a:off x="548640" y="5806440"/>
+            <a:ext cx="11091672" cy="548640"/>
+          </a:xfrm>
+          <a:prstGeom prst="rect">
+            <a:avLst/>
+          </a:prstGeom>
+          <a:noFill/>
+          <a:ln/>
+        </p:spPr>
+        <p:txBody>
+          <a:bodyPr wrap="square" lIns="0" tIns="0" rIns="0" bIns="0" rtlCol="0" anchor="t"/>
+          <a:lstStyle/>
+          <a:p>
+            <a:pPr indent="0" marL="0">
+              <a:buNone/>
+            </a:pPr>
+            <a:r>
+              <a:rPr lang="en-US" sz="1100" dirty="0">
+                <a:solidFill>
+                  <a:schemeClr val="tx1"/>
+                </a:solidFill>
+              </a:rPr>
+              <a:t>Electrolyser 60 kWh/kg H₂ is an assumption and needs a sourced value. Cost charges the electrolysis electricity at USD 140/MWh (team input) and removes burned hydrogen and ammonia already paid for; the assessment's own cost sheet does not remove them and shows USD 10.88, 10.96 and 12.38 per kg.</a:t>
+            </a:r>
+            <a:endParaRPr lang="en-US" sz="1100" dirty="0"/>
+          </a:p>
+        </p:txBody>
+      </p:sp>
+      <p:sp>
+        <p:nvSpPr>
+          <p:cNvPr id="25" name="Slide Number Placeholder 0"/>
+          <p:cNvSpPr>
+            <a:spLocks noGrp="1"/>
+          </p:cNvSpPr>
+          <p:nvPr>
+            <p:ph type="sldNum" sz="quarter" idx="4294967295"/>
+          </p:nvPr>
+        </p:nvSpPr>
+        <p:spPr>
+          <a:xfrm>
+            <a:off x="11228832" y="6446520"/>
+            <a:ext cx="411480" cy="274320"/>
+          </a:xfrm>
+          <a:prstGeom prst="rect">
+            <a:avLst/>
+          </a:prstGeom>
+          <a:extLst>
+            <a:ext uri="{C572A759-6A51-4108-AA02-DFA0A04FC94B}">
+              <ma14:wrappingTextBoxFlag xmlns:ma14="http://schemas.microsoft.com/office/mac/drawingml/2011/main" val="0"/>
+            </a:ext>
+          </a:extLst>
+        </p:spPr>
+        <p:txBody>
+          <a:bodyPr/>
+          <a:lstStyle>
+            <a:lvl1pPr>
+              <a:defRPr sz="1100">
+                <a:solidFill>
+                  <a:schemeClr val="tx1"/>
+                </a:solidFill>
+              </a:defRPr>
+            </a:lvl1pPr>
+          </a:lstStyle>
+          <a:p>
+            <a:pPr algn="r"/>
+            <a:fld id="{F7021451-1387-4CA6-816F-3879F97B5CBC}" type="slidenum">
+              <a:rPr b="0" lang="en-US"/>
+              <a:t>19</a:t>
+            </a:fld>
+            <a:endParaRPr lang="en-US"/>
+          </a:p>
+        </p:txBody>
+      </p:sp>
+    </p:spTree>
+  </p:cSld>
+  <p:clrMapOvr>
+    <a:masterClrMapping/>
+  </p:clrMapOvr>
+</p:sld>
+</file>
+
+<file path=ppt/slides/slide2.xml><?xml version="1.0" encoding="utf-8"?>
+<p:sld xmlns:a="http://schemas.openxmlformats.org/drawingml/2006/main" xmlns:r="http://schemas.openxmlformats.org/officeDocument/2006/relationships" xmlns:p="http://schemas.openxmlformats.org/presentationml/2006/main">
+  <p:cSld name="Slide 2">
+    <p:spTree>
+      <p:nvGrpSpPr>
+        <p:cNvPr id="1" name=""/>
+        <p:cNvGrpSpPr/>
+        <p:nvPr/>
+      </p:nvGrpSpPr>
+      <p:grpSpPr>
+        <a:xfrm>
+          <a:off x="0" y="0"/>
+          <a:ext cx="0" cy="0"/>
+          <a:chOff x="0" y="0"/>
+          <a:chExt cx="0" cy="0"/>
+        </a:xfrm>
+      </p:grpSpPr>
+      <p:sp>
+        <p:nvSpPr>
+          <p:cNvPr id="2" name="Text 1"/>
+          <p:cNvSpPr/>
+          <p:nvPr>
+            <p:ph idx="101" type="title" hasCustomPrompt="1"/>
+          </p:nvPr>
+        </p:nvSpPr>
+        <p:spPr>
+          <a:xfrm>
+            <a:off x="548640" y="347472"/>
+            <a:ext cx="11091672" cy="868680"/>
+          </a:xfrm>
+          <a:prstGeom prst="rect">
+            <a:avLst/>
+          </a:prstGeom>
+          <a:noFill/>
+          <a:ln/>
+        </p:spPr>
+        <p:txBody>
+          <a:bodyPr wrap="square" lIns="0" tIns="0" rIns="0" bIns="0" rtlCol="0" anchor="t"/>
+          <a:lstStyle/>
+          <a:p>
+            <a:pPr algn="l" indent="0" marL="0">
+              <a:buNone/>
+            </a:pPr>
+            <a:r>
+              <a:rPr lang="en-US" sz="2800" b="1" dirty="0">
+                <a:solidFill>
+                  <a:schemeClr val="accent1"/>
+                </a:solidFill>
+              </a:rPr>
+              <a:t>The database is a single reference for the LH₂ chain, from the liquefier to hydrogen gas at the import terminal, in 13 sections</a:t>
+            </a:r>
+            <a:endParaRPr lang="en-US" sz="2800" dirty="0"/>
+          </a:p>
+        </p:txBody>
+      </p:sp>
+      <p:sp>
+        <p:nvSpPr>
+          <p:cNvPr id="3" name="Text 1"/>
+          <p:cNvSpPr/>
+          <p:nvPr>
+            <p:ph idx="102" type="body" hasCustomPrompt="1"/>
+          </p:nvPr>
+        </p:nvSpPr>
+        <p:spPr>
+          <a:xfrm>
+            <a:off x="548640" y="6446520"/>
+            <a:ext cx="9875520" cy="274320"/>
+          </a:xfrm>
+          <a:prstGeom prst="rect">
+            <a:avLst/>
+          </a:prstGeom>
+          <a:noFill/>
+          <a:ln/>
+        </p:spPr>
+        <p:txBody>
+          <a:bodyPr wrap="square" lIns="0" tIns="0" rIns="0" bIns="0" rtlCol="0" anchor="ctr"/>
+          <a:lstStyle/>
+          <a:p>
+            <a:pPr indent="0" marL="0">
+              <a:buNone/>
+            </a:pPr>
+            <a:r>
+              <a:rPr lang="en-US" sz="1100" dirty="0">
+                <a:solidFill>
+                  <a:schemeClr val="tx1"/>
+                </a:solidFill>
+              </a:rPr>
+              <a:t>LiqH₂VC Database Rev 0 · scope and structure</a:t>
+            </a:r>
+            <a:endParaRPr lang="en-US" sz="1100" dirty="0"/>
+          </a:p>
+        </p:txBody>
+      </p:sp>
+      <p:sp>
+        <p:nvSpPr>
+          <p:cNvPr id="5" name="chain-step-1"/>
+          <p:cNvSpPr/>
+          <p:nvPr/>
+        </p:nvSpPr>
+        <p:spPr>
+          <a:xfrm>
+            <a:off x="548640" y="1508760"/>
+            <a:ext cx="2635758" cy="777240"/>
+          </a:xfrm>
+          <a:prstGeom prst="homePlate">
+            <a:avLst/>
+          </a:prstGeom>
+          <a:solidFill>
+            <a:srgbClr val="60269E"/>
+          </a:solidFill>
+          <a:ln w="12700">
+            <a:solidFill>
+              <a:srgbClr val="60269E"/>
+            </a:solidFill>
+            <a:prstDash val="solid"/>
+          </a:ln>
+        </p:spPr>
+      </p:sp>
+      <p:sp>
+        <p:nvSpPr>
+          <p:cNvPr id="6" name="Text 3"/>
+          <p:cNvSpPr txBox="1"/>
+          <p:nvPr/>
+        </p:nvSpPr>
+        <p:spPr>
+          <a:xfrm>
+            <a:off x="731520" y="1508760"/>
+            <a:ext cx="1949958" cy="777240"/>
+          </a:xfrm>
+          <a:prstGeom prst="rect">
+            <a:avLst/>
+          </a:prstGeom>
+          <a:noFill/>
+          <a:ln/>
+        </p:spPr>
+        <p:txBody>
+          <a:bodyPr wrap="square" lIns="0" tIns="0" rIns="0" bIns="0" rtlCol="0" anchor="ctr"/>
+          <a:lstStyle/>
+          <a:p>
+            <a:pPr indent="0" marL="0">
+              <a:buNone/>
+            </a:pPr>
+            <a:r>
+              <a:rPr lang="en-US" sz="1500" b="1" dirty="0">
+                <a:solidFill>
+                  <a:schemeClr val="bg1"/>
+                </a:solidFill>
+              </a:rPr>
+              <a:t>Liquefaction</a:t>
+            </a:r>
+            <a:endParaRPr lang="en-US" sz="1500" dirty="0"/>
+          </a:p>
+        </p:txBody>
+      </p:sp>
+      <p:sp>
+        <p:nvSpPr>
+          <p:cNvPr id="7" name="chain-step-2"/>
+          <p:cNvSpPr/>
+          <p:nvPr/>
+        </p:nvSpPr>
+        <p:spPr>
+          <a:xfrm>
+            <a:off x="3367278" y="1508760"/>
+            <a:ext cx="2635758" cy="777240"/>
+          </a:xfrm>
+          <a:prstGeom prst="chevron">
+            <a:avLst/>
+          </a:prstGeom>
+          <a:solidFill>
+            <a:srgbClr val="60269E"/>
+          </a:solidFill>
+          <a:ln w="12700">
+            <a:solidFill>
+              <a:srgbClr val="60269E"/>
+            </a:solidFill>
+            <a:prstDash val="solid"/>
+          </a:ln>
+        </p:spPr>
+      </p:sp>
+      <p:sp>
+        <p:nvSpPr>
+          <p:cNvPr id="8" name="Text 5"/>
+          <p:cNvSpPr txBox="1"/>
+          <p:nvPr/>
+        </p:nvSpPr>
+        <p:spPr>
+          <a:xfrm>
+            <a:off x="3778758" y="1508760"/>
+            <a:ext cx="1949958" cy="777240"/>
+          </a:xfrm>
+          <a:prstGeom prst="rect">
+            <a:avLst/>
+          </a:prstGeom>
+          <a:noFill/>
+          <a:ln/>
+        </p:spPr>
+        <p:txBody>
+          <a:bodyPr wrap="square" lIns="0" tIns="0" rIns="0" bIns="0" rtlCol="0" anchor="ctr"/>
+          <a:lstStyle/>
+          <a:p>
+            <a:pPr indent="0" marL="0">
+              <a:buNone/>
+            </a:pPr>
+            <a:r>
+              <a:rPr lang="en-US" sz="1500" b="1" dirty="0">
+                <a:solidFill>
+                  <a:schemeClr val="bg1"/>
+                </a:solidFill>
+              </a:rPr>
+              <a:t>Export storage &amp; loading</a:t>
+            </a:r>
+            <a:endParaRPr lang="en-US" sz="1500" dirty="0"/>
+          </a:p>
+        </p:txBody>
+      </p:sp>
+      <p:sp>
+        <p:nvSpPr>
+          <p:cNvPr id="9" name="chain-step-3"/>
+          <p:cNvSpPr/>
+          <p:nvPr/>
+        </p:nvSpPr>
+        <p:spPr>
+          <a:xfrm>
+            <a:off x="6185916" y="1508760"/>
+            <a:ext cx="2635758" cy="777240"/>
+          </a:xfrm>
+          <a:prstGeom prst="chevron">
+            <a:avLst/>
+          </a:prstGeom>
+          <a:solidFill>
+            <a:srgbClr val="60269E"/>
+          </a:solidFill>
+          <a:ln w="12700">
+            <a:solidFill>
+              <a:srgbClr val="60269E"/>
+            </a:solidFill>
+            <a:prstDash val="solid"/>
+          </a:ln>
+        </p:spPr>
+      </p:sp>
+      <p:sp>
+        <p:nvSpPr>
+          <p:cNvPr id="10" name="Text 7"/>
+          <p:cNvSpPr txBox="1"/>
+          <p:nvPr/>
+        </p:nvSpPr>
+        <p:spPr>
+          <a:xfrm>
+            <a:off x="6597396" y="1508760"/>
+            <a:ext cx="1949958" cy="777240"/>
+          </a:xfrm>
+          <a:prstGeom prst="rect">
+            <a:avLst/>
+          </a:prstGeom>
+          <a:noFill/>
+          <a:ln/>
+        </p:spPr>
+        <p:txBody>
+          <a:bodyPr wrap="square" lIns="0" tIns="0" rIns="0" bIns="0" rtlCol="0" anchor="ctr"/>
+          <a:lstStyle/>
+          <a:p>
+            <a:pPr indent="0" marL="0">
+              <a:buNone/>
+            </a:pPr>
+            <a:r>
+              <a:rPr lang="en-US" sz="1500" b="1" dirty="0">
+                <a:solidFill>
+                  <a:schemeClr val="bg1"/>
+                </a:solidFill>
+              </a:rPr>
+              <a:t>Shipping</a:t>
+            </a:r>
+            <a:endParaRPr lang="en-US" sz="1500" dirty="0"/>
+          </a:p>
+        </p:txBody>
+      </p:sp>
+      <p:sp>
+        <p:nvSpPr>
+          <p:cNvPr id="11" name="chain-step-4"/>
+          <p:cNvSpPr/>
+          <p:nvPr/>
+        </p:nvSpPr>
+        <p:spPr>
+          <a:xfrm>
+            <a:off x="9004554" y="1508760"/>
+            <a:ext cx="2635758" cy="777240"/>
+          </a:xfrm>
+          <a:prstGeom prst="chevron">
+            <a:avLst/>
+          </a:prstGeom>
+          <a:solidFill>
+            <a:srgbClr val="60269E"/>
+          </a:solidFill>
+          <a:ln w="12700">
+            <a:solidFill>
+              <a:srgbClr val="60269E"/>
+            </a:solidFill>
+            <a:prstDash val="solid"/>
+          </a:ln>
+        </p:spPr>
+      </p:sp>
+      <p:sp>
+        <p:nvSpPr>
+          <p:cNvPr id="12" name="Text 9"/>
+          <p:cNvSpPr txBox="1"/>
+          <p:nvPr/>
+        </p:nvSpPr>
+        <p:spPr>
+          <a:xfrm>
+            <a:off x="9416034" y="1508760"/>
+            <a:ext cx="1949958" cy="777240"/>
+          </a:xfrm>
+          <a:prstGeom prst="rect">
+            <a:avLst/>
+          </a:prstGeom>
+          <a:noFill/>
+          <a:ln/>
+        </p:spPr>
+        <p:txBody>
+          <a:bodyPr wrap="square" lIns="0" tIns="0" rIns="0" bIns="0" rtlCol="0" anchor="ctr"/>
+          <a:lstStyle/>
+          <a:p>
+            <a:pPr indent="0" marL="0">
+              <a:buNone/>
+            </a:pPr>
+            <a:r>
+              <a:rPr lang="en-US" sz="1500" b="1" dirty="0">
+                <a:solidFill>
+                  <a:schemeClr val="bg1"/>
+                </a:solidFill>
+              </a:rPr>
+              <a:t>Import &amp; regasification</a:t>
+            </a:r>
+            <a:endParaRPr lang="en-US" sz="1500" dirty="0"/>
+          </a:p>
+        </p:txBody>
+      </p:sp>
+      <p:sp>
+        <p:nvSpPr>
+          <p:cNvPr id="13" name="covers-1"/>
+          <p:cNvSpPr/>
+          <p:nvPr/>
+        </p:nvSpPr>
+        <p:spPr>
+          <a:xfrm>
+            <a:off x="548640" y="2468880"/>
+            <a:ext cx="2635758" cy="1600200"/>
+          </a:xfrm>
+          <a:prstGeom prst="roundRect">
+            <a:avLst>
+              <a:gd name="adj" fmla="val 3429"/>
+            </a:avLst>
+          </a:prstGeom>
+          <a:solidFill>
+            <a:srgbClr val="F1EAF6"/>
+          </a:solidFill>
+          <a:ln w="9525">
+            <a:solidFill>
+              <a:srgbClr val="F1EAF6"/>
+            </a:solidFill>
+            <a:prstDash val="solid"/>
+          </a:ln>
+        </p:spPr>
+      </p:sp>
+      <p:sp>
+        <p:nvSpPr>
+          <p:cNvPr id="14" name="Text 11"/>
+          <p:cNvSpPr txBox="1"/>
+          <p:nvPr/>
+        </p:nvSpPr>
+        <p:spPr>
+          <a:xfrm>
+            <a:off x="713232" y="2606040"/>
+            <a:ext cx="2306574" cy="868680"/>
+          </a:xfrm>
+          <a:prstGeom prst="rect">
+            <a:avLst/>
+          </a:prstGeom>
+          <a:noFill/>
+          <a:ln/>
+        </p:spPr>
+        <p:txBody>
+          <a:bodyPr wrap="square" lIns="0" tIns="0" rIns="0" bIns="0" rtlCol="0" anchor="t"/>
+          <a:lstStyle/>
+          <a:p>
+            <a:pPr indent="0" marL="0">
+              <a:buNone/>
+            </a:pPr>
+            <a:r>
+              <a:rPr lang="en-US" sz="1500" dirty="0">
+                <a:solidFill>
+                  <a:schemeClr val="tx1"/>
+                </a:solidFill>
+              </a:rPr>
+              <a:t>Properties, liquefaction cycles, technology players, plants built</a:t>
+            </a:r>
+            <a:endParaRPr lang="en-US" sz="1500" dirty="0"/>
+          </a:p>
+        </p:txBody>
+      </p:sp>
+      <p:sp>
+        <p:nvSpPr>
+          <p:cNvPr id="15" name="Text 12"/>
+          <p:cNvSpPr txBox="1"/>
+          <p:nvPr/>
+        </p:nvSpPr>
+        <p:spPr>
+          <a:xfrm>
+            <a:off x="713232" y="3520440"/>
+            <a:ext cx="2306574" cy="411480"/>
+          </a:xfrm>
+          <a:prstGeom prst="rect">
+            <a:avLst/>
+          </a:prstGeom>
+          <a:noFill/>
+          <a:ln/>
+        </p:spPr>
+        <p:txBody>
+          <a:bodyPr wrap="square" lIns="0" tIns="0" rIns="0" bIns="0" rtlCol="0" anchor="t"/>
+          <a:lstStyle/>
+          <a:p>
+            <a:pPr indent="0" marL="0">
+              <a:buNone/>
+            </a:pPr>
+            <a:r>
+              <a:rPr lang="en-US" sz="1300" b="1" dirty="0">
+                <a:solidFill>
+                  <a:schemeClr val="accent4"/>
+                </a:solidFill>
+              </a:rPr>
+              <a:t>Sections 1–5, 8.1, 10.1</a:t>
+            </a:r>
+            <a:endParaRPr lang="en-US" sz="1300" dirty="0"/>
+          </a:p>
+        </p:txBody>
+      </p:sp>
+      <p:sp>
+        <p:nvSpPr>
+          <p:cNvPr id="16" name="covers-2"/>
+          <p:cNvSpPr/>
+          <p:nvPr/>
+        </p:nvSpPr>
+        <p:spPr>
+          <a:xfrm>
+            <a:off x="3367278" y="2468880"/>
+            <a:ext cx="2635758" cy="1600200"/>
+          </a:xfrm>
+          <a:prstGeom prst="roundRect">
+            <a:avLst>
+              <a:gd name="adj" fmla="val 3429"/>
+            </a:avLst>
+          </a:prstGeom>
+          <a:solidFill>
+            <a:srgbClr val="F1EAF6"/>
+          </a:solidFill>
+          <a:ln w="9525">
+            <a:solidFill>
+              <a:srgbClr val="F1EAF6"/>
+            </a:solidFill>
+            <a:prstDash val="solid"/>
+          </a:ln>
+        </p:spPr>
+      </p:sp>
+      <p:sp>
+        <p:nvSpPr>
+          <p:cNvPr id="17" name="Text 14"/>
+          <p:cNvSpPr txBox="1"/>
+          <p:nvPr/>
+        </p:nvSpPr>
+        <p:spPr>
+          <a:xfrm>
+            <a:off x="3531870" y="2606040"/>
+            <a:ext cx="2306574" cy="868680"/>
+          </a:xfrm>
+          <a:prstGeom prst="rect">
+            <a:avLst/>
+          </a:prstGeom>
+          <a:noFill/>
+          <a:ln/>
+        </p:spPr>
+        <p:txBody>
+          <a:bodyPr wrap="square" lIns="0" tIns="0" rIns="0" bIns="0" rtlCol="0" anchor="t"/>
+          <a:lstStyle/>
+          <a:p>
+            <a:pPr indent="0" marL="0">
+              <a:buNone/>
+            </a:pPr>
+            <a:r>
+              <a:rPr lang="en-US" sz="1500" dirty="0">
+                <a:solidFill>
+                  <a:schemeClr val="tx1"/>
+                </a:solidFill>
+              </a:rPr>
+              <a:t>Tank types, boil-off, export-terminal cost</a:t>
+            </a:r>
+            <a:endParaRPr lang="en-US" sz="1500" dirty="0"/>
+          </a:p>
+        </p:txBody>
+      </p:sp>
+      <p:sp>
+        <p:nvSpPr>
+          <p:cNvPr id="18" name="Text 15"/>
+          <p:cNvSpPr txBox="1"/>
+          <p:nvPr/>
+        </p:nvSpPr>
+        <p:spPr>
+          <a:xfrm>
+            <a:off x="3531870" y="3520440"/>
+            <a:ext cx="2306574" cy="411480"/>
+          </a:xfrm>
+          <a:prstGeom prst="rect">
+            <a:avLst/>
+          </a:prstGeom>
+          <a:noFill/>
+          <a:ln/>
+        </p:spPr>
+        <p:txBody>
+          <a:bodyPr wrap="square" lIns="0" tIns="0" rIns="0" bIns="0" rtlCol="0" anchor="t"/>
+          <a:lstStyle/>
+          <a:p>
+            <a:pPr indent="0" marL="0">
+              <a:buNone/>
+            </a:pPr>
+            <a:r>
+              <a:rPr lang="en-US" sz="1300" b="1" dirty="0">
+                <a:solidFill>
+                  <a:schemeClr val="accent4"/>
+                </a:solidFill>
+              </a:rPr>
+              <a:t>Sections 6, 8.2, 10.2</a:t>
+            </a:r>
+            <a:endParaRPr lang="en-US" sz="1300" dirty="0"/>
+          </a:p>
+        </p:txBody>
+      </p:sp>
+      <p:sp>
+        <p:nvSpPr>
+          <p:cNvPr id="19" name="covers-3"/>
+          <p:cNvSpPr/>
+          <p:nvPr/>
+        </p:nvSpPr>
+        <p:spPr>
+          <a:xfrm>
+            <a:off x="6185916" y="2468880"/>
+            <a:ext cx="2635758" cy="1600200"/>
+          </a:xfrm>
+          <a:prstGeom prst="roundRect">
+            <a:avLst>
+              <a:gd name="adj" fmla="val 3429"/>
+            </a:avLst>
+          </a:prstGeom>
+          <a:solidFill>
+            <a:srgbClr val="F1EAF6"/>
+          </a:solidFill>
+          <a:ln w="9525">
+            <a:solidFill>
+              <a:srgbClr val="F1EAF6"/>
+            </a:solidFill>
+            <a:prstDash val="solid"/>
+          </a:ln>
+        </p:spPr>
+      </p:sp>
+      <p:sp>
+        <p:nvSpPr>
+          <p:cNvPr id="20" name="Text 17"/>
+          <p:cNvSpPr txBox="1"/>
+          <p:nvPr/>
+        </p:nvSpPr>
+        <p:spPr>
+          <a:xfrm>
+            <a:off x="6350508" y="2606040"/>
+            <a:ext cx="2306574" cy="868680"/>
+          </a:xfrm>
+          <a:prstGeom prst="rect">
+            <a:avLst/>
+          </a:prstGeom>
+          <a:noFill/>
+          <a:ln/>
+        </p:spPr>
+        <p:txBody>
+          <a:bodyPr wrap="square" lIns="0" tIns="0" rIns="0" bIns="0" rtlCol="0" anchor="t"/>
+          <a:lstStyle/>
+          <a:p>
+            <a:pPr indent="0" marL="0">
+              <a:buNone/>
+            </a:pPr>
+            <a:r>
+              <a:rPr lang="en-US" sz="1500" dirty="0">
+                <a:solidFill>
+                  <a:schemeClr val="tx1"/>
+                </a:solidFill>
+              </a:rPr>
+              <a:t>LH₂ carriers, marine projects, road and rail, ship boil-off</a:t>
+            </a:r>
+            <a:endParaRPr lang="en-US" sz="1500" dirty="0"/>
+          </a:p>
+        </p:txBody>
+      </p:sp>
+      <p:sp>
+        <p:nvSpPr>
+          <p:cNvPr id="21" name="Text 18"/>
+          <p:cNvSpPr txBox="1"/>
+          <p:nvPr/>
+        </p:nvSpPr>
+        <p:spPr>
+          <a:xfrm>
+            <a:off x="6350508" y="3520440"/>
+            <a:ext cx="2306574" cy="411480"/>
+          </a:xfrm>
+          <a:prstGeom prst="rect">
+            <a:avLst/>
+          </a:prstGeom>
+          <a:noFill/>
+          <a:ln/>
+        </p:spPr>
+        <p:txBody>
+          <a:bodyPr wrap="square" lIns="0" tIns="0" rIns="0" bIns="0" rtlCol="0" anchor="t"/>
+          <a:lstStyle/>
+          <a:p>
+            <a:pPr indent="0" marL="0">
+              <a:buNone/>
+            </a:pPr>
+            <a:r>
+              <a:rPr lang="en-US" sz="1300" b="1" dirty="0">
+                <a:solidFill>
+                  <a:schemeClr val="accent4"/>
+                </a:solidFill>
+              </a:rPr>
+              <a:t>Sections 7, 10.3, 12.2</a:t>
+            </a:r>
+            <a:endParaRPr lang="en-US" sz="1300" dirty="0"/>
+          </a:p>
+        </p:txBody>
+      </p:sp>
+      <p:sp>
+        <p:nvSpPr>
+          <p:cNvPr id="22" name="covers-4"/>
+          <p:cNvSpPr/>
+          <p:nvPr/>
+        </p:nvSpPr>
+        <p:spPr>
+          <a:xfrm>
+            <a:off x="9004554" y="2468880"/>
+            <a:ext cx="2635758" cy="1600200"/>
+          </a:xfrm>
+          <a:prstGeom prst="roundRect">
+            <a:avLst>
+              <a:gd name="adj" fmla="val 3429"/>
+            </a:avLst>
+          </a:prstGeom>
+          <a:solidFill>
+            <a:srgbClr val="F1EAF6"/>
+          </a:solidFill>
+          <a:ln w="9525">
+            <a:solidFill>
+              <a:srgbClr val="F1EAF6"/>
+            </a:solidFill>
+            <a:prstDash val="solid"/>
+          </a:ln>
+        </p:spPr>
+      </p:sp>
+      <p:sp>
+        <p:nvSpPr>
+          <p:cNvPr id="23" name="Text 20"/>
+          <p:cNvSpPr txBox="1"/>
+          <p:nvPr/>
+        </p:nvSpPr>
+        <p:spPr>
+          <a:xfrm>
+            <a:off x="9169146" y="2606040"/>
+            <a:ext cx="2306574" cy="868680"/>
+          </a:xfrm>
+          <a:prstGeom prst="rect">
+            <a:avLst/>
+          </a:prstGeom>
+          <a:noFill/>
+          <a:ln/>
+        </p:spPr>
+        <p:txBody>
+          <a:bodyPr wrap="square" lIns="0" tIns="0" rIns="0" bIns="0" rtlCol="0" anchor="t"/>
+          <a:lstStyle/>
+          <a:p>
+            <a:pPr indent="0" marL="0">
+              <a:buNone/>
+            </a:pPr>
+            <a:r>
+              <a:rPr lang="en-US" sz="1500" dirty="0">
+                <a:solidFill>
+                  <a:schemeClr val="tx1"/>
+                </a:solidFill>
+              </a:rPr>
+              <a:t>Vaporisers and the receiving terminal</a:t>
+            </a:r>
+            <a:endParaRPr lang="en-US" sz="1500" dirty="0"/>
+          </a:p>
+        </p:txBody>
+      </p:sp>
+      <p:sp>
+        <p:nvSpPr>
+          <p:cNvPr id="24" name="Text 21"/>
+          <p:cNvSpPr txBox="1"/>
+          <p:nvPr/>
+        </p:nvSpPr>
+        <p:spPr>
+          <a:xfrm>
+            <a:off x="9169146" y="3520440"/>
+            <a:ext cx="2306574" cy="411480"/>
+          </a:xfrm>
+          <a:prstGeom prst="rect">
+            <a:avLst/>
+          </a:prstGeom>
+          <a:noFill/>
+          <a:ln/>
+        </p:spPr>
+        <p:txBody>
+          <a:bodyPr wrap="square" lIns="0" tIns="0" rIns="0" bIns="0" rtlCol="0" anchor="t"/>
+          <a:lstStyle/>
+          <a:p>
+            <a:pPr indent="0" marL="0">
+              <a:buNone/>
+            </a:pPr>
+            <a:r>
+              <a:rPr lang="en-US" sz="1300" b="1" dirty="0">
+                <a:solidFill>
+                  <a:schemeClr val="accent4"/>
+                </a:solidFill>
+              </a:rPr>
+              <a:t>Sections 9, 10.4</a:t>
+            </a:r>
+            <a:endParaRPr lang="en-US" sz="1300" dirty="0"/>
+          </a:p>
+        </p:txBody>
+      </p:sp>
+      <p:sp>
+        <p:nvSpPr>
+          <p:cNvPr id="25" name="cross-cutting"/>
+          <p:cNvSpPr/>
+          <p:nvPr/>
+        </p:nvSpPr>
+        <p:spPr>
+          <a:xfrm>
+            <a:off x="548640" y="4251960"/>
+            <a:ext cx="11091672" cy="685800"/>
+          </a:xfrm>
+          <a:prstGeom prst="roundRect">
+            <a:avLst>
+              <a:gd name="adj" fmla="val 8000"/>
+            </a:avLst>
+          </a:prstGeom>
+          <a:solidFill>
+            <a:srgbClr val="FFFFFF"/>
+          </a:solidFill>
+          <a:ln w="9525">
+            <a:solidFill>
+              <a:srgbClr val="B4AAE6"/>
+            </a:solidFill>
+            <a:prstDash val="solid"/>
+          </a:ln>
+        </p:spPr>
+      </p:sp>
+      <p:sp>
+        <p:nvSpPr>
+          <p:cNvPr id="26" name="Text 23"/>
+          <p:cNvSpPr txBox="1"/>
+          <p:nvPr/>
+        </p:nvSpPr>
+        <p:spPr>
+          <a:xfrm>
+            <a:off x="731520" y="4251960"/>
+            <a:ext cx="10725912" cy="685800"/>
+          </a:xfrm>
+          <a:prstGeom prst="rect">
+            <a:avLst/>
+          </a:prstGeom>
+          <a:noFill/>
+          <a:ln/>
+        </p:spPr>
+        <p:txBody>
+          <a:bodyPr wrap="square" lIns="0" tIns="0" rIns="0" bIns="0" rtlCol="0" anchor="ctr"/>
+          <a:lstStyle/>
+          <a:p>
+            <a:pPr indent="0" marL="0">
+              <a:buNone/>
+            </a:pPr>
+            <a:r>
+              <a:rPr lang="en-US" sz="1500" b="1" dirty="0">
+                <a:solidFill>
+                  <a:schemeClr val="accent4"/>
+                </a:solidFill>
+              </a:rPr>
+              <a:t>Across the chain:  </a:t>
+            </a:r>
+            <a:pPr indent="0" marL="0">
+              <a:buNone/>
+            </a:pPr>
+            <a:r>
+              <a:rPr lang="en-US" sz="1500" dirty="0">
+                <a:solidFill>
+                  <a:schemeClr val="tx1"/>
+                </a:solidFill>
+              </a:rPr>
+              <a:t>Export-facility cost (8)  ·  Regulation (11)  ·  Key challenges (12)  ·  LH₂ vs NH₃ as hydrogen carrier (13)</a:t>
+            </a:r>
+            <a:endParaRPr lang="en-US" sz="1500" dirty="0"/>
+          </a:p>
+        </p:txBody>
+      </p:sp>
+      <p:sp>
+        <p:nvSpPr>
+          <p:cNvPr id="27" name="basis-note"/>
+          <p:cNvSpPr txBox="1"/>
+          <p:nvPr/>
+        </p:nvSpPr>
+        <p:spPr>
+          <a:xfrm>
+            <a:off x="548640" y="5166360"/>
+            <a:ext cx="11091672" cy="1097280"/>
+          </a:xfrm>
+          <a:prstGeom prst="rect">
+            <a:avLst/>
+          </a:prstGeom>
+          <a:noFill/>
+          <a:ln/>
+        </p:spPr>
+        <p:txBody>
+          <a:bodyPr wrap="square" lIns="0" tIns="0" rIns="0" bIns="0" rtlCol="0" anchor="t"/>
+          <a:lstStyle/>
+          <a:p>
+            <a:pPr indent="0" marL="0">
+              <a:buNone/>
+            </a:pPr>
+            <a:r>
+              <a:rPr lang="en-US" sz="1100" dirty="0">
+                <a:solidFill>
+                  <a:schemeClr val="tx1"/>
+                </a:solidFill>
+              </a:rPr>
+              <a:t>Boundary: gaseous hydrogen at the export plant to gaseous hydrogen at import send-out; producing the hydrogen is outside the database. Use: technology benchmarking, project screening and preliminary techno-economic assessment.</a:t>
+            </a:r>
+            <a:endParaRPr lang="en-US" sz="1100" dirty="0"/>
+          </a:p>
+          <a:p>
+            <a:pPr indent="0" marL="0">
+              <a:buNone/>
+            </a:pPr>
+            <a:r>
+              <a:rPr lang="en-US" sz="1100" dirty="0">
+                <a:solidFill>
+                  <a:schemeClr val="tx1"/>
+                </a:solidFill>
+              </a:rPr>
+              <a:t>Rev 0, 18 Sep 2026. Prepared by Jasmin Suraya and Ungku M Zulhilmi Ungku Zakaria; reviewed by Wan M Ikhwan Wan Yussoff and Octavian Partenie; approved by Danial Khairi Ahmad; accepted by Alex Bower.</a:t>
+            </a:r>
+            <a:endParaRPr lang="en-US" sz="1100" dirty="0"/>
+          </a:p>
+        </p:txBody>
+      </p:sp>
+      <p:sp>
+        <p:nvSpPr>
+          <p:cNvPr id="25" name="Slide Number Placeholder 0"/>
+          <p:cNvSpPr>
+            <a:spLocks noGrp="1"/>
+          </p:cNvSpPr>
+          <p:nvPr>
+            <p:ph type="sldNum" sz="quarter" idx="4294967295"/>
+          </p:nvPr>
+        </p:nvSpPr>
+        <p:spPr>
+          <a:xfrm>
+            <a:off x="11228832" y="6446520"/>
+            <a:ext cx="411480" cy="274320"/>
+          </a:xfrm>
+          <a:prstGeom prst="rect">
+            <a:avLst/>
+          </a:prstGeom>
+          <a:extLst>
+            <a:ext uri="{C572A759-6A51-4108-AA02-DFA0A04FC94B}">
+              <ma14:wrappingTextBoxFlag xmlns:ma14="http://schemas.microsoft.com/office/mac/drawingml/2011/main" val="0"/>
+            </a:ext>
+          </a:extLst>
+        </p:spPr>
+        <p:txBody>
+          <a:bodyPr/>
+          <a:lstStyle>
+            <a:lvl1pPr>
+              <a:defRPr sz="1100">
+                <a:solidFill>
+                  <a:schemeClr val="tx1"/>
+                </a:solidFill>
+              </a:defRPr>
+            </a:lvl1pPr>
+          </a:lstStyle>
+          <a:p>
+            <a:pPr algn="r"/>
+            <a:fld id="{F7021451-1387-4CA6-816F-3879F97B5CBC}" type="slidenum">
+              <a:rPr b="0" lang="en-US"/>
+              <a:t>2</a:t>
+            </a:fld>
+            <a:endParaRPr lang="en-US"/>
+          </a:p>
+        </p:txBody>
+      </p:sp>
+    </p:spTree>
+  </p:cSld>
+  <p:clrMapOvr>
+    <a:masterClrMapping/>
+  </p:clrMapOvr>
+</p:sld>
+</file>
+
+<file path=ppt/slides/slide20.xml><?xml version="1.0" encoding="utf-8"?>
+<p:sld xmlns:a="http://schemas.openxmlformats.org/drawingml/2006/main" xmlns:r="http://schemas.openxmlformats.org/officeDocument/2006/relationships" xmlns:p="http://schemas.openxmlformats.org/presentationml/2006/main">
+  <p:cSld name="Slide 20">
+    <p:spTree>
+      <p:nvGrpSpPr>
+        <p:cNvPr id="1" name=""/>
+        <p:cNvGrpSpPr/>
+        <p:nvPr/>
+      </p:nvGrpSpPr>
+      <p:grpSpPr>
+        <a:xfrm>
+          <a:off x="0" y="0"/>
+          <a:ext cx="0" cy="0"/>
+          <a:chOff x="0" y="0"/>
+          <a:chExt cx="0" cy="0"/>
+        </a:xfrm>
+      </p:grpSpPr>
+      <p:sp>
+        <p:nvSpPr>
+          <p:cNvPr id="2" name="Text 1"/>
+          <p:cNvSpPr/>
+          <p:nvPr>
+            <p:ph idx="101" type="title" hasCustomPrompt="1"/>
+          </p:nvPr>
+        </p:nvSpPr>
+        <p:spPr>
+          <a:xfrm>
+            <a:off x="548640" y="347472"/>
+            <a:ext cx="11091672" cy="868680"/>
+          </a:xfrm>
+          <a:prstGeom prst="rect">
+            <a:avLst/>
+          </a:prstGeom>
+          <a:noFill/>
+          <a:ln/>
+        </p:spPr>
+        <p:txBody>
+          <a:bodyPr wrap="square" lIns="0" tIns="0" rIns="0" bIns="0" rtlCol="0" anchor="t"/>
+          <a:lstStyle/>
+          <a:p>
+            <a:pPr algn="l" indent="0" marL="0">
+              <a:buNone/>
+            </a:pPr>
+            <a:r>
+              <a:rPr lang="en-US" sz="2800" b="1" dirty="0">
+                <a:solidFill>
+                  <a:schemeClr val="accent1"/>
+                </a:solidFill>
+              </a:rPr>
+              <a:t>On energy cost alone, gas-fired ammonia is cheapest at USD 1.208/kg H₂ against USD 1.754 for LH₂; liquefier power is ~78 % of the LH₂ bill</a:t>
+            </a:r>
+            <a:endParaRPr lang="en-US" sz="2800" dirty="0"/>
+          </a:p>
+        </p:txBody>
+      </p:sp>
+      <p:sp>
+        <p:nvSpPr>
+          <p:cNvPr id="3" name="Text 1"/>
+          <p:cNvSpPr/>
+          <p:nvPr>
+            <p:ph idx="102" type="body" hasCustomPrompt="1"/>
+          </p:nvPr>
+        </p:nvSpPr>
+        <p:spPr>
+          <a:xfrm>
+            <a:off x="548640" y="6446520"/>
+            <a:ext cx="9875520" cy="274320"/>
+          </a:xfrm>
+          <a:prstGeom prst="rect">
+            <a:avLst/>
+          </a:prstGeom>
+          <a:noFill/>
+          <a:ln/>
+        </p:spPr>
+        <p:txBody>
+          <a:bodyPr wrap="square" lIns="0" tIns="0" rIns="0" bIns="0" rtlCol="0" anchor="ctr"/>
+          <a:lstStyle/>
+          <a:p>
+            <a:pPr indent="0" marL="0">
+              <a:buNone/>
+            </a:pPr>
+            <a:r>
+              <a:rPr lang="en-US" sz="1100" dirty="0">
+                <a:solidFill>
+                  <a:schemeClr val="tx1"/>
+                </a:solidFill>
+              </a:rPr>
+              <a:t>LiqH₂VC Database Rev 0 · Section 13.9 · energy cost · USD per kg H₂ delivered, cost year not stated</a:t>
+            </a:r>
+            <a:endParaRPr lang="en-US" sz="1100" dirty="0"/>
+          </a:p>
+        </p:txBody>
+      </p:sp>
+      <p:graphicFrame>
+        <p:nvGraphicFramePr>
+          <p:cNvPr id="5" name="energy-cost-chart" descr=""/>
+          <p:cNvGraphicFramePr/>
+          <p:nvPr/>
+        </p:nvGraphicFramePr>
+        <p:xfrm>
+          <a:off x="457200" y="1417320"/>
+          <a:ext cx="7315200" cy="4206240"/>
+        </p:xfrm>
+        <a:graphic xmlns:a="http://schemas.openxmlformats.org/drawingml/2006/main">
+          <a:graphicData uri="http://schemas.openxmlformats.org/drawingml/2006/chart">
+            <c:chart xmlns:c="http://schemas.openxmlformats.org/drawingml/2006/chart" r:id="rId1"/>
+          </a:graphicData>
+        </a:graphic>
+      </p:graphicFrame>
+      <p:sp>
+        <p:nvSpPr>
+          <p:cNvPr id="6" name="cost-stats"/>
+          <p:cNvSpPr/>
+          <p:nvPr/>
+        </p:nvSpPr>
+        <p:spPr>
+          <a:xfrm>
+            <a:off x="8138160" y="1508760"/>
+            <a:ext cx="3502152" cy="4069080"/>
+          </a:xfrm>
+          <a:prstGeom prst="roundRect">
+            <a:avLst>
+              <a:gd name="adj" fmla="val 1567"/>
+            </a:avLst>
+          </a:prstGeom>
+          <a:solidFill>
+            <a:srgbClr val="F1EAF6"/>
+          </a:solidFill>
+          <a:ln w="9525">
+            <a:solidFill>
+              <a:srgbClr val="F1EAF6"/>
+            </a:solidFill>
+            <a:prstDash val="solid"/>
+          </a:ln>
+        </p:spPr>
+      </p:sp>
+      <p:sp>
+        <p:nvSpPr>
+          <p:cNvPr id="7" name="stat-gap"/>
+          <p:cNvSpPr txBox="1"/>
+          <p:nvPr/>
+        </p:nvSpPr>
+        <p:spPr>
+          <a:xfrm>
+            <a:off x="8366760" y="1645920"/>
+            <a:ext cx="3108960" cy="457200"/>
+          </a:xfrm>
+          <a:prstGeom prst="rect">
+            <a:avLst/>
+          </a:prstGeom>
+          <a:noFill/>
+          <a:ln/>
+        </p:spPr>
+        <p:txBody>
+          <a:bodyPr wrap="square" lIns="0" tIns="0" rIns="0" bIns="0" rtlCol="0" anchor="b"/>
+          <a:lstStyle/>
+          <a:p>
+            <a:pPr indent="0" marL="0">
+              <a:buNone/>
+            </a:pPr>
+            <a:r>
+              <a:rPr lang="en-US" sz="2600" b="1" dirty="0">
+                <a:solidFill>
+                  <a:schemeClr val="accent4"/>
+                </a:solidFill>
+              </a:rPr>
+              <a:t>USD 54.5 M a year</a:t>
+            </a:r>
+            <a:endParaRPr lang="en-US" sz="2600" dirty="0"/>
+          </a:p>
+        </p:txBody>
+      </p:sp>
+      <p:sp>
+        <p:nvSpPr>
+          <p:cNvPr id="8" name="stat-label-gap"/>
+          <p:cNvSpPr txBox="1"/>
+          <p:nvPr/>
+        </p:nvSpPr>
+        <p:spPr>
+          <a:xfrm>
+            <a:off x="8366760" y="2176272"/>
+            <a:ext cx="3108960" cy="594360"/>
+          </a:xfrm>
+          <a:prstGeom prst="rect">
+            <a:avLst/>
+          </a:prstGeom>
+          <a:noFill/>
+          <a:ln/>
+        </p:spPr>
+        <p:txBody>
+          <a:bodyPr wrap="square" lIns="0" tIns="0" rIns="0" bIns="0" rtlCol="0" anchor="t"/>
+          <a:lstStyle/>
+          <a:p>
+            <a:pPr indent="0" marL="0">
+              <a:buNone/>
+            </a:pPr>
+            <a:r>
+              <a:rPr lang="en-US" sz="1400" dirty="0">
+                <a:solidFill>
+                  <a:schemeClr val="tx1"/>
+                </a:solidFill>
+              </a:rPr>
+              <a:t>Energy-cost gap between LH₂ and gas-fired NH₃ at 100,000 t a year</a:t>
+            </a:r>
+            <a:endParaRPr lang="en-US" sz="1400" dirty="0"/>
+          </a:p>
+        </p:txBody>
+      </p:sp>
+      <p:sp>
+        <p:nvSpPr>
+          <p:cNvPr id="9" name="stat-zero"/>
+          <p:cNvSpPr txBox="1"/>
+          <p:nvPr/>
+        </p:nvSpPr>
+        <p:spPr>
+          <a:xfrm>
+            <a:off x="8366760" y="2834640"/>
+            <a:ext cx="3108960" cy="457200"/>
+          </a:xfrm>
+          <a:prstGeom prst="rect">
+            <a:avLst/>
+          </a:prstGeom>
+          <a:noFill/>
+          <a:ln/>
+        </p:spPr>
+        <p:txBody>
+          <a:bodyPr wrap="square" lIns="0" tIns="0" rIns="0" bIns="0" rtlCol="0" anchor="b"/>
+          <a:lstStyle/>
+          <a:p>
+            <a:pPr indent="0" marL="0">
+              <a:buNone/>
+            </a:pPr>
+            <a:r>
+              <a:rPr lang="en-US" sz="2600" b="1" dirty="0">
+                <a:solidFill>
+                  <a:schemeClr val="accent4"/>
+                </a:solidFill>
+              </a:rPr>
+              <a:t>USD 1.406/kg</a:t>
+            </a:r>
+            <a:endParaRPr lang="en-US" sz="2600" dirty="0"/>
+          </a:p>
+        </p:txBody>
+      </p:sp>
+      <p:sp>
+        <p:nvSpPr>
+          <p:cNvPr id="10" name="stat-label-zero"/>
+          <p:cNvSpPr txBox="1"/>
+          <p:nvPr/>
+        </p:nvSpPr>
+        <p:spPr>
+          <a:xfrm>
+            <a:off x="8366760" y="3364992"/>
+            <a:ext cx="3108960" cy="594360"/>
+          </a:xfrm>
+          <a:prstGeom prst="rect">
+            <a:avLst/>
+          </a:prstGeom>
+          <a:noFill/>
+          <a:ln/>
+        </p:spPr>
+        <p:txBody>
+          <a:bodyPr wrap="square" lIns="0" tIns="0" rIns="0" bIns="0" rtlCol="0" anchor="t"/>
+          <a:lstStyle/>
+          <a:p>
+            <a:pPr indent="0" marL="0">
+              <a:buNone/>
+            </a:pPr>
+            <a:r>
+              <a:rPr lang="en-US" sz="1400" dirty="0">
+                <a:solidFill>
+                  <a:schemeClr val="tx1"/>
+                </a:solidFill>
+              </a:rPr>
+              <a:t>LH₂ energy cost even at a hydrogen price of zero, still above gas-fired NH₃</a:t>
+            </a:r>
+            <a:endParaRPr lang="en-US" sz="1400" dirty="0"/>
+          </a:p>
+        </p:txBody>
+      </p:sp>
+      <p:sp>
+        <p:nvSpPr>
+          <p:cNvPr id="11" name="stat-breakeven"/>
+          <p:cNvSpPr txBox="1"/>
+          <p:nvPr/>
+        </p:nvSpPr>
+        <p:spPr>
+          <a:xfrm>
+            <a:off x="8366760" y="4023360"/>
+            <a:ext cx="3108960" cy="457200"/>
+          </a:xfrm>
+          <a:prstGeom prst="rect">
+            <a:avLst/>
+          </a:prstGeom>
+          <a:noFill/>
+          <a:ln/>
+        </p:spPr>
+        <p:txBody>
+          <a:bodyPr wrap="square" lIns="0" tIns="0" rIns="0" bIns="0" rtlCol="0" anchor="b"/>
+          <a:lstStyle/>
+          <a:p>
+            <a:pPr indent="0" marL="0">
+              <a:buNone/>
+            </a:pPr>
+            <a:r>
+              <a:rPr lang="en-US" sz="2600" b="1" dirty="0">
+                <a:solidFill>
+                  <a:schemeClr val="accent4"/>
+                </a:solidFill>
+              </a:rPr>
+              <a:t>USD 1.99/kg</a:t>
+            </a:r>
+            <a:endParaRPr lang="en-US" sz="2600" dirty="0"/>
+          </a:p>
+        </p:txBody>
+      </p:sp>
+      <p:sp>
+        <p:nvSpPr>
+          <p:cNvPr id="12" name="stat-label-breakeven"/>
+          <p:cNvSpPr txBox="1"/>
+          <p:nvPr/>
+        </p:nvSpPr>
+        <p:spPr>
+          <a:xfrm>
+            <a:off x="8366760" y="4553712"/>
+            <a:ext cx="3108960" cy="594360"/>
+          </a:xfrm>
+          <a:prstGeom prst="rect">
+            <a:avLst/>
+          </a:prstGeom>
+          <a:noFill/>
+          <a:ln/>
+        </p:spPr>
+        <p:txBody>
+          <a:bodyPr wrap="square" lIns="0" tIns="0" rIns="0" bIns="0" rtlCol="0" anchor="t"/>
+          <a:lstStyle/>
+          <a:p>
+            <a:pPr indent="0" marL="0">
+              <a:buNone/>
+            </a:pPr>
+            <a:r>
+              <a:rPr lang="en-US" sz="1400" dirty="0">
+                <a:solidFill>
+                  <a:schemeClr val="tx1"/>
+                </a:solidFill>
+              </a:rPr>
+              <a:t>Hydrogen price below which LH₂ beats the clean-fuel NH₃ route</a:t>
+            </a:r>
+            <a:endParaRPr lang="en-US" sz="1400" dirty="0"/>
+          </a:p>
+        </p:txBody>
+      </p:sp>
+      <p:sp>
+        <p:nvSpPr>
+          <p:cNvPr id="13" name="basis-note"/>
+          <p:cNvSpPr txBox="1"/>
+          <p:nvPr/>
+        </p:nvSpPr>
+        <p:spPr>
+          <a:xfrm>
+            <a:off x="548640" y="5760720"/>
+            <a:ext cx="11091672" cy="548640"/>
+          </a:xfrm>
+          <a:prstGeom prst="rect">
+            <a:avLst/>
+          </a:prstGeom>
+          <a:noFill/>
+          <a:ln/>
+        </p:spPr>
+        <p:txBody>
+          <a:bodyPr wrap="square" lIns="0" tIns="0" rIns="0" bIns="0" rtlCol="0" anchor="t"/>
+          <a:lstStyle/>
+          <a:p>
+            <a:pPr indent="0" marL="0">
+              <a:buNone/>
+            </a:pPr>
+            <a:r>
+              <a:rPr lang="en-US" sz="1100" dirty="0">
+                <a:solidFill>
+                  <a:schemeClr val="tx1"/>
+                </a:solidFill>
+              </a:rPr>
+              <a:t>Prices are team inputs in USD with no cost year: electricity 140 USD/MWh, marine fuel oil 553 USD/t, natural gas 13 USD/MMBtu (LHV), ammonia 700 USD/t; hydrogen 4.00 USD/kg (assumption); import electricity held equal to export (placeholder). Labels under 0.10 hidden.</a:t>
+            </a:r>
+            <a:endParaRPr lang="en-US" sz="1100" dirty="0"/>
+          </a:p>
+        </p:txBody>
+      </p:sp>
+      <p:sp>
+        <p:nvSpPr>
+          <p:cNvPr id="25" name="Slide Number Placeholder 0"/>
+          <p:cNvSpPr>
+            <a:spLocks noGrp="1"/>
+          </p:cNvSpPr>
+          <p:nvPr>
+            <p:ph type="sldNum" sz="quarter" idx="4294967295"/>
+          </p:nvPr>
+        </p:nvSpPr>
+        <p:spPr>
+          <a:xfrm>
+            <a:off x="11228832" y="6446520"/>
+            <a:ext cx="411480" cy="274320"/>
+          </a:xfrm>
+          <a:prstGeom prst="rect">
+            <a:avLst/>
+          </a:prstGeom>
+          <a:extLst>
+            <a:ext uri="{C572A759-6A51-4108-AA02-DFA0A04FC94B}">
+              <ma14:wrappingTextBoxFlag xmlns:ma14="http://schemas.microsoft.com/office/mac/drawingml/2011/main" val="0"/>
+            </a:ext>
+          </a:extLst>
+        </p:spPr>
+        <p:txBody>
+          <a:bodyPr/>
+          <a:lstStyle>
+            <a:lvl1pPr>
+              <a:defRPr sz="1100">
+                <a:solidFill>
+                  <a:schemeClr val="tx1"/>
+                </a:solidFill>
+              </a:defRPr>
+            </a:lvl1pPr>
+          </a:lstStyle>
+          <a:p>
+            <a:pPr algn="r"/>
+            <a:fld id="{F7021451-1387-4CA6-816F-3879F97B5CBC}" type="slidenum">
+              <a:rPr b="0" lang="en-US"/>
+              <a:t>20</a:t>
+            </a:fld>
+            <a:endParaRPr lang="en-US"/>
+          </a:p>
+        </p:txBody>
+      </p:sp>
+    </p:spTree>
+  </p:cSld>
+  <p:clrMapOvr>
+    <a:masterClrMapping/>
+  </p:clrMapOvr>
+</p:sld>
+</file>
+
+<file path=ppt/slides/slide21.xml><?xml version="1.0" encoding="utf-8"?>
+<p:sld xmlns:a="http://schemas.openxmlformats.org/drawingml/2006/main" xmlns:r="http://schemas.openxmlformats.org/officeDocument/2006/relationships" xmlns:p="http://schemas.openxmlformats.org/presentationml/2006/main">
+  <p:cSld name="Slide 21">
+    <p:spTree>
+      <p:nvGrpSpPr>
+        <p:cNvPr id="1" name=""/>
+        <p:cNvGrpSpPr/>
+        <p:nvPr/>
+      </p:nvGrpSpPr>
+      <p:grpSpPr>
+        <a:xfrm>
+          <a:off x="0" y="0"/>
+          <a:ext cx="0" cy="0"/>
+          <a:chOff x="0" y="0"/>
+          <a:chExt cx="0" cy="0"/>
+        </a:xfrm>
+      </p:grpSpPr>
+      <p:sp>
+        <p:nvSpPr>
+          <p:cNvPr id="2" name="Text 1"/>
+          <p:cNvSpPr/>
+          <p:nvPr>
+            <p:ph idx="101" type="title" hasCustomPrompt="1"/>
+          </p:nvPr>
+        </p:nvSpPr>
+        <p:spPr>
+          <a:xfrm>
+            <a:off x="548640" y="347472"/>
+            <a:ext cx="11091672" cy="868680"/>
+          </a:xfrm>
+          <a:prstGeom prst="rect">
+            <a:avLst/>
+          </a:prstGeom>
+          <a:noFill/>
+          <a:ln/>
+        </p:spPr>
+        <p:txBody>
+          <a:bodyPr wrap="square" lIns="0" tIns="0" rIns="0" bIns="0" rtlCol="0" anchor="t"/>
+          <a:lstStyle/>
+          <a:p>
+            <a:pPr algn="l" indent="0" marL="0">
+              <a:buNone/>
+            </a:pPr>
+            <a:r>
+              <a:rPr lang="en-US" sz="2800" b="1" dirty="0">
+                <a:solidFill>
+                  <a:schemeClr val="accent1"/>
+                </a:solidFill>
+              </a:rPr>
+              <a:t>Neither carrier wins on every measure: ammonia leads on energy cost and ships, LH₂ on hydrogen delivered and energy with electrolysis</a:t>
+            </a:r>
+            <a:endParaRPr lang="en-US" sz="2800" dirty="0"/>
+          </a:p>
+        </p:txBody>
+      </p:sp>
+      <p:sp>
+        <p:nvSpPr>
+          <p:cNvPr id="3" name="Text 1"/>
+          <p:cNvSpPr/>
+          <p:nvPr>
+            <p:ph idx="102" type="body" hasCustomPrompt="1"/>
+          </p:nvPr>
+        </p:nvSpPr>
+        <p:spPr>
+          <a:xfrm>
+            <a:off x="548640" y="6446520"/>
+            <a:ext cx="9875520" cy="274320"/>
+          </a:xfrm>
+          <a:prstGeom prst="rect">
+            <a:avLst/>
+          </a:prstGeom>
+          <a:noFill/>
+          <a:ln/>
+        </p:spPr>
+        <p:txBody>
+          <a:bodyPr wrap="square" lIns="0" tIns="0" rIns="0" bIns="0" rtlCol="0" anchor="ctr"/>
+          <a:lstStyle/>
+          <a:p>
+            <a:pPr indent="0" marL="0">
+              <a:buNone/>
+            </a:pPr>
+            <a:r>
+              <a:rPr lang="en-US" sz="1100" dirty="0">
+                <a:solidFill>
+                  <a:schemeClr val="tx1"/>
+                </a:solidFill>
+              </a:rPr>
+              <a:t>LiqH₂VC Database Rev 0 · Section 13.10 · summary of the LH₂ vs NH₃ screening</a:t>
+            </a:r>
+            <a:endParaRPr lang="en-US" sz="1100" dirty="0"/>
+          </a:p>
+        </p:txBody>
+      </p:sp>
+      <p:sp>
+        <p:nvSpPr>
+          <p:cNvPr id="5" name="summary-head-1"/>
+          <p:cNvSpPr/>
+          <p:nvPr/>
+        </p:nvSpPr>
+        <p:spPr>
+          <a:xfrm>
+            <a:off x="548640" y="1508760"/>
+            <a:ext cx="5454396" cy="548640"/>
+          </a:xfrm>
+          <a:prstGeom prst="rect">
+            <a:avLst/>
+          </a:prstGeom>
+          <a:solidFill>
+            <a:srgbClr val="4A3AA7"/>
+          </a:solidFill>
+          <a:ln w="12700">
+            <a:solidFill>
+              <a:srgbClr val="4A3AA7"/>
+            </a:solidFill>
+            <a:prstDash val="solid"/>
+          </a:ln>
+        </p:spPr>
+      </p:sp>
+      <p:sp>
+        <p:nvSpPr>
+          <p:cNvPr id="6" name="Text 3"/>
+          <p:cNvSpPr txBox="1"/>
+          <p:nvPr/>
+        </p:nvSpPr>
+        <p:spPr>
+          <a:xfrm>
+            <a:off x="731520" y="1508760"/>
+            <a:ext cx="5088636" cy="548640"/>
+          </a:xfrm>
+          <a:prstGeom prst="rect">
+            <a:avLst/>
+          </a:prstGeom>
+          <a:noFill/>
+          <a:ln/>
+        </p:spPr>
+        <p:txBody>
+          <a:bodyPr wrap="square" lIns="0" tIns="0" rIns="0" bIns="0" rtlCol="0" anchor="ctr"/>
+          <a:lstStyle/>
+          <a:p>
+            <a:pPr indent="0" marL="0">
+              <a:buNone/>
+            </a:pPr>
+            <a:r>
+              <a:rPr lang="en-US" sz="1800" b="1" dirty="0">
+                <a:solidFill>
+                  <a:schemeClr val="bg1"/>
+                </a:solidFill>
+              </a:rPr>
+              <a:t>Where LH₂ is ahead</a:t>
+            </a:r>
+            <a:endParaRPr lang="en-US" sz="1800" dirty="0"/>
+          </a:p>
+        </p:txBody>
+      </p:sp>
+      <p:sp>
+        <p:nvSpPr>
+          <p:cNvPr id="7" name="summary-body-1"/>
+          <p:cNvSpPr/>
+          <p:nvPr/>
+        </p:nvSpPr>
+        <p:spPr>
+          <a:xfrm>
+            <a:off x="548640" y="2057400"/>
+            <a:ext cx="5454396" cy="3063240"/>
+          </a:xfrm>
+          <a:prstGeom prst="roundRect">
+            <a:avLst>
+              <a:gd name="adj" fmla="val 1791"/>
+            </a:avLst>
+          </a:prstGeom>
+          <a:solidFill>
+            <a:srgbClr val="F1EAF6"/>
+          </a:solidFill>
+          <a:ln w="9525">
+            <a:solidFill>
+              <a:srgbClr val="F1EAF6"/>
+            </a:solidFill>
+            <a:prstDash val="solid"/>
+          </a:ln>
+        </p:spPr>
+      </p:sp>
+      <p:sp>
+        <p:nvSpPr>
+          <p:cNvPr id="8" name="Text 5"/>
+          <p:cNvSpPr txBox="1"/>
+          <p:nvPr/>
+        </p:nvSpPr>
+        <p:spPr>
+          <a:xfrm>
+            <a:off x="777240" y="2286000"/>
+            <a:ext cx="4997196" cy="2743200"/>
+          </a:xfrm>
+          <a:prstGeom prst="rect">
+            <a:avLst/>
+          </a:prstGeom>
+          <a:noFill/>
+          <a:ln/>
+        </p:spPr>
+        <p:txBody>
+          <a:bodyPr wrap="square" lIns="0" tIns="0" rIns="0" bIns="0" rtlCol="0" anchor="t"/>
+          <a:lstStyle/>
+          <a:p>
+            <a:pPr marL="177800" indent="-177800">
+              <a:spcAft>
+                <a:spcPts val="1400"/>
+              </a:spcAft>
+              <a:buSzPct val="100000"/>
+              <a:buChar char="•"/>
+            </a:pPr>
+            <a:r>
+              <a:rPr lang="en-US" sz="1700" dirty="0">
+                <a:solidFill>
+                  <a:schemeClr val="tx1"/>
+                </a:solidFill>
+              </a:rPr>
+              <a:t>Delivers 92.0 % of the hydrogen it starts with, against 86.2 % and 77.8 % for NH₃</a:t>
+            </a:r>
+            <a:endParaRPr lang="en-US" sz="1700" dirty="0"/>
+          </a:p>
+          <a:p>
+            <a:pPr marL="177800" indent="-177800">
+              <a:spcAft>
+                <a:spcPts val="1400"/>
+              </a:spcAft>
+              <a:buSzPct val="100000"/>
+              <a:buChar char="•"/>
+            </a:pPr>
+            <a:r>
+              <a:rPr lang="en-US" sz="1700" dirty="0">
+                <a:solidFill>
+                  <a:schemeClr val="tx1"/>
+                </a:solidFill>
+              </a:rPr>
+              <a:t>The import terminal only vaporises the liquid: 0.05 kWh/kg, no chemical conversion</a:t>
+            </a:r>
+            <a:endParaRPr lang="en-US" sz="1700" dirty="0"/>
+          </a:p>
+          <a:p>
+            <a:pPr marL="177800" indent="-177800">
+              <a:spcAft>
+                <a:spcPts val="1400"/>
+              </a:spcAft>
+              <a:buSzPct val="100000"/>
+              <a:buChar char="•"/>
+            </a:pPr>
+            <a:r>
+              <a:rPr lang="en-US" sz="1700" dirty="0">
+                <a:solidFill>
+                  <a:schemeClr val="tx1"/>
+                </a:solidFill>
+              </a:rPr>
+              <a:t>Uses the least energy once electrolysis is counted: 78.49 against 81.00 kWh/kg, but by only ~1 % with burned cargo not counted twice</a:t>
+            </a:r>
+            <a:endParaRPr lang="en-US" sz="1700" dirty="0"/>
+          </a:p>
+        </p:txBody>
+      </p:sp>
+      <p:sp>
+        <p:nvSpPr>
+          <p:cNvPr id="9" name="summary-head-2"/>
+          <p:cNvSpPr/>
+          <p:nvPr/>
+        </p:nvSpPr>
+        <p:spPr>
+          <a:xfrm>
+            <a:off x="6185916" y="1508760"/>
+            <a:ext cx="5454396" cy="548640"/>
+          </a:xfrm>
+          <a:prstGeom prst="rect">
+            <a:avLst/>
+          </a:prstGeom>
+          <a:solidFill>
+            <a:srgbClr val="2977D6"/>
+          </a:solidFill>
+          <a:ln w="12700">
+            <a:solidFill>
+              <a:srgbClr val="2977D6"/>
+            </a:solidFill>
+            <a:prstDash val="solid"/>
+          </a:ln>
+        </p:spPr>
+      </p:sp>
+      <p:sp>
+        <p:nvSpPr>
+          <p:cNvPr id="10" name="Text 7"/>
+          <p:cNvSpPr txBox="1"/>
+          <p:nvPr/>
+        </p:nvSpPr>
+        <p:spPr>
+          <a:xfrm>
+            <a:off x="6368796" y="1508760"/>
+            <a:ext cx="5088636" cy="548640"/>
+          </a:xfrm>
+          <a:prstGeom prst="rect">
+            <a:avLst/>
+          </a:prstGeom>
+          <a:noFill/>
+          <a:ln/>
+        </p:spPr>
+        <p:txBody>
+          <a:bodyPr wrap="square" lIns="0" tIns="0" rIns="0" bIns="0" rtlCol="0" anchor="ctr"/>
+          <a:lstStyle/>
+          <a:p>
+            <a:pPr indent="0" marL="0">
+              <a:buNone/>
+            </a:pPr>
+            <a:r>
+              <a:rPr lang="en-US" sz="1800" b="1" dirty="0">
+                <a:solidFill>
+                  <a:schemeClr val="bg1"/>
+                </a:solidFill>
+              </a:rPr>
+              <a:t>Where NH₃ (gas-fired cracker) is ahead</a:t>
+            </a:r>
+            <a:endParaRPr lang="en-US" sz="1800" dirty="0"/>
+          </a:p>
+        </p:txBody>
+      </p:sp>
+      <p:sp>
+        <p:nvSpPr>
+          <p:cNvPr id="11" name="summary-body-2"/>
+          <p:cNvSpPr/>
+          <p:nvPr/>
+        </p:nvSpPr>
+        <p:spPr>
+          <a:xfrm>
+            <a:off x="6185916" y="2057400"/>
+            <a:ext cx="5454396" cy="3063240"/>
+          </a:xfrm>
+          <a:prstGeom prst="roundRect">
+            <a:avLst>
+              <a:gd name="adj" fmla="val 1791"/>
+            </a:avLst>
+          </a:prstGeom>
+          <a:solidFill>
+            <a:srgbClr val="F1EAF6"/>
+          </a:solidFill>
+          <a:ln w="9525">
+            <a:solidFill>
+              <a:srgbClr val="F1EAF6"/>
+            </a:solidFill>
+            <a:prstDash val="solid"/>
+          </a:ln>
+        </p:spPr>
+      </p:sp>
+      <p:sp>
+        <p:nvSpPr>
+          <p:cNvPr id="12" name="Text 9"/>
+          <p:cNvSpPr txBox="1"/>
+          <p:nvPr/>
+        </p:nvSpPr>
+        <p:spPr>
+          <a:xfrm>
+            <a:off x="6414516" y="2286000"/>
+            <a:ext cx="4997196" cy="2743200"/>
+          </a:xfrm>
+          <a:prstGeom prst="rect">
+            <a:avLst/>
+          </a:prstGeom>
+          <a:noFill/>
+          <a:ln/>
+        </p:spPr>
+        <p:txBody>
+          <a:bodyPr wrap="square" lIns="0" tIns="0" rIns="0" bIns="0" rtlCol="0" anchor="t"/>
+          <a:lstStyle/>
+          <a:p>
+            <a:pPr marL="177800" indent="-177800">
+              <a:spcAft>
+                <a:spcPts val="1400"/>
+              </a:spcAft>
+              <a:buSzPct val="100000"/>
+              <a:buChar char="•"/>
+            </a:pPr>
+            <a:r>
+              <a:rPr lang="en-US" sz="1700" dirty="0">
+                <a:solidFill>
+                  <a:schemeClr val="tx1"/>
+                </a:solidFill>
+              </a:rPr>
+              <a:t>Less energy per kg delivered before electrolysis: 11.36 against 13.27 kWh/kg</a:t>
+            </a:r>
+            <a:endParaRPr lang="en-US" sz="1700" dirty="0"/>
+          </a:p>
+          <a:p>
+            <a:pPr marL="177800" indent="-177800">
+              <a:spcAft>
+                <a:spcPts val="1400"/>
+              </a:spcAft>
+              <a:buSzPct val="100000"/>
+              <a:buChar char="•"/>
+            </a:pPr>
+            <a:r>
+              <a:rPr lang="en-US" sz="1700" dirty="0">
+                <a:solidFill>
+                  <a:schemeClr val="tx1"/>
+                </a:solidFill>
+              </a:rPr>
+              <a:t>Lower energy cost: USD 1.208 against 1.754 per kg; with the hydrogen feed charged the gap falls to USD 0.21</a:t>
+            </a:r>
+            <a:endParaRPr lang="en-US" sz="1700" dirty="0"/>
+          </a:p>
+          <a:p>
+            <a:pPr marL="177800" indent="-177800">
+              <a:spcAft>
+                <a:spcPts val="1400"/>
+              </a:spcAft>
+              <a:buSzPct val="100000"/>
+              <a:buChar char="•"/>
+            </a:pPr>
+            <a:r>
+              <a:rPr lang="en-US" sz="1700" dirty="0">
+                <a:solidFill>
+                  <a:schemeClr val="tx1"/>
+                </a:solidFill>
+              </a:rPr>
+              <a:t>Fewer ships for 100,000 t a year: 4 against 5</a:t>
+            </a:r>
+            <a:endParaRPr lang="en-US" sz="1700" dirty="0"/>
+          </a:p>
+          <a:p>
+            <a:pPr marL="177800" indent="-177800">
+              <a:spcAft>
+                <a:spcPts val="1400"/>
+              </a:spcAft>
+              <a:buSzPct val="100000"/>
+              <a:buChar char="•"/>
+            </a:pPr>
+            <a:r>
+              <a:rPr lang="en-US" sz="1700" dirty="0">
+                <a:solidFill>
+                  <a:schemeClr val="tx1"/>
+                </a:solidFill>
+              </a:rPr>
+              <a:t>Upstream, even a perfect liquefier could not match the ammonia plant</a:t>
+            </a:r>
+            <a:endParaRPr lang="en-US" sz="1700" dirty="0"/>
+          </a:p>
+        </p:txBody>
+      </p:sp>
+      <p:sp>
+        <p:nvSpPr>
+          <p:cNvPr id="13" name="summary-caveat"/>
+          <p:cNvSpPr/>
+          <p:nvPr/>
+        </p:nvSpPr>
+        <p:spPr>
+          <a:xfrm>
+            <a:off x="548640" y="5303520"/>
+            <a:ext cx="11091672" cy="594360"/>
+          </a:xfrm>
+          <a:prstGeom prst="roundRect">
+            <a:avLst>
+              <a:gd name="adj" fmla="val 9231"/>
+            </a:avLst>
+          </a:prstGeom>
+          <a:solidFill>
+            <a:srgbClr val="FFFFFF"/>
+          </a:solidFill>
+          <a:ln w="9525">
+            <a:solidFill>
+              <a:srgbClr val="B4AAE6"/>
+            </a:solidFill>
+            <a:prstDash val="solid"/>
+          </a:ln>
+        </p:spPr>
+      </p:sp>
+      <p:sp>
+        <p:nvSpPr>
+          <p:cNvPr id="14" name="Text 11"/>
+          <p:cNvSpPr txBox="1"/>
+          <p:nvPr/>
+        </p:nvSpPr>
+        <p:spPr>
+          <a:xfrm>
+            <a:off x="731520" y="5303520"/>
+            <a:ext cx="10725912" cy="594360"/>
+          </a:xfrm>
+          <a:prstGeom prst="rect">
+            <a:avLst/>
+          </a:prstGeom>
+          <a:noFill/>
+          <a:ln/>
+        </p:spPr>
+        <p:txBody>
+          <a:bodyPr wrap="square" lIns="0" tIns="0" rIns="0" bIns="0" rtlCol="0" anchor="ctr"/>
+          <a:lstStyle/>
+          <a:p>
+            <a:pPr indent="0" marL="0">
+              <a:buNone/>
+            </a:pPr>
+            <a:r>
+              <a:rPr lang="en-US" sz="1500" b="1" dirty="0">
+                <a:solidFill>
+                  <a:schemeClr val="accent4"/>
+                </a:solidFill>
+              </a:rPr>
+              <a:t>Not yet decided:  </a:t>
+            </a:r>
+            <a:pPr indent="0" marL="0">
+              <a:buNone/>
+            </a:pPr>
+            <a:r>
+              <a:rPr lang="en-US" sz="1500" dirty="0">
+                <a:solidFill>
+                  <a:schemeClr val="tx1"/>
+                </a:solidFill>
+              </a:rPr>
+              <a:t>capital cost, ship cost and shipping economics still need cost data from a full feasibility study.</a:t>
+            </a:r>
+            <a:endParaRPr lang="en-US" sz="1500" dirty="0"/>
+          </a:p>
+        </p:txBody>
+      </p:sp>
+      <p:sp>
+        <p:nvSpPr>
+          <p:cNvPr id="25" name="Slide Number Placeholder 0"/>
+          <p:cNvSpPr>
+            <a:spLocks noGrp="1"/>
+          </p:cNvSpPr>
+          <p:nvPr>
+            <p:ph type="sldNum" sz="quarter" idx="4294967295"/>
+          </p:nvPr>
+        </p:nvSpPr>
+        <p:spPr>
+          <a:xfrm>
+            <a:off x="11228832" y="6446520"/>
+            <a:ext cx="411480" cy="274320"/>
+          </a:xfrm>
+          <a:prstGeom prst="rect">
+            <a:avLst/>
+          </a:prstGeom>
+          <a:extLst>
+            <a:ext uri="{C572A759-6A51-4108-AA02-DFA0A04FC94B}">
+              <ma14:wrappingTextBoxFlag xmlns:ma14="http://schemas.microsoft.com/office/mac/drawingml/2011/main" val="0"/>
+            </a:ext>
+          </a:extLst>
+        </p:spPr>
+        <p:txBody>
+          <a:bodyPr/>
+          <a:lstStyle>
+            <a:lvl1pPr>
+              <a:defRPr sz="1100">
+                <a:solidFill>
+                  <a:schemeClr val="tx1"/>
+                </a:solidFill>
+              </a:defRPr>
+            </a:lvl1pPr>
+          </a:lstStyle>
+          <a:p>
+            <a:pPr algn="r"/>
+            <a:fld id="{F7021451-1387-4CA6-816F-3879F97B5CBC}" type="slidenum">
+              <a:rPr b="0" lang="en-US"/>
+              <a:t>21</a:t>
+            </a:fld>
+            <a:endParaRPr lang="en-US"/>
+          </a:p>
+        </p:txBody>
+      </p:sp>
+    </p:spTree>
+  </p:cSld>
+  <p:clrMapOvr>
+    <a:masterClrMapping/>
+  </p:clrMapOvr>
+</p:sld>
+</file>
+
+<file path=ppt/slides/slide22.xml><?xml version="1.0" encoding="utf-8"?>
+<p:sld xmlns:a="http://schemas.openxmlformats.org/drawingml/2006/main" xmlns:r="http://schemas.openxmlformats.org/officeDocument/2006/relationships" xmlns:p="http://schemas.openxmlformats.org/presentationml/2006/main">
+  <p:cSld name="Slide 22">
+    <p:spTree>
+      <p:nvGrpSpPr>
+        <p:cNvPr id="1" name=""/>
+        <p:cNvGrpSpPr/>
+        <p:nvPr/>
+      </p:nvGrpSpPr>
+      <p:grpSpPr>
+        <a:xfrm>
+          <a:off x="0" y="0"/>
+          <a:ext cx="0" cy="0"/>
+          <a:chOff x="0" y="0"/>
+          <a:chExt cx="0" cy="0"/>
+        </a:xfrm>
+      </p:grpSpPr>
+      <p:sp>
+        <p:nvSpPr>
+          <p:cNvPr id="2" name="Text 1"/>
+          <p:cNvSpPr/>
+          <p:nvPr>
+            <p:ph idx="101" type="title" hasCustomPrompt="1"/>
+          </p:nvPr>
+        </p:nvSpPr>
+        <p:spPr>
+          <a:xfrm>
+            <a:off x="548640" y="347472"/>
+            <a:ext cx="11091672" cy="868680"/>
+          </a:xfrm>
+          <a:prstGeom prst="rect">
+            <a:avLst/>
+          </a:prstGeom>
+          <a:noFill/>
+          <a:ln/>
+        </p:spPr>
+        <p:txBody>
+          <a:bodyPr wrap="square" lIns="0" tIns="0" rIns="0" bIns="0" rtlCol="0" anchor="t"/>
+          <a:lstStyle/>
+          <a:p>
+            <a:pPr algn="l" indent="0" marL="0">
+              <a:buNone/>
+            </a:pPr>
+            <a:r>
+              <a:rPr lang="en-US" sz="2800" b="1" dirty="0">
+                <a:solidFill>
+                  <a:schemeClr val="accent1"/>
+                </a:solidFill>
+              </a:rPr>
+              <a:t>Six open items could change the result; closing them needs supplier and vessel data, the internal ammonia dataset and a feasibility study</a:t>
+            </a:r>
+            <a:endParaRPr lang="en-US" sz="2800" dirty="0"/>
+          </a:p>
+        </p:txBody>
+      </p:sp>
+      <p:sp>
+        <p:nvSpPr>
+          <p:cNvPr id="3" name="Text 1"/>
+          <p:cNvSpPr/>
+          <p:nvPr>
+            <p:ph idx="102" type="body" hasCustomPrompt="1"/>
+          </p:nvPr>
+        </p:nvSpPr>
+        <p:spPr>
+          <a:xfrm>
+            <a:off x="548640" y="6446520"/>
+            <a:ext cx="9875520" cy="274320"/>
+          </a:xfrm>
+          <a:prstGeom prst="rect">
+            <a:avLst/>
+          </a:prstGeom>
+          <a:noFill/>
+          <a:ln/>
+        </p:spPr>
+        <p:txBody>
+          <a:bodyPr wrap="square" lIns="0" tIns="0" rIns="0" bIns="0" rtlCol="0" anchor="ctr"/>
+          <a:lstStyle/>
+          <a:p>
+            <a:pPr indent="0" marL="0">
+              <a:buNone/>
+            </a:pPr>
+            <a:r>
+              <a:rPr lang="en-US" sz="1100" dirty="0">
+                <a:solidFill>
+                  <a:schemeClr val="tx1"/>
+                </a:solidFill>
+              </a:rPr>
+              <a:t>LiqH₂VC Database Rev 0 · Sections 10.2, 11, 12.3 and 13.10 · open items</a:t>
+            </a:r>
+            <a:endParaRPr lang="en-US" sz="1100" dirty="0"/>
+          </a:p>
+        </p:txBody>
+      </p:sp>
+      <p:graphicFrame>
+        <p:nvGraphicFramePr>
+          <p:cNvPr id="23" name="open-items-table"/>
           <p:cNvGraphicFramePr>
             <a:graphicFrameLocks noGrp="1"/>
           </p:cNvGraphicFramePr>
@@ -16110,7 +21639,7 @@
                           <a:ea typeface="Calibri" pitchFamily="34" charset="-122"/>
                           <a:cs typeface="Calibri" pitchFamily="34" charset="-120"/>
                         </a:rPr>
-                        <a:t>Hydrogen production energy</a:t>
+                        <a:t>Electrolyser energy</a:t>
                       </a:r>
                       <a:endParaRPr lang="en-US" sz="1300" dirty="0">
                         <a:latin typeface="Calibri" charset="0"/>
@@ -16175,7 +21704,7 @@
                           <a:ea typeface="Calibri" pitchFamily="34" charset="-122"/>
                           <a:cs typeface="Calibri" pitchFamily="34" charset="-120"/>
                         </a:rPr>
-                        <a:t>Not counted; 60 kWh/kg when included (assumption)</a:t>
+                        <a:t>Not counted in 13.2–13.6; 60 kWh/kg H₂ in 13.7 (assumption)</a:t>
                       </a:r>
                       <a:endParaRPr lang="en-US" sz="1300" dirty="0">
                         <a:latin typeface="Calibri" charset="0"/>
@@ -16240,7 +21769,7 @@
                           <a:ea typeface="Calibri" pitchFamily="34" charset="-122"/>
                           <a:cs typeface="Calibri" pitchFamily="34" charset="-120"/>
                         </a:rPr>
-                        <a:t>Counting it puts LH₂ ahead, because it loses less hydrogen</a:t>
+                        <a:t>Puts LH₂ ahead by only ~1 % once burned cargo is not counted twice; the routes tie at ~50 kWh/kg, so it needs a source</a:t>
                       </a:r>
                       <a:endParaRPr lang="en-US" sz="1300" dirty="0">
                         <a:latin typeface="Calibri" charset="0"/>
@@ -16762,7 +22291,7 @@
             <a:pPr algn="r"/>
             <a:fld id="{F7021451-1387-4CA6-816F-3879F97B5CBC}" type="slidenum">
               <a:rPr b="0" lang="en-US"/>
-              <a:t>19</a:t>
+              <a:t>22</a:t>
             </a:fld>
             <a:endParaRPr lang="en-US"/>
           </a:p>
@@ -16776,919 +22305,9 @@
 </p:sld>
 </file>
 
-<file path=ppt/slides/slide2.xml><?xml version="1.0" encoding="utf-8"?>
+<file path=ppt/slides/slide23.xml><?xml version="1.0" encoding="utf-8"?>
 <p:sld xmlns:a="http://schemas.openxmlformats.org/drawingml/2006/main" xmlns:r="http://schemas.openxmlformats.org/officeDocument/2006/relationships" xmlns:p="http://schemas.openxmlformats.org/presentationml/2006/main">
-  <p:cSld name="Slide 2">
-    <p:spTree>
-      <p:nvGrpSpPr>
-        <p:cNvPr id="1" name=""/>
-        <p:cNvGrpSpPr/>
-        <p:nvPr/>
-      </p:nvGrpSpPr>
-      <p:grpSpPr>
-        <a:xfrm>
-          <a:off x="0" y="0"/>
-          <a:ext cx="0" cy="0"/>
-          <a:chOff x="0" y="0"/>
-          <a:chExt cx="0" cy="0"/>
-        </a:xfrm>
-      </p:grpSpPr>
-      <p:sp>
-        <p:nvSpPr>
-          <p:cNvPr id="2" name="Text 1"/>
-          <p:cNvSpPr/>
-          <p:nvPr>
-            <p:ph idx="101" type="title" hasCustomPrompt="1"/>
-          </p:nvPr>
-        </p:nvSpPr>
-        <p:spPr>
-          <a:xfrm>
-            <a:off x="548640" y="347472"/>
-            <a:ext cx="11091672" cy="868680"/>
-          </a:xfrm>
-          <a:prstGeom prst="rect">
-            <a:avLst/>
-          </a:prstGeom>
-          <a:noFill/>
-          <a:ln/>
-        </p:spPr>
-        <p:txBody>
-          <a:bodyPr wrap="square" lIns="0" tIns="0" rIns="0" bIns="0" rtlCol="0" anchor="t"/>
-          <a:lstStyle/>
-          <a:p>
-            <a:pPr algn="l" indent="0" marL="0">
-              <a:buNone/>
-            </a:pPr>
-            <a:r>
-              <a:rPr lang="en-US" sz="2800" b="1" dirty="0">
-                <a:solidFill>
-                  <a:schemeClr val="accent1"/>
-                </a:solidFill>
-              </a:rPr>
-              <a:t>The database is a single reference for the LH₂ chain, from the liquefier to hydrogen gas at the import terminal, in 13 sections</a:t>
-            </a:r>
-            <a:endParaRPr lang="en-US" sz="2800" dirty="0"/>
-          </a:p>
-        </p:txBody>
-      </p:sp>
-      <p:sp>
-        <p:nvSpPr>
-          <p:cNvPr id="3" name="Text 1"/>
-          <p:cNvSpPr/>
-          <p:nvPr>
-            <p:ph idx="102" type="body" hasCustomPrompt="1"/>
-          </p:nvPr>
-        </p:nvSpPr>
-        <p:spPr>
-          <a:xfrm>
-            <a:off x="548640" y="6446520"/>
-            <a:ext cx="9875520" cy="274320"/>
-          </a:xfrm>
-          <a:prstGeom prst="rect">
-            <a:avLst/>
-          </a:prstGeom>
-          <a:noFill/>
-          <a:ln/>
-        </p:spPr>
-        <p:txBody>
-          <a:bodyPr wrap="square" lIns="0" tIns="0" rIns="0" bIns="0" rtlCol="0" anchor="ctr"/>
-          <a:lstStyle/>
-          <a:p>
-            <a:pPr indent="0" marL="0">
-              <a:buNone/>
-            </a:pPr>
-            <a:r>
-              <a:rPr lang="en-US" sz="1100" dirty="0">
-                <a:solidFill>
-                  <a:schemeClr val="tx1"/>
-                </a:solidFill>
-              </a:rPr>
-              <a:t>LiqH₂VC Database Rev 0 · scope and structure</a:t>
-            </a:r>
-            <a:endParaRPr lang="en-US" sz="1100" dirty="0"/>
-          </a:p>
-        </p:txBody>
-      </p:sp>
-      <p:sp>
-        <p:nvSpPr>
-          <p:cNvPr id="5" name="chain-step-1"/>
-          <p:cNvSpPr/>
-          <p:nvPr/>
-        </p:nvSpPr>
-        <p:spPr>
-          <a:xfrm>
-            <a:off x="548640" y="1508760"/>
-            <a:ext cx="2635758" cy="777240"/>
-          </a:xfrm>
-          <a:prstGeom prst="homePlate">
-            <a:avLst/>
-          </a:prstGeom>
-          <a:solidFill>
-            <a:srgbClr val="60269E"/>
-          </a:solidFill>
-          <a:ln w="12700">
-            <a:solidFill>
-              <a:srgbClr val="60269E"/>
-            </a:solidFill>
-            <a:prstDash val="solid"/>
-          </a:ln>
-        </p:spPr>
-      </p:sp>
-      <p:sp>
-        <p:nvSpPr>
-          <p:cNvPr id="6" name="Text 3"/>
-          <p:cNvSpPr txBox="1"/>
-          <p:nvPr/>
-        </p:nvSpPr>
-        <p:spPr>
-          <a:xfrm>
-            <a:off x="731520" y="1508760"/>
-            <a:ext cx="1949958" cy="777240"/>
-          </a:xfrm>
-          <a:prstGeom prst="rect">
-            <a:avLst/>
-          </a:prstGeom>
-          <a:noFill/>
-          <a:ln/>
-        </p:spPr>
-        <p:txBody>
-          <a:bodyPr wrap="square" lIns="0" tIns="0" rIns="0" bIns="0" rtlCol="0" anchor="ctr"/>
-          <a:lstStyle/>
-          <a:p>
-            <a:pPr indent="0" marL="0">
-              <a:buNone/>
-            </a:pPr>
-            <a:r>
-              <a:rPr lang="en-US" sz="1500" b="1" dirty="0">
-                <a:solidFill>
-                  <a:schemeClr val="bg1"/>
-                </a:solidFill>
-              </a:rPr>
-              <a:t>Liquefaction</a:t>
-            </a:r>
-            <a:endParaRPr lang="en-US" sz="1500" dirty="0"/>
-          </a:p>
-        </p:txBody>
-      </p:sp>
-      <p:sp>
-        <p:nvSpPr>
-          <p:cNvPr id="7" name="chain-step-2"/>
-          <p:cNvSpPr/>
-          <p:nvPr/>
-        </p:nvSpPr>
-        <p:spPr>
-          <a:xfrm>
-            <a:off x="3367278" y="1508760"/>
-            <a:ext cx="2635758" cy="777240"/>
-          </a:xfrm>
-          <a:prstGeom prst="chevron">
-            <a:avLst/>
-          </a:prstGeom>
-          <a:solidFill>
-            <a:srgbClr val="60269E"/>
-          </a:solidFill>
-          <a:ln w="12700">
-            <a:solidFill>
-              <a:srgbClr val="60269E"/>
-            </a:solidFill>
-            <a:prstDash val="solid"/>
-          </a:ln>
-        </p:spPr>
-      </p:sp>
-      <p:sp>
-        <p:nvSpPr>
-          <p:cNvPr id="8" name="Text 5"/>
-          <p:cNvSpPr txBox="1"/>
-          <p:nvPr/>
-        </p:nvSpPr>
-        <p:spPr>
-          <a:xfrm>
-            <a:off x="3778758" y="1508760"/>
-            <a:ext cx="1949958" cy="777240"/>
-          </a:xfrm>
-          <a:prstGeom prst="rect">
-            <a:avLst/>
-          </a:prstGeom>
-          <a:noFill/>
-          <a:ln/>
-        </p:spPr>
-        <p:txBody>
-          <a:bodyPr wrap="square" lIns="0" tIns="0" rIns="0" bIns="0" rtlCol="0" anchor="ctr"/>
-          <a:lstStyle/>
-          <a:p>
-            <a:pPr indent="0" marL="0">
-              <a:buNone/>
-            </a:pPr>
-            <a:r>
-              <a:rPr lang="en-US" sz="1500" b="1" dirty="0">
-                <a:solidFill>
-                  <a:schemeClr val="bg1"/>
-                </a:solidFill>
-              </a:rPr>
-              <a:t>Export storage &amp; loading</a:t>
-            </a:r>
-            <a:endParaRPr lang="en-US" sz="1500" dirty="0"/>
-          </a:p>
-        </p:txBody>
-      </p:sp>
-      <p:sp>
-        <p:nvSpPr>
-          <p:cNvPr id="9" name="chain-step-3"/>
-          <p:cNvSpPr/>
-          <p:nvPr/>
-        </p:nvSpPr>
-        <p:spPr>
-          <a:xfrm>
-            <a:off x="6185916" y="1508760"/>
-            <a:ext cx="2635758" cy="777240"/>
-          </a:xfrm>
-          <a:prstGeom prst="chevron">
-            <a:avLst/>
-          </a:prstGeom>
-          <a:solidFill>
-            <a:srgbClr val="60269E"/>
-          </a:solidFill>
-          <a:ln w="12700">
-            <a:solidFill>
-              <a:srgbClr val="60269E"/>
-            </a:solidFill>
-            <a:prstDash val="solid"/>
-          </a:ln>
-        </p:spPr>
-      </p:sp>
-      <p:sp>
-        <p:nvSpPr>
-          <p:cNvPr id="10" name="Text 7"/>
-          <p:cNvSpPr txBox="1"/>
-          <p:nvPr/>
-        </p:nvSpPr>
-        <p:spPr>
-          <a:xfrm>
-            <a:off x="6597396" y="1508760"/>
-            <a:ext cx="1949958" cy="777240"/>
-          </a:xfrm>
-          <a:prstGeom prst="rect">
-            <a:avLst/>
-          </a:prstGeom>
-          <a:noFill/>
-          <a:ln/>
-        </p:spPr>
-        <p:txBody>
-          <a:bodyPr wrap="square" lIns="0" tIns="0" rIns="0" bIns="0" rtlCol="0" anchor="ctr"/>
-          <a:lstStyle/>
-          <a:p>
-            <a:pPr indent="0" marL="0">
-              <a:buNone/>
-            </a:pPr>
-            <a:r>
-              <a:rPr lang="en-US" sz="1500" b="1" dirty="0">
-                <a:solidFill>
-                  <a:schemeClr val="bg1"/>
-                </a:solidFill>
-              </a:rPr>
-              <a:t>Shipping</a:t>
-            </a:r>
-            <a:endParaRPr lang="en-US" sz="1500" dirty="0"/>
-          </a:p>
-        </p:txBody>
-      </p:sp>
-      <p:sp>
-        <p:nvSpPr>
-          <p:cNvPr id="11" name="chain-step-4"/>
-          <p:cNvSpPr/>
-          <p:nvPr/>
-        </p:nvSpPr>
-        <p:spPr>
-          <a:xfrm>
-            <a:off x="9004554" y="1508760"/>
-            <a:ext cx="2635758" cy="777240"/>
-          </a:xfrm>
-          <a:prstGeom prst="chevron">
-            <a:avLst/>
-          </a:prstGeom>
-          <a:solidFill>
-            <a:srgbClr val="60269E"/>
-          </a:solidFill>
-          <a:ln w="12700">
-            <a:solidFill>
-              <a:srgbClr val="60269E"/>
-            </a:solidFill>
-            <a:prstDash val="solid"/>
-          </a:ln>
-        </p:spPr>
-      </p:sp>
-      <p:sp>
-        <p:nvSpPr>
-          <p:cNvPr id="12" name="Text 9"/>
-          <p:cNvSpPr txBox="1"/>
-          <p:nvPr/>
-        </p:nvSpPr>
-        <p:spPr>
-          <a:xfrm>
-            <a:off x="9416034" y="1508760"/>
-            <a:ext cx="1949958" cy="777240"/>
-          </a:xfrm>
-          <a:prstGeom prst="rect">
-            <a:avLst/>
-          </a:prstGeom>
-          <a:noFill/>
-          <a:ln/>
-        </p:spPr>
-        <p:txBody>
-          <a:bodyPr wrap="square" lIns="0" tIns="0" rIns="0" bIns="0" rtlCol="0" anchor="ctr"/>
-          <a:lstStyle/>
-          <a:p>
-            <a:pPr indent="0" marL="0">
-              <a:buNone/>
-            </a:pPr>
-            <a:r>
-              <a:rPr lang="en-US" sz="1500" b="1" dirty="0">
-                <a:solidFill>
-                  <a:schemeClr val="bg1"/>
-                </a:solidFill>
-              </a:rPr>
-              <a:t>Import &amp; regasification</a:t>
-            </a:r>
-            <a:endParaRPr lang="en-US" sz="1500" dirty="0"/>
-          </a:p>
-        </p:txBody>
-      </p:sp>
-      <p:sp>
-        <p:nvSpPr>
-          <p:cNvPr id="13" name="covers-1"/>
-          <p:cNvSpPr/>
-          <p:nvPr/>
-        </p:nvSpPr>
-        <p:spPr>
-          <a:xfrm>
-            <a:off x="548640" y="2468880"/>
-            <a:ext cx="2635758" cy="1600200"/>
-          </a:xfrm>
-          <a:prstGeom prst="roundRect">
-            <a:avLst>
-              <a:gd name="adj" fmla="val 3429"/>
-            </a:avLst>
-          </a:prstGeom>
-          <a:solidFill>
-            <a:srgbClr val="F1EAF6"/>
-          </a:solidFill>
-          <a:ln w="9525">
-            <a:solidFill>
-              <a:srgbClr val="F1EAF6"/>
-            </a:solidFill>
-            <a:prstDash val="solid"/>
-          </a:ln>
-        </p:spPr>
-      </p:sp>
-      <p:sp>
-        <p:nvSpPr>
-          <p:cNvPr id="14" name="Text 11"/>
-          <p:cNvSpPr txBox="1"/>
-          <p:nvPr/>
-        </p:nvSpPr>
-        <p:spPr>
-          <a:xfrm>
-            <a:off x="713232" y="2606040"/>
-            <a:ext cx="2306574" cy="868680"/>
-          </a:xfrm>
-          <a:prstGeom prst="rect">
-            <a:avLst/>
-          </a:prstGeom>
-          <a:noFill/>
-          <a:ln/>
-        </p:spPr>
-        <p:txBody>
-          <a:bodyPr wrap="square" lIns="0" tIns="0" rIns="0" bIns="0" rtlCol="0" anchor="t"/>
-          <a:lstStyle/>
-          <a:p>
-            <a:pPr indent="0" marL="0">
-              <a:buNone/>
-            </a:pPr>
-            <a:r>
-              <a:rPr lang="en-US" sz="1500" dirty="0">
-                <a:solidFill>
-                  <a:schemeClr val="tx1"/>
-                </a:solidFill>
-              </a:rPr>
-              <a:t>Properties, liquefaction cycles, technology players, plants built</a:t>
-            </a:r>
-            <a:endParaRPr lang="en-US" sz="1500" dirty="0"/>
-          </a:p>
-        </p:txBody>
-      </p:sp>
-      <p:sp>
-        <p:nvSpPr>
-          <p:cNvPr id="15" name="Text 12"/>
-          <p:cNvSpPr txBox="1"/>
-          <p:nvPr/>
-        </p:nvSpPr>
-        <p:spPr>
-          <a:xfrm>
-            <a:off x="713232" y="3520440"/>
-            <a:ext cx="2306574" cy="411480"/>
-          </a:xfrm>
-          <a:prstGeom prst="rect">
-            <a:avLst/>
-          </a:prstGeom>
-          <a:noFill/>
-          <a:ln/>
-        </p:spPr>
-        <p:txBody>
-          <a:bodyPr wrap="square" lIns="0" tIns="0" rIns="0" bIns="0" rtlCol="0" anchor="t"/>
-          <a:lstStyle/>
-          <a:p>
-            <a:pPr indent="0" marL="0">
-              <a:buNone/>
-            </a:pPr>
-            <a:r>
-              <a:rPr lang="en-US" sz="1300" b="1" dirty="0">
-                <a:solidFill>
-                  <a:schemeClr val="accent4"/>
-                </a:solidFill>
-              </a:rPr>
-              <a:t>Sections 1–5, 8.1, 10.1</a:t>
-            </a:r>
-            <a:endParaRPr lang="en-US" sz="1300" dirty="0"/>
-          </a:p>
-        </p:txBody>
-      </p:sp>
-      <p:sp>
-        <p:nvSpPr>
-          <p:cNvPr id="16" name="covers-2"/>
-          <p:cNvSpPr/>
-          <p:nvPr/>
-        </p:nvSpPr>
-        <p:spPr>
-          <a:xfrm>
-            <a:off x="3367278" y="2468880"/>
-            <a:ext cx="2635758" cy="1600200"/>
-          </a:xfrm>
-          <a:prstGeom prst="roundRect">
-            <a:avLst>
-              <a:gd name="adj" fmla="val 3429"/>
-            </a:avLst>
-          </a:prstGeom>
-          <a:solidFill>
-            <a:srgbClr val="F1EAF6"/>
-          </a:solidFill>
-          <a:ln w="9525">
-            <a:solidFill>
-              <a:srgbClr val="F1EAF6"/>
-            </a:solidFill>
-            <a:prstDash val="solid"/>
-          </a:ln>
-        </p:spPr>
-      </p:sp>
-      <p:sp>
-        <p:nvSpPr>
-          <p:cNvPr id="17" name="Text 14"/>
-          <p:cNvSpPr txBox="1"/>
-          <p:nvPr/>
-        </p:nvSpPr>
-        <p:spPr>
-          <a:xfrm>
-            <a:off x="3531870" y="2606040"/>
-            <a:ext cx="2306574" cy="868680"/>
-          </a:xfrm>
-          <a:prstGeom prst="rect">
-            <a:avLst/>
-          </a:prstGeom>
-          <a:noFill/>
-          <a:ln/>
-        </p:spPr>
-        <p:txBody>
-          <a:bodyPr wrap="square" lIns="0" tIns="0" rIns="0" bIns="0" rtlCol="0" anchor="t"/>
-          <a:lstStyle/>
-          <a:p>
-            <a:pPr indent="0" marL="0">
-              <a:buNone/>
-            </a:pPr>
-            <a:r>
-              <a:rPr lang="en-US" sz="1500" dirty="0">
-                <a:solidFill>
-                  <a:schemeClr val="tx1"/>
-                </a:solidFill>
-              </a:rPr>
-              <a:t>Tank types, boil-off, export-terminal cost</a:t>
-            </a:r>
-            <a:endParaRPr lang="en-US" sz="1500" dirty="0"/>
-          </a:p>
-        </p:txBody>
-      </p:sp>
-      <p:sp>
-        <p:nvSpPr>
-          <p:cNvPr id="18" name="Text 15"/>
-          <p:cNvSpPr txBox="1"/>
-          <p:nvPr/>
-        </p:nvSpPr>
-        <p:spPr>
-          <a:xfrm>
-            <a:off x="3531870" y="3520440"/>
-            <a:ext cx="2306574" cy="411480"/>
-          </a:xfrm>
-          <a:prstGeom prst="rect">
-            <a:avLst/>
-          </a:prstGeom>
-          <a:noFill/>
-          <a:ln/>
-        </p:spPr>
-        <p:txBody>
-          <a:bodyPr wrap="square" lIns="0" tIns="0" rIns="0" bIns="0" rtlCol="0" anchor="t"/>
-          <a:lstStyle/>
-          <a:p>
-            <a:pPr indent="0" marL="0">
-              <a:buNone/>
-            </a:pPr>
-            <a:r>
-              <a:rPr lang="en-US" sz="1300" b="1" dirty="0">
-                <a:solidFill>
-                  <a:schemeClr val="accent4"/>
-                </a:solidFill>
-              </a:rPr>
-              <a:t>Sections 6, 8.2, 10.2</a:t>
-            </a:r>
-            <a:endParaRPr lang="en-US" sz="1300" dirty="0"/>
-          </a:p>
-        </p:txBody>
-      </p:sp>
-      <p:sp>
-        <p:nvSpPr>
-          <p:cNvPr id="19" name="covers-3"/>
-          <p:cNvSpPr/>
-          <p:nvPr/>
-        </p:nvSpPr>
-        <p:spPr>
-          <a:xfrm>
-            <a:off x="6185916" y="2468880"/>
-            <a:ext cx="2635758" cy="1600200"/>
-          </a:xfrm>
-          <a:prstGeom prst="roundRect">
-            <a:avLst>
-              <a:gd name="adj" fmla="val 3429"/>
-            </a:avLst>
-          </a:prstGeom>
-          <a:solidFill>
-            <a:srgbClr val="F1EAF6"/>
-          </a:solidFill>
-          <a:ln w="9525">
-            <a:solidFill>
-              <a:srgbClr val="F1EAF6"/>
-            </a:solidFill>
-            <a:prstDash val="solid"/>
-          </a:ln>
-        </p:spPr>
-      </p:sp>
-      <p:sp>
-        <p:nvSpPr>
-          <p:cNvPr id="20" name="Text 17"/>
-          <p:cNvSpPr txBox="1"/>
-          <p:nvPr/>
-        </p:nvSpPr>
-        <p:spPr>
-          <a:xfrm>
-            <a:off x="6350508" y="2606040"/>
-            <a:ext cx="2306574" cy="868680"/>
-          </a:xfrm>
-          <a:prstGeom prst="rect">
-            <a:avLst/>
-          </a:prstGeom>
-          <a:noFill/>
-          <a:ln/>
-        </p:spPr>
-        <p:txBody>
-          <a:bodyPr wrap="square" lIns="0" tIns="0" rIns="0" bIns="0" rtlCol="0" anchor="t"/>
-          <a:lstStyle/>
-          <a:p>
-            <a:pPr indent="0" marL="0">
-              <a:buNone/>
-            </a:pPr>
-            <a:r>
-              <a:rPr lang="en-US" sz="1500" dirty="0">
-                <a:solidFill>
-                  <a:schemeClr val="tx1"/>
-                </a:solidFill>
-              </a:rPr>
-              <a:t>LH₂ carriers, marine projects, road and rail, ship boil-off</a:t>
-            </a:r>
-            <a:endParaRPr lang="en-US" sz="1500" dirty="0"/>
-          </a:p>
-        </p:txBody>
-      </p:sp>
-      <p:sp>
-        <p:nvSpPr>
-          <p:cNvPr id="21" name="Text 18"/>
-          <p:cNvSpPr txBox="1"/>
-          <p:nvPr/>
-        </p:nvSpPr>
-        <p:spPr>
-          <a:xfrm>
-            <a:off x="6350508" y="3520440"/>
-            <a:ext cx="2306574" cy="411480"/>
-          </a:xfrm>
-          <a:prstGeom prst="rect">
-            <a:avLst/>
-          </a:prstGeom>
-          <a:noFill/>
-          <a:ln/>
-        </p:spPr>
-        <p:txBody>
-          <a:bodyPr wrap="square" lIns="0" tIns="0" rIns="0" bIns="0" rtlCol="0" anchor="t"/>
-          <a:lstStyle/>
-          <a:p>
-            <a:pPr indent="0" marL="0">
-              <a:buNone/>
-            </a:pPr>
-            <a:r>
-              <a:rPr lang="en-US" sz="1300" b="1" dirty="0">
-                <a:solidFill>
-                  <a:schemeClr val="accent4"/>
-                </a:solidFill>
-              </a:rPr>
-              <a:t>Sections 7, 10.3, 12.2</a:t>
-            </a:r>
-            <a:endParaRPr lang="en-US" sz="1300" dirty="0"/>
-          </a:p>
-        </p:txBody>
-      </p:sp>
-      <p:sp>
-        <p:nvSpPr>
-          <p:cNvPr id="22" name="covers-4"/>
-          <p:cNvSpPr/>
-          <p:nvPr/>
-        </p:nvSpPr>
-        <p:spPr>
-          <a:xfrm>
-            <a:off x="9004554" y="2468880"/>
-            <a:ext cx="2635758" cy="1600200"/>
-          </a:xfrm>
-          <a:prstGeom prst="roundRect">
-            <a:avLst>
-              <a:gd name="adj" fmla="val 3429"/>
-            </a:avLst>
-          </a:prstGeom>
-          <a:solidFill>
-            <a:srgbClr val="F1EAF6"/>
-          </a:solidFill>
-          <a:ln w="9525">
-            <a:solidFill>
-              <a:srgbClr val="F1EAF6"/>
-            </a:solidFill>
-            <a:prstDash val="solid"/>
-          </a:ln>
-        </p:spPr>
-      </p:sp>
-      <p:sp>
-        <p:nvSpPr>
-          <p:cNvPr id="23" name="Text 20"/>
-          <p:cNvSpPr txBox="1"/>
-          <p:nvPr/>
-        </p:nvSpPr>
-        <p:spPr>
-          <a:xfrm>
-            <a:off x="9169146" y="2606040"/>
-            <a:ext cx="2306574" cy="868680"/>
-          </a:xfrm>
-          <a:prstGeom prst="rect">
-            <a:avLst/>
-          </a:prstGeom>
-          <a:noFill/>
-          <a:ln/>
-        </p:spPr>
-        <p:txBody>
-          <a:bodyPr wrap="square" lIns="0" tIns="0" rIns="0" bIns="0" rtlCol="0" anchor="t"/>
-          <a:lstStyle/>
-          <a:p>
-            <a:pPr indent="0" marL="0">
-              <a:buNone/>
-            </a:pPr>
-            <a:r>
-              <a:rPr lang="en-US" sz="1500" dirty="0">
-                <a:solidFill>
-                  <a:schemeClr val="tx1"/>
-                </a:solidFill>
-              </a:rPr>
-              <a:t>Vaporisers and the receiving terminal</a:t>
-            </a:r>
-            <a:endParaRPr lang="en-US" sz="1500" dirty="0"/>
-          </a:p>
-        </p:txBody>
-      </p:sp>
-      <p:sp>
-        <p:nvSpPr>
-          <p:cNvPr id="24" name="Text 21"/>
-          <p:cNvSpPr txBox="1"/>
-          <p:nvPr/>
-        </p:nvSpPr>
-        <p:spPr>
-          <a:xfrm>
-            <a:off x="9169146" y="3520440"/>
-            <a:ext cx="2306574" cy="411480"/>
-          </a:xfrm>
-          <a:prstGeom prst="rect">
-            <a:avLst/>
-          </a:prstGeom>
-          <a:noFill/>
-          <a:ln/>
-        </p:spPr>
-        <p:txBody>
-          <a:bodyPr wrap="square" lIns="0" tIns="0" rIns="0" bIns="0" rtlCol="0" anchor="t"/>
-          <a:lstStyle/>
-          <a:p>
-            <a:pPr indent="0" marL="0">
-              <a:buNone/>
-            </a:pPr>
-            <a:r>
-              <a:rPr lang="en-US" sz="1300" b="1" dirty="0">
-                <a:solidFill>
-                  <a:schemeClr val="accent4"/>
-                </a:solidFill>
-              </a:rPr>
-              <a:t>Sections 9, 10.4</a:t>
-            </a:r>
-            <a:endParaRPr lang="en-US" sz="1300" dirty="0"/>
-          </a:p>
-        </p:txBody>
-      </p:sp>
-      <p:sp>
-        <p:nvSpPr>
-          <p:cNvPr id="25" name="cross-cutting"/>
-          <p:cNvSpPr/>
-          <p:nvPr/>
-        </p:nvSpPr>
-        <p:spPr>
-          <a:xfrm>
-            <a:off x="548640" y="4251960"/>
-            <a:ext cx="11091672" cy="685800"/>
-          </a:xfrm>
-          <a:prstGeom prst="roundRect">
-            <a:avLst>
-              <a:gd name="adj" fmla="val 8000"/>
-            </a:avLst>
-          </a:prstGeom>
-          <a:solidFill>
-            <a:srgbClr val="FFFFFF"/>
-          </a:solidFill>
-          <a:ln w="9525">
-            <a:solidFill>
-              <a:srgbClr val="B4AAE6"/>
-            </a:solidFill>
-            <a:prstDash val="solid"/>
-          </a:ln>
-        </p:spPr>
-      </p:sp>
-      <p:sp>
-        <p:nvSpPr>
-          <p:cNvPr id="26" name="Text 23"/>
-          <p:cNvSpPr txBox="1"/>
-          <p:nvPr/>
-        </p:nvSpPr>
-        <p:spPr>
-          <a:xfrm>
-            <a:off x="731520" y="4251960"/>
-            <a:ext cx="10725912" cy="685800"/>
-          </a:xfrm>
-          <a:prstGeom prst="rect">
-            <a:avLst/>
-          </a:prstGeom>
-          <a:noFill/>
-          <a:ln/>
-        </p:spPr>
-        <p:txBody>
-          <a:bodyPr wrap="square" lIns="0" tIns="0" rIns="0" bIns="0" rtlCol="0" anchor="ctr"/>
-          <a:lstStyle/>
-          <a:p>
-            <a:pPr indent="0" marL="0">
-              <a:buNone/>
-            </a:pPr>
-            <a:r>
-              <a:rPr lang="en-US" sz="1500" b="1" dirty="0">
-                <a:solidFill>
-                  <a:schemeClr val="accent4"/>
-                </a:solidFill>
-              </a:rPr>
-              <a:t>Across the chain:  </a:t>
-            </a:r>
-            <a:pPr indent="0" marL="0">
-              <a:buNone/>
-            </a:pPr>
-            <a:r>
-              <a:rPr lang="en-US" sz="1500" dirty="0">
-                <a:solidFill>
-                  <a:schemeClr val="tx1"/>
-                </a:solidFill>
-              </a:rPr>
-              <a:t>Export-facility cost (8)  ·  Regulation (11)  ·  Key challenges (12)  ·  LH₂ vs NH₃ as hydrogen carrier (13)</a:t>
-            </a:r>
-            <a:endParaRPr lang="en-US" sz="1500" dirty="0"/>
-          </a:p>
-        </p:txBody>
-      </p:sp>
-      <p:sp>
-        <p:nvSpPr>
-          <p:cNvPr id="27" name="basis-note"/>
-          <p:cNvSpPr txBox="1"/>
-          <p:nvPr/>
-        </p:nvSpPr>
-        <p:spPr>
-          <a:xfrm>
-            <a:off x="548640" y="5166360"/>
-            <a:ext cx="11091672" cy="1097280"/>
-          </a:xfrm>
-          <a:prstGeom prst="rect">
-            <a:avLst/>
-          </a:prstGeom>
-          <a:noFill/>
-          <a:ln/>
-        </p:spPr>
-        <p:txBody>
-          <a:bodyPr wrap="square" lIns="0" tIns="0" rIns="0" bIns="0" rtlCol="0" anchor="t"/>
-          <a:lstStyle/>
-          <a:p>
-            <a:pPr indent="0" marL="0">
-              <a:buNone/>
-            </a:pPr>
-            <a:r>
-              <a:rPr lang="en-US" sz="1100" dirty="0">
-                <a:solidFill>
-                  <a:schemeClr val="tx1"/>
-                </a:solidFill>
-              </a:rPr>
-              <a:t>Boundary: gaseous hydrogen at the export plant to gaseous hydrogen at import send-out; producing the hydrogen is outside the database. Use: technology benchmarking, project screening and preliminary techno-economic assessment.</a:t>
-            </a:r>
-            <a:endParaRPr lang="en-US" sz="1100" dirty="0"/>
-          </a:p>
-          <a:p>
-            <a:pPr indent="0" marL="0">
-              <a:buNone/>
-            </a:pPr>
-            <a:r>
-              <a:rPr lang="en-US" sz="1100" dirty="0">
-                <a:solidFill>
-                  <a:schemeClr val="tx1"/>
-                </a:solidFill>
-              </a:rPr>
-              <a:t>Rev 0, 18 Sep 2026. Prepared by Jasmin Suraya and Ungku M Zulhilmi Ungku Zakaria; reviewed by Wan M Ikhwan Wan Yussoff and Octavian Partenie; approved by Danial Khairi Ahmad; accepted by Alex Bower.</a:t>
-            </a:r>
-            <a:endParaRPr lang="en-US" sz="1100" dirty="0"/>
-          </a:p>
-        </p:txBody>
-      </p:sp>
-      <p:sp>
-        <p:nvSpPr>
-          <p:cNvPr id="25" name="Slide Number Placeholder 0"/>
-          <p:cNvSpPr>
-            <a:spLocks noGrp="1"/>
-          </p:cNvSpPr>
-          <p:nvPr>
-            <p:ph type="sldNum" sz="quarter" idx="4294967295"/>
-          </p:nvPr>
-        </p:nvSpPr>
-        <p:spPr>
-          <a:xfrm>
-            <a:off x="11228832" y="6446520"/>
-            <a:ext cx="411480" cy="274320"/>
-          </a:xfrm>
-          <a:prstGeom prst="rect">
-            <a:avLst/>
-          </a:prstGeom>
-          <a:extLst>
-            <a:ext uri="{C572A759-6A51-4108-AA02-DFA0A04FC94B}">
-              <ma14:wrappingTextBoxFlag xmlns:ma14="http://schemas.microsoft.com/office/mac/drawingml/2011/main" val="0"/>
-            </a:ext>
-          </a:extLst>
-        </p:spPr>
-        <p:txBody>
-          <a:bodyPr/>
-          <a:lstStyle>
-            <a:lvl1pPr>
-              <a:defRPr sz="1100">
-                <a:solidFill>
-                  <a:schemeClr val="tx1"/>
-                </a:solidFill>
-              </a:defRPr>
-            </a:lvl1pPr>
-          </a:lstStyle>
-          <a:p>
-            <a:pPr algn="r"/>
-            <a:fld id="{F7021451-1387-4CA6-816F-3879F97B5CBC}" type="slidenum">
-              <a:rPr b="0" lang="en-US"/>
-              <a:t>2</a:t>
-            </a:fld>
-            <a:endParaRPr lang="en-US"/>
-          </a:p>
-        </p:txBody>
-      </p:sp>
-    </p:spTree>
-  </p:cSld>
-  <p:clrMapOvr>
-    <a:masterClrMapping/>
-  </p:clrMapOvr>
-</p:sld>
-</file>
-
-<file path=ppt/slides/slide20.xml><?xml version="1.0" encoding="utf-8"?>
-<p:sld xmlns:a="http://schemas.openxmlformats.org/drawingml/2006/main" xmlns:r="http://schemas.openxmlformats.org/officeDocument/2006/relationships" xmlns:p="http://schemas.openxmlformats.org/presentationml/2006/main">
-  <p:cSld name="Slide 20">
+  <p:cSld name="Slide 23">
     <p:spTree>
       <p:nvGrpSpPr>
         <p:cNvPr id="1" name=""/>
